--- a/09_meetings/CYPRUS_Sales_Review_2026/ISZE_CYPRUS_Sales_Review_FY2027_ModeA_only.pptx
+++ b/09_meetings/CYPRUS_Sales_Review_2026/ISZE_CYPRUS_Sales_Review_FY2027_ModeA_only.pptx
@@ -23,8 +23,6 @@
     <p:sldId id="271" r:id="rId22"/>
     <p:sldId id="272" r:id="rId23"/>
     <p:sldId id="273" r:id="rId24"/>
-    <p:sldId id="274" r:id="rId25"/>
-    <p:sldId id="275" r:id="rId26"/>
   </p:sldIdLst>
   <p:sldSz cx="12188952" cy="6858000" type="screen4x3"/>
   <p:notesSz cx="6858000" cy="9144000"/>
@@ -3454,7 +3452,7 @@
                 </a:solidFill>
                 <a:latin typeface="Calibri"/>
               </a:rPr>
-              <a:t>GPS</a:t>
+              <a:t>IDS 2026 — DEALER STANDARD</a:t>
             </a:r>
           </a:p>
         </p:txBody>
@@ -3489,7 +3487,7 @@
                 </a:solidFill>
                 <a:latin typeface="Calibri"/>
               </a:rPr>
-              <a:t>GPS Capture: 58.8%</a:t>
+              <a:t>IDS 2026: Cyprus averages 75.0%, below the 79.4% network benchmark</a:t>
             </a:r>
           </a:p>
         </p:txBody>
@@ -3568,860 +3566,6 @@
                 <a:latin typeface="Calibri"/>
               </a:rPr>
               <a:t>10</a:t>
-            </a:r>
-          </a:p>
-        </p:txBody>
-      </p:sp>
-      <p:sp>
-        <p:nvSpPr>
-          <p:cNvPr id="8" name="TextBox 7"/>
-          <p:cNvSpPr txBox="1"/>
-          <p:nvPr/>
-        </p:nvSpPr>
-        <p:spPr>
-          <a:xfrm>
-            <a:off x="292608" y="1234440"/>
-            <a:ext cx="10515600" cy="3200400"/>
-          </a:xfrm>
-          <a:prstGeom prst="rect">
-            <a:avLst/>
-          </a:prstGeom>
-          <a:noFill/>
-        </p:spPr>
-        <p:txBody>
-          <a:bodyPr wrap="square">
-            <a:spAutoFit/>
-          </a:bodyPr>
-          <a:lstStyle/>
-          <a:p>
-            <a:pPr>
-              <a:lnSpc>
-                <a:spcPct val="125000"/>
-              </a:lnSpc>
-              <a:spcAft>
-                <a:spcPts val="1000"/>
-              </a:spcAft>
-            </a:pPr>
-            <a:r>
-              <a:rPr sz="1500" b="1">
-                <a:solidFill>
-                  <a:srgbClr val="CC0E1E"/>
-                </a:solidFill>
-                <a:latin typeface="Calibri"/>
-              </a:rPr>
-              <a:t>—  </a:t>
-            </a:r>
-            <a:r>
-              <a:rPr sz="1500">
-                <a:solidFill>
-                  <a:srgbClr val="1A1A1A"/>
-                </a:solidFill>
-                <a:latin typeface="Calibri"/>
-              </a:rPr>
-              <a:t>GPS measures your actual parts purchases against the full potential of your fleet.</a:t>
-            </a:r>
-          </a:p>
-          <a:p>
-            <a:pPr>
-              <a:lnSpc>
-                <a:spcPct val="125000"/>
-              </a:lnSpc>
-              <a:spcAft>
-                <a:spcPts val="1000"/>
-              </a:spcAft>
-            </a:pPr>
-            <a:r>
-              <a:rPr sz="1500" b="1">
-                <a:solidFill>
-                  <a:srgbClr val="CC0E1E"/>
-                </a:solidFill>
-                <a:latin typeface="Calibri"/>
-              </a:rPr>
-              <a:t>—  </a:t>
-            </a:r>
-            <a:r>
-              <a:rPr sz="1500">
-                <a:solidFill>
-                  <a:srgbClr val="1A1A1A"/>
-                </a:solidFill>
-                <a:latin typeface="Calibri"/>
-              </a:rPr>
-              <a:t>Cyprus today: 58.8% (FY2026 purchases against the CY2025 fleet potential).</a:t>
-            </a:r>
-          </a:p>
-          <a:p>
-            <a:pPr>
-              <a:lnSpc>
-                <a:spcPct val="125000"/>
-              </a:lnSpc>
-              <a:spcAft>
-                <a:spcPts val="1000"/>
-              </a:spcAft>
-            </a:pPr>
-            <a:r>
-              <a:rPr sz="1500" b="1">
-                <a:solidFill>
-                  <a:srgbClr val="CC0E1E"/>
-                </a:solidFill>
-                <a:latin typeface="Calibri"/>
-              </a:rPr>
-              <a:t>—  </a:t>
-            </a:r>
-            <a:r>
-              <a:rPr sz="1500">
-                <a:solidFill>
-                  <a:srgbClr val="1A1A1A"/>
-                </a:solidFill>
-                <a:latin typeface="Calibri"/>
-              </a:rPr>
-              <a:t>Fleet potential: EUR 676K on 2,308 vehicles.</a:t>
-            </a:r>
-          </a:p>
-          <a:p>
-            <a:pPr>
-              <a:lnSpc>
-                <a:spcPct val="125000"/>
-              </a:lnSpc>
-              <a:spcAft>
-                <a:spcPts val="1000"/>
-              </a:spcAft>
-            </a:pPr>
-            <a:r>
-              <a:rPr sz="1500" b="1">
-                <a:solidFill>
-                  <a:srgbClr val="CC0E1E"/>
-                </a:solidFill>
-                <a:latin typeface="Calibri"/>
-              </a:rPr>
-              <a:t>—  </a:t>
-            </a:r>
-            <a:r>
-              <a:rPr sz="1500">
-                <a:solidFill>
-                  <a:srgbClr val="1A1A1A"/>
-                </a:solidFill>
-                <a:latin typeface="Calibri"/>
-              </a:rPr>
-              <a:t>Real, sustained headroom above 58.8% — the service-parts and SPA discussion are both direct levers on it.</a:t>
-            </a:r>
-          </a:p>
-        </p:txBody>
-      </p:sp>
-    </p:spTree>
-  </p:cSld>
-  <p:clrMapOvr>
-    <a:masterClrMapping/>
-  </p:clrMapOvr>
-</p:sld>
-</file>
-
-<file path=ppt/slides/slide11.xml><?xml version="1.0" encoding="utf-8"?>
-<p:sld xmlns:a="http://schemas.openxmlformats.org/drawingml/2006/main" xmlns:p="http://schemas.openxmlformats.org/presentationml/2006/main" xmlns:r="http://schemas.openxmlformats.org/officeDocument/2006/relationships">
-  <p:cSld>
-    <p:bg>
-      <p:bgPr>
-        <a:solidFill>
-          <a:srgbClr val="FFFFFF"/>
-        </a:solidFill>
-        <a:effectLst/>
-      </p:bgPr>
-    </p:bg>
-    <p:spTree>
-      <p:nvGrpSpPr>
-        <p:cNvPr id="1" name=""/>
-        <p:cNvGrpSpPr/>
-        <p:nvPr/>
-      </p:nvGrpSpPr>
-      <p:grpSpPr/>
-      <p:pic>
-        <p:nvPicPr>
-          <p:cNvPr id="2" name="Picture 1" descr="isuzu_logo_red.png"/>
-          <p:cNvPicPr>
-            <a:picLocks noChangeAspect="1"/>
-          </p:cNvPicPr>
-          <p:nvPr/>
-        </p:nvPicPr>
-        <p:blipFill>
-          <a:blip r:embed="rId2"/>
-          <a:stretch>
-            <a:fillRect/>
-          </a:stretch>
-        </p:blipFill>
-        <p:spPr>
-          <a:xfrm>
-            <a:off x="256032" y="6263640"/>
-            <a:ext cx="1679787" cy="292608"/>
-          </a:xfrm>
-          <a:prstGeom prst="rect">
-            <a:avLst/>
-          </a:prstGeom>
-        </p:spPr>
-      </p:pic>
-      <p:sp>
-        <p:nvSpPr>
-          <p:cNvPr id="3" name="Rectangle 2"/>
-          <p:cNvSpPr/>
-          <p:nvPr/>
-        </p:nvSpPr>
-        <p:spPr>
-          <a:xfrm>
-            <a:off x="0" y="6766560"/>
-            <a:ext cx="12188952" cy="91440"/>
-          </a:xfrm>
-          <a:prstGeom prst="rect">
-            <a:avLst/>
-          </a:prstGeom>
-          <a:solidFill>
-            <a:srgbClr val="CC0E1E"/>
-          </a:solidFill>
-          <a:ln>
-            <a:noFill/>
-          </a:ln>
-        </p:spPr>
-        <p:style>
-          <a:lnRef idx="1">
-            <a:schemeClr val="accent1"/>
-          </a:lnRef>
-          <a:fillRef idx="3">
-            <a:schemeClr val="accent1"/>
-          </a:fillRef>
-          <a:effectRef idx="2">
-            <a:schemeClr val="accent1"/>
-          </a:effectRef>
-          <a:fontRef idx="minor">
-            <a:schemeClr val="lt1"/>
-          </a:fontRef>
-        </p:style>
-        <p:txBody>
-          <a:bodyPr rtlCol="0" anchor="ctr"/>
-          <a:lstStyle/>
-          <a:p>
-            <a:pPr algn="ctr"/>
-          </a:p>
-        </p:txBody>
-      </p:sp>
-      <p:sp>
-        <p:nvSpPr>
-          <p:cNvPr id="4" name="TextBox 3"/>
-          <p:cNvSpPr txBox="1"/>
-          <p:nvPr/>
-        </p:nvSpPr>
-        <p:spPr>
-          <a:xfrm>
-            <a:off x="292608" y="201168"/>
-            <a:ext cx="11430000" cy="274320"/>
-          </a:xfrm>
-          <a:prstGeom prst="rect">
-            <a:avLst/>
-          </a:prstGeom>
-          <a:noFill/>
-        </p:spPr>
-        <p:txBody>
-          <a:bodyPr wrap="square">
-            <a:spAutoFit/>
-          </a:bodyPr>
-          <a:lstStyle/>
-          <a:p>
-            <a:pPr algn="l"/>
-            <a:r>
-              <a:rPr sz="1100" b="1">
-                <a:solidFill>
-                  <a:srgbClr val="CC0E1E"/>
-                </a:solidFill>
-                <a:latin typeface="Calibri"/>
-              </a:rPr>
-              <a:t>SERVICE-PARTS COVERAGE</a:t>
-            </a:r>
-          </a:p>
-        </p:txBody>
-      </p:sp>
-      <p:sp>
-        <p:nvSpPr>
-          <p:cNvPr id="5" name="TextBox 4"/>
-          <p:cNvSpPr txBox="1"/>
-          <p:nvPr/>
-        </p:nvSpPr>
-        <p:spPr>
-          <a:xfrm>
-            <a:off x="292608" y="475488"/>
-            <a:ext cx="11612880" cy="566928"/>
-          </a:xfrm>
-          <a:prstGeom prst="rect">
-            <a:avLst/>
-          </a:prstGeom>
-          <a:noFill/>
-        </p:spPr>
-        <p:txBody>
-          <a:bodyPr wrap="square">
-            <a:spAutoFit/>
-          </a:bodyPr>
-          <a:lstStyle/>
-          <a:p>
-            <a:pPr algn="l"/>
-            <a:r>
-              <a:rPr sz="2500" b="1">
-                <a:solidFill>
-                  <a:srgbClr val="1A1A1A"/>
-                </a:solidFill>
-                <a:latin typeface="Calibri"/>
-              </a:rPr>
-              <a:t>Service-parts coverage: brake rotor is the clear gap</a:t>
-            </a:r>
-          </a:p>
-        </p:txBody>
-      </p:sp>
-      <p:sp>
-        <p:nvSpPr>
-          <p:cNvPr id="6" name="Rectangle 5"/>
-          <p:cNvSpPr/>
-          <p:nvPr/>
-        </p:nvSpPr>
-        <p:spPr>
-          <a:xfrm>
-            <a:off x="292608" y="1005840"/>
-            <a:ext cx="11612880" cy="28000"/>
-          </a:xfrm>
-          <a:prstGeom prst="rect">
-            <a:avLst/>
-          </a:prstGeom>
-          <a:solidFill>
-            <a:srgbClr val="CC0E1E"/>
-          </a:solidFill>
-          <a:ln>
-            <a:noFill/>
-          </a:ln>
-        </p:spPr>
-        <p:style>
-          <a:lnRef idx="1">
-            <a:schemeClr val="accent1"/>
-          </a:lnRef>
-          <a:fillRef idx="3">
-            <a:schemeClr val="accent1"/>
-          </a:fillRef>
-          <a:effectRef idx="2">
-            <a:schemeClr val="accent1"/>
-          </a:effectRef>
-          <a:fontRef idx="minor">
-            <a:schemeClr val="lt1"/>
-          </a:fontRef>
-        </p:style>
-        <p:txBody>
-          <a:bodyPr rtlCol="0" anchor="ctr"/>
-          <a:lstStyle/>
-          <a:p>
-            <a:pPr algn="ctr"/>
-          </a:p>
-        </p:txBody>
-      </p:sp>
-      <p:sp>
-        <p:nvSpPr>
-          <p:cNvPr id="7" name="TextBox 6"/>
-          <p:cNvSpPr txBox="1"/>
-          <p:nvPr/>
-        </p:nvSpPr>
-        <p:spPr>
-          <a:xfrm>
-            <a:off x="11594592" y="6473952"/>
-            <a:ext cx="365760" cy="274320"/>
-          </a:xfrm>
-          <a:prstGeom prst="rect">
-            <a:avLst/>
-          </a:prstGeom>
-          <a:noFill/>
-        </p:spPr>
-        <p:txBody>
-          <a:bodyPr wrap="square">
-            <a:spAutoFit/>
-          </a:bodyPr>
-          <a:lstStyle/>
-          <a:p>
-            <a:pPr algn="r"/>
-            <a:r>
-              <a:rPr sz="1000" b="0">
-                <a:solidFill>
-                  <a:srgbClr val="5A5A5A"/>
-                </a:solidFill>
-                <a:latin typeface="Calibri"/>
-              </a:rPr>
-              <a:t>11</a:t>
-            </a:r>
-          </a:p>
-        </p:txBody>
-      </p:sp>
-      <p:pic>
-        <p:nvPicPr>
-          <p:cNvPr id="8" name="Picture 7" descr="pms.png"/>
-          <p:cNvPicPr>
-            <a:picLocks noChangeAspect="1"/>
-          </p:cNvPicPr>
-          <p:nvPr/>
-        </p:nvPicPr>
-        <p:blipFill>
-          <a:blip r:embed="rId3"/>
-          <a:stretch>
-            <a:fillRect/>
-          </a:stretch>
-        </p:blipFill>
-        <p:spPr>
-          <a:xfrm>
-            <a:off x="292608" y="2050572"/>
-            <a:ext cx="7178040" cy="3168335"/>
-          </a:xfrm>
-          <a:prstGeom prst="rect">
-            <a:avLst/>
-          </a:prstGeom>
-        </p:spPr>
-      </p:pic>
-      <p:sp>
-        <p:nvSpPr>
-          <p:cNvPr id="9" name="Rectangle 8"/>
-          <p:cNvSpPr/>
-          <p:nvPr/>
-        </p:nvSpPr>
-        <p:spPr>
-          <a:xfrm>
-            <a:off x="7726679" y="1188720"/>
-            <a:ext cx="22000" cy="4892040"/>
-          </a:xfrm>
-          <a:prstGeom prst="rect">
-            <a:avLst/>
-          </a:prstGeom>
-          <a:solidFill>
-            <a:srgbClr val="ECECEC"/>
-          </a:solidFill>
-          <a:ln>
-            <a:noFill/>
-          </a:ln>
-        </p:spPr>
-        <p:style>
-          <a:lnRef idx="1">
-            <a:schemeClr val="accent1"/>
-          </a:lnRef>
-          <a:fillRef idx="3">
-            <a:schemeClr val="accent1"/>
-          </a:fillRef>
-          <a:effectRef idx="2">
-            <a:schemeClr val="accent1"/>
-          </a:effectRef>
-          <a:fontRef idx="minor">
-            <a:schemeClr val="lt1"/>
-          </a:fontRef>
-        </p:style>
-        <p:txBody>
-          <a:bodyPr rtlCol="0" anchor="ctr"/>
-          <a:lstStyle/>
-          <a:p>
-            <a:pPr algn="ctr"/>
-          </a:p>
-        </p:txBody>
-      </p:sp>
-      <p:sp>
-        <p:nvSpPr>
-          <p:cNvPr id="10" name="TextBox 9"/>
-          <p:cNvSpPr txBox="1"/>
-          <p:nvPr/>
-        </p:nvSpPr>
-        <p:spPr>
-          <a:xfrm>
-            <a:off x="7927847" y="1234440"/>
-            <a:ext cx="3886200" cy="320040"/>
-          </a:xfrm>
-          <a:prstGeom prst="rect">
-            <a:avLst/>
-          </a:prstGeom>
-          <a:noFill/>
-        </p:spPr>
-        <p:txBody>
-          <a:bodyPr wrap="square">
-            <a:spAutoFit/>
-          </a:bodyPr>
-          <a:lstStyle/>
-          <a:p>
-            <a:pPr algn="l"/>
-            <a:r>
-              <a:rPr sz="1200" b="1">
-                <a:solidFill>
-                  <a:srgbClr val="CC0E1E"/>
-                </a:solidFill>
-                <a:latin typeface="Calibri"/>
-              </a:rPr>
-              <a:t>TAKEAWAYS</a:t>
-            </a:r>
-          </a:p>
-        </p:txBody>
-      </p:sp>
-      <p:sp>
-        <p:nvSpPr>
-          <p:cNvPr id="11" name="TextBox 10"/>
-          <p:cNvSpPr txBox="1"/>
-          <p:nvPr/>
-        </p:nvSpPr>
-        <p:spPr>
-          <a:xfrm>
-            <a:off x="7927847" y="1691640"/>
-            <a:ext cx="3794760" cy="4343400"/>
-          </a:xfrm>
-          <a:prstGeom prst="rect">
-            <a:avLst/>
-          </a:prstGeom>
-          <a:noFill/>
-        </p:spPr>
-        <p:txBody>
-          <a:bodyPr wrap="square">
-            <a:spAutoFit/>
-          </a:bodyPr>
-          <a:lstStyle/>
-          <a:p>
-            <a:pPr>
-              <a:lnSpc>
-                <a:spcPct val="125000"/>
-              </a:lnSpc>
-              <a:spcAft>
-                <a:spcPts val="1000"/>
-              </a:spcAft>
-            </a:pPr>
-            <a:r>
-              <a:rPr sz="1250" b="1">
-                <a:solidFill>
-                  <a:srgbClr val="CC0E1E"/>
-                </a:solidFill>
-                <a:latin typeface="Calibri"/>
-              </a:rPr>
-              <a:t>—  </a:t>
-            </a:r>
-            <a:r>
-              <a:rPr sz="1250">
-                <a:solidFill>
-                  <a:srgbClr val="1A1A1A"/>
-                </a:solidFill>
-                <a:latin typeface="Calibri"/>
-              </a:rPr>
-              <a:t>Brake rotor 54.4% against 54.5% for the rest of the network.</a:t>
-            </a:r>
-          </a:p>
-          <a:p>
-            <a:pPr>
-              <a:lnSpc>
-                <a:spcPct val="125000"/>
-              </a:lnSpc>
-              <a:spcAft>
-                <a:spcPts val="1000"/>
-              </a:spcAft>
-            </a:pPr>
-            <a:r>
-              <a:rPr sz="1250" b="1">
-                <a:solidFill>
-                  <a:srgbClr val="CC0E1E"/>
-                </a:solidFill>
-                <a:latin typeface="Calibri"/>
-              </a:rPr>
-              <a:t>—  </a:t>
-            </a:r>
-            <a:r>
-              <a:rPr sz="1250">
-                <a:solidFill>
-                  <a:srgbClr val="1A1A1A"/>
-                </a:solidFill>
-                <a:latin typeface="Calibri"/>
-              </a:rPr>
-              <a:t>Fuel filter 70.3% against 46.2% for the rest of the network.</a:t>
-            </a:r>
-          </a:p>
-          <a:p>
-            <a:pPr>
-              <a:lnSpc>
-                <a:spcPct val="125000"/>
-              </a:lnSpc>
-              <a:spcAft>
-                <a:spcPts val="1000"/>
-              </a:spcAft>
-            </a:pPr>
-            <a:r>
-              <a:rPr sz="1250" b="1">
-                <a:solidFill>
-                  <a:srgbClr val="CC0E1E"/>
-                </a:solidFill>
-                <a:latin typeface="Calibri"/>
-              </a:rPr>
-              <a:t>—  </a:t>
-            </a:r>
-            <a:r>
-              <a:rPr sz="1250">
-                <a:solidFill>
-                  <a:srgbClr val="1A1A1A"/>
-                </a:solidFill>
-                <a:latin typeface="Calibri"/>
-              </a:rPr>
-              <a:t>Every market here is measured on the same fleet-and-interval model, so the comparison is like-for-like even where the underlying interval assumption is debatable.</a:t>
-            </a:r>
-          </a:p>
-          <a:p>
-            <a:pPr>
-              <a:lnSpc>
-                <a:spcPct val="125000"/>
-              </a:lnSpc>
-              <a:spcAft>
-                <a:spcPts val="1000"/>
-              </a:spcAft>
-            </a:pPr>
-            <a:r>
-              <a:rPr sz="1250" b="1">
-                <a:solidFill>
-                  <a:srgbClr val="CC0E1E"/>
-                </a:solidFill>
-                <a:latin typeface="Calibri"/>
-              </a:rPr>
-              <a:t>—  </a:t>
-            </a:r>
-            <a:r>
-              <a:rPr sz="1250">
-                <a:solidFill>
-                  <a:srgbClr val="1A1A1A"/>
-                </a:solidFill>
-                <a:latin typeface="Calibri"/>
-              </a:rPr>
-              <a:t>Worth agreeing which category we tackle first, and what the joint action is.</a:t>
-            </a:r>
-          </a:p>
-        </p:txBody>
-      </p:sp>
-    </p:spTree>
-  </p:cSld>
-  <p:clrMapOvr>
-    <a:masterClrMapping/>
-  </p:clrMapOvr>
-</p:sld>
-</file>
-
-<file path=ppt/slides/slide12.xml><?xml version="1.0" encoding="utf-8"?>
-<p:sld xmlns:a="http://schemas.openxmlformats.org/drawingml/2006/main" xmlns:p="http://schemas.openxmlformats.org/presentationml/2006/main" xmlns:r="http://schemas.openxmlformats.org/officeDocument/2006/relationships">
-  <p:cSld>
-    <p:bg>
-      <p:bgPr>
-        <a:solidFill>
-          <a:srgbClr val="FFFFFF"/>
-        </a:solidFill>
-        <a:effectLst/>
-      </p:bgPr>
-    </p:bg>
-    <p:spTree>
-      <p:nvGrpSpPr>
-        <p:cNvPr id="1" name=""/>
-        <p:cNvGrpSpPr/>
-        <p:nvPr/>
-      </p:nvGrpSpPr>
-      <p:grpSpPr/>
-      <p:pic>
-        <p:nvPicPr>
-          <p:cNvPr id="2" name="Picture 1" descr="isuzu_logo_red.png"/>
-          <p:cNvPicPr>
-            <a:picLocks noChangeAspect="1"/>
-          </p:cNvPicPr>
-          <p:nvPr/>
-        </p:nvPicPr>
-        <p:blipFill>
-          <a:blip r:embed="rId2"/>
-          <a:stretch>
-            <a:fillRect/>
-          </a:stretch>
-        </p:blipFill>
-        <p:spPr>
-          <a:xfrm>
-            <a:off x="256032" y="6263640"/>
-            <a:ext cx="1679787" cy="292608"/>
-          </a:xfrm>
-          <a:prstGeom prst="rect">
-            <a:avLst/>
-          </a:prstGeom>
-        </p:spPr>
-      </p:pic>
-      <p:sp>
-        <p:nvSpPr>
-          <p:cNvPr id="3" name="Rectangle 2"/>
-          <p:cNvSpPr/>
-          <p:nvPr/>
-        </p:nvSpPr>
-        <p:spPr>
-          <a:xfrm>
-            <a:off x="0" y="6766560"/>
-            <a:ext cx="12188952" cy="91440"/>
-          </a:xfrm>
-          <a:prstGeom prst="rect">
-            <a:avLst/>
-          </a:prstGeom>
-          <a:solidFill>
-            <a:srgbClr val="CC0E1E"/>
-          </a:solidFill>
-          <a:ln>
-            <a:noFill/>
-          </a:ln>
-        </p:spPr>
-        <p:style>
-          <a:lnRef idx="1">
-            <a:schemeClr val="accent1"/>
-          </a:lnRef>
-          <a:fillRef idx="3">
-            <a:schemeClr val="accent1"/>
-          </a:fillRef>
-          <a:effectRef idx="2">
-            <a:schemeClr val="accent1"/>
-          </a:effectRef>
-          <a:fontRef idx="minor">
-            <a:schemeClr val="lt1"/>
-          </a:fontRef>
-        </p:style>
-        <p:txBody>
-          <a:bodyPr rtlCol="0" anchor="ctr"/>
-          <a:lstStyle/>
-          <a:p>
-            <a:pPr algn="ctr"/>
-          </a:p>
-        </p:txBody>
-      </p:sp>
-      <p:sp>
-        <p:nvSpPr>
-          <p:cNvPr id="4" name="TextBox 3"/>
-          <p:cNvSpPr txBox="1"/>
-          <p:nvPr/>
-        </p:nvSpPr>
-        <p:spPr>
-          <a:xfrm>
-            <a:off x="292608" y="201168"/>
-            <a:ext cx="11430000" cy="274320"/>
-          </a:xfrm>
-          <a:prstGeom prst="rect">
-            <a:avLst/>
-          </a:prstGeom>
-          <a:noFill/>
-        </p:spPr>
-        <p:txBody>
-          <a:bodyPr wrap="square">
-            <a:spAutoFit/>
-          </a:bodyPr>
-          <a:lstStyle/>
-          <a:p>
-            <a:pPr algn="l"/>
-            <a:r>
-              <a:rPr sz="1100" b="1">
-                <a:solidFill>
-                  <a:srgbClr val="CC0E1E"/>
-                </a:solidFill>
-                <a:latin typeface="Calibri"/>
-              </a:rPr>
-              <a:t>IDS 2026 — DEALER STANDARD</a:t>
-            </a:r>
-          </a:p>
-        </p:txBody>
-      </p:sp>
-      <p:sp>
-        <p:nvSpPr>
-          <p:cNvPr id="5" name="TextBox 4"/>
-          <p:cNvSpPr txBox="1"/>
-          <p:nvPr/>
-        </p:nvSpPr>
-        <p:spPr>
-          <a:xfrm>
-            <a:off x="292608" y="475488"/>
-            <a:ext cx="11612880" cy="566928"/>
-          </a:xfrm>
-          <a:prstGeom prst="rect">
-            <a:avLst/>
-          </a:prstGeom>
-          <a:noFill/>
-        </p:spPr>
-        <p:txBody>
-          <a:bodyPr wrap="square">
-            <a:spAutoFit/>
-          </a:bodyPr>
-          <a:lstStyle/>
-          <a:p>
-            <a:pPr algn="l"/>
-            <a:r>
-              <a:rPr sz="2500" b="1">
-                <a:solidFill>
-                  <a:srgbClr val="1A1A1A"/>
-                </a:solidFill>
-                <a:latin typeface="Calibri"/>
-              </a:rPr>
-              <a:t>IDS 2026: Cyprus averages 75.0%, above the 74.8% network benchmark</a:t>
-            </a:r>
-          </a:p>
-        </p:txBody>
-      </p:sp>
-      <p:sp>
-        <p:nvSpPr>
-          <p:cNvPr id="6" name="Rectangle 5"/>
-          <p:cNvSpPr/>
-          <p:nvPr/>
-        </p:nvSpPr>
-        <p:spPr>
-          <a:xfrm>
-            <a:off x="292608" y="1005840"/>
-            <a:ext cx="11612880" cy="28000"/>
-          </a:xfrm>
-          <a:prstGeom prst="rect">
-            <a:avLst/>
-          </a:prstGeom>
-          <a:solidFill>
-            <a:srgbClr val="CC0E1E"/>
-          </a:solidFill>
-          <a:ln>
-            <a:noFill/>
-          </a:ln>
-        </p:spPr>
-        <p:style>
-          <a:lnRef idx="1">
-            <a:schemeClr val="accent1"/>
-          </a:lnRef>
-          <a:fillRef idx="3">
-            <a:schemeClr val="accent1"/>
-          </a:fillRef>
-          <a:effectRef idx="2">
-            <a:schemeClr val="accent1"/>
-          </a:effectRef>
-          <a:fontRef idx="minor">
-            <a:schemeClr val="lt1"/>
-          </a:fontRef>
-        </p:style>
-        <p:txBody>
-          <a:bodyPr rtlCol="0" anchor="ctr"/>
-          <a:lstStyle/>
-          <a:p>
-            <a:pPr algn="ctr"/>
-          </a:p>
-        </p:txBody>
-      </p:sp>
-      <p:sp>
-        <p:nvSpPr>
-          <p:cNvPr id="7" name="TextBox 6"/>
-          <p:cNvSpPr txBox="1"/>
-          <p:nvPr/>
-        </p:nvSpPr>
-        <p:spPr>
-          <a:xfrm>
-            <a:off x="11594592" y="6473952"/>
-            <a:ext cx="365760" cy="274320"/>
-          </a:xfrm>
-          <a:prstGeom prst="rect">
-            <a:avLst/>
-          </a:prstGeom>
-          <a:noFill/>
-        </p:spPr>
-        <p:txBody>
-          <a:bodyPr wrap="square">
-            <a:spAutoFit/>
-          </a:bodyPr>
-          <a:lstStyle/>
-          <a:p>
-            <a:pPr algn="r"/>
-            <a:r>
-              <a:rPr sz="1000" b="0">
-                <a:solidFill>
-                  <a:srgbClr val="5A5A5A"/>
-                </a:solidFill>
-                <a:latin typeface="Calibri"/>
-              </a:rPr>
-              <a:t>12</a:t>
             </a:r>
           </a:p>
         </p:txBody>
@@ -4699,7 +3843,7 @@
                           </a:solidFill>
                           <a:latin typeface="Calibri"/>
                         </a:rPr>
-                        <a:t>74.8%</a:t>
+                        <a:t>79.4%</a:t>
                       </a:r>
                     </a:p>
                   </a:txBody>
@@ -4882,7 +4026,7 @@
                 </a:solidFill>
                 <a:latin typeface="Calibri"/>
               </a:rPr>
-              <a:t>The country average sits 0.2 points above the network.</a:t>
+              <a:t>The country average sits 4.4 points below the network — both averages are taken on assessed dealers only.</a:t>
             </a:r>
           </a:p>
           <a:p>
@@ -4910,7 +4054,7 @@
                 </a:solidFill>
                 <a:latin typeface="Calibri"/>
               </a:rPr>
-              <a:t>The spread is the point: 0 points between the strongest and weakest dealer.</a:t>
+              <a:t>The spread is the point: 0 points between the strongest and weakest assessed dealer.</a:t>
             </a:r>
           </a:p>
           <a:p>
@@ -4951,7 +4095,7 @@
 </p:sld>
 </file>
 
-<file path=ppt/slides/slide13.xml><?xml version="1.0" encoding="utf-8"?>
+<file path=ppt/slides/slide11.xml><?xml version="1.0" encoding="utf-8"?>
 <p:sld xmlns:a="http://schemas.openxmlformats.org/drawingml/2006/main" xmlns:p="http://schemas.openxmlformats.org/presentationml/2006/main" xmlns:r="http://schemas.openxmlformats.org/officeDocument/2006/relationships">
   <p:cSld>
     <p:bg>
@@ -5179,7 +4323,7 @@
                 </a:solidFill>
                 <a:latin typeface="Calibri"/>
               </a:rPr>
-              <a:t>13</a:t>
+              <a:t>11</a:t>
             </a:r>
           </a:p>
         </p:txBody>
@@ -5416,7 +4560,7 @@
                 </a:solidFill>
                 <a:latin typeface="Calibri"/>
               </a:rPr>
-              <a:t>The FY2027 Sales-to-Dealer target starts from that fleet change, then applies a 5% price adjustment and 1.8% additional growth.</a:t>
+              <a:t>The FY2027 extended target (ISZE→DB) applies a 5% price adjustment and 1.8% stretch — locked at EUR 552,822 from GPS Extended Target V3.1 (Dashboard column I).</a:t>
             </a:r>
           </a:p>
           <a:p>
@@ -5457,7 +4601,7 @@
 </p:sld>
 </file>
 
-<file path=ppt/slides/slide14.xml><?xml version="1.0" encoding="utf-8"?>
+<file path=ppt/slides/slide12.xml><?xml version="1.0" encoding="utf-8"?>
 <p:sld xmlns:a="http://schemas.openxmlformats.org/drawingml/2006/main" xmlns:p="http://schemas.openxmlformats.org/presentationml/2006/main" xmlns:r="http://schemas.openxmlformats.org/officeDocument/2006/relationships">
   <p:cSld>
     <p:bg>
@@ -5607,7 +4751,7 @@
                 </a:solidFill>
                 <a:latin typeface="Calibri"/>
               </a:rPr>
-              <a:t>How the FY2027 target is built</a:t>
+              <a:t>How the FY2027 extended target is built</a:t>
             </a:r>
           </a:p>
         </p:txBody>
@@ -5685,7 +4829,7 @@
                 </a:solidFill>
                 <a:latin typeface="Calibri"/>
               </a:rPr>
-              <a:t>14</a:t>
+              <a:t>12</a:t>
             </a:r>
           </a:p>
         </p:txBody>
@@ -5699,7 +4843,7 @@
         <p:spPr>
           <a:xfrm>
             <a:off x="292608" y="1170432"/>
-            <a:ext cx="8595360" cy="274320"/>
+            <a:ext cx="10515600" cy="274320"/>
           </a:xfrm>
           <a:prstGeom prst="rect">
             <a:avLst/>
@@ -5720,7 +4864,7 @@
                 </a:solidFill>
                 <a:latin typeface="Calibri"/>
               </a:rPr>
-              <a:t>Sales-to-Dealer amount bridge</a:t>
+              <a:t>ISZE → DB extended target (V3.1 Dashboard column I)</a:t>
             </a:r>
           </a:p>
         </p:txBody>
@@ -5735,7 +4879,7 @@
         </p:nvGraphicFramePr>
         <p:xfrm>
           <a:off x="292608" y="1508760"/>
-          <a:ext cx="8595360" cy="2148840"/>
+          <a:ext cx="8595360" cy="2331720"/>
         </p:xfrm>
         <a:graphic>
           <a:graphicData uri="http://schemas.openxmlformats.org/drawingml/2006/table">
@@ -5747,7 +4891,7 @@
                 <a:gridCol w="5669280"/>
                 <a:gridCol w="2926080"/>
               </a:tblGrid>
-              <a:tr h="429768">
+              <a:tr h="466344">
                 <a:tc>
                   <a:txBody>
                     <a:bodyPr/>
@@ -5795,7 +4939,7 @@
                   </a:tcPr>
                 </a:tc>
               </a:tr>
-              <a:tr h="429768">
+              <a:tr h="466344">
                 <a:tc>
                   <a:txBody>
                     <a:bodyPr/>
@@ -5809,7 +4953,7 @@
                           </a:solidFill>
                           <a:latin typeface="Calibri"/>
                         </a:rPr>
-                        <a:t>FY2026 Sales-to-Dealer (working estimate)</a:t>
+                        <a:t>Business Plan / actual FY27 base</a:t>
                       </a:r>
                     </a:p>
                   </a:txBody>
@@ -5832,7 +4976,7 @@
                           </a:solidFill>
                           <a:latin typeface="Calibri"/>
                         </a:rPr>
-                        <a:t>EUR 618,085</a:t>
+                        <a:t>EUR 539,600</a:t>
                       </a:r>
                     </a:p>
                   </a:txBody>
@@ -5843,7 +4987,7 @@
                   </a:tcPr>
                 </a:tc>
               </a:tr>
-              <a:tr h="429768">
+              <a:tr h="466344">
                 <a:tc>
                   <a:txBody>
                     <a:bodyPr/>
@@ -5857,7 +5001,7 @@
                           </a:solidFill>
                           <a:latin typeface="Calibri"/>
                         </a:rPr>
-                        <a:t>After fleet movement (+5.0%)</a:t>
+                        <a:t>Market potential (max spend FY27)</a:t>
                       </a:r>
                     </a:p>
                   </a:txBody>
@@ -5880,7 +5024,7 @@
                           </a:solidFill>
                           <a:latin typeface="Calibri"/>
                         </a:rPr>
-                        <a:t>EUR 648,882</a:t>
+                        <a:t>EUR 734,562</a:t>
                       </a:r>
                     </a:p>
                   </a:txBody>
@@ -5891,7 +5035,7 @@
                   </a:tcPr>
                 </a:tc>
               </a:tr>
-              <a:tr h="429768">
+              <a:tr h="466344">
                 <a:tc>
                   <a:txBody>
                     <a:bodyPr/>
@@ -5905,7 +5049,7 @@
                           </a:solidFill>
                           <a:latin typeface="Calibri"/>
                         </a:rPr>
-                        <a:t>After price adjustment (+5%)</a:t>
+                        <a:t>Stretch (+1.8% of max spend)</a:t>
                       </a:r>
                     </a:p>
                   </a:txBody>
@@ -5928,7 +5072,7 @@
                           </a:solidFill>
                           <a:latin typeface="Calibri"/>
                         </a:rPr>
-                        <a:t>EUR 681,326</a:t>
+                        <a:t>EUR 13,222</a:t>
                       </a:r>
                     </a:p>
                   </a:txBody>
@@ -5939,7 +5083,7 @@
                   </a:tcPr>
                 </a:tc>
               </a:tr>
-              <a:tr h="429768">
+              <a:tr h="466344">
                 <a:tc>
                   <a:txBody>
                     <a:bodyPr/>
@@ -5953,7 +5097,7 @@
                           </a:solidFill>
                           <a:latin typeface="Calibri"/>
                         </a:rPr>
-                        <a:t>FY2027 target after additional growth (+1.8%)</a:t>
+                        <a:t>FY2027 EXTENDED TARGET (locked)</a:t>
                       </a:r>
                     </a:p>
                   </a:txBody>
@@ -5976,7 +5120,7 @@
                           </a:solidFill>
                           <a:latin typeface="Calibri"/>
                         </a:rPr>
-                        <a:t>EUR 693,590</a:t>
+                        <a:t>EUR 552,822</a:t>
                       </a:r>
                     </a:p>
                   </a:txBody>
@@ -5999,8 +5143,8 @@
         </p:nvSpPr>
         <p:spPr>
           <a:xfrm>
-            <a:off x="292608" y="3977639"/>
-            <a:ext cx="11612880" cy="1188720"/>
+            <a:off x="292608" y="4069080"/>
+            <a:ext cx="11612880" cy="1280160"/>
           </a:xfrm>
           <a:prstGeom prst="rect">
             <a:avLst/>
@@ -6037,7 +5181,7 @@
                 </a:solidFill>
                 <a:latin typeface="Calibri"/>
               </a:rPr>
-              <a:t>The FY2027 target is +12.2% versus the FY2026 Sales-to-Dealer base.</a:t>
+              <a:t>Extended target = BP + stretch; stretch default is 1.8% (network rule from GPS Extended Target V3.1).</a:t>
             </a:r>
           </a:p>
           <a:p>
@@ -6065,7 +5209,7 @@
                 </a:solidFill>
                 <a:latin typeface="Calibri"/>
               </a:rPr>
-              <a:t>The FY2026 base is a working estimate (ISZE billing ÷ 0.65): the KPI Dashboard has no usable Sales-to-Dealer row for this market.</a:t>
+              <a:t>Figure locked from GPS Extended Target FY27 V3.1, Dashboard column I (CYPRUS): EUR 552,822.</a:t>
             </a:r>
           </a:p>
         </p:txBody>
@@ -6078,7 +5222,7 @@
 </p:sld>
 </file>
 
-<file path=ppt/slides/slide15.xml><?xml version="1.0" encoding="utf-8"?>
+<file path=ppt/slides/slide13.xml><?xml version="1.0" encoding="utf-8"?>
 <p:sld xmlns:a="http://schemas.openxmlformats.org/drawingml/2006/main" xmlns:p="http://schemas.openxmlformats.org/presentationml/2006/main" xmlns:r="http://schemas.openxmlformats.org/officeDocument/2006/relationships">
   <p:cSld>
     <p:bg>
@@ -6306,7 +5450,7 @@
                 </a:solidFill>
                 <a:latin typeface="Calibri"/>
               </a:rPr>
-              <a:t>15</a:t>
+              <a:t>13</a:t>
             </a:r>
           </a:p>
         </p:txBody>
@@ -6440,7 +5584,7 @@
                 </a:solidFill>
                 <a:latin typeface="Calibri"/>
               </a:rPr>
-              <a:t>Your fleet</a:t>
+              <a:t>The FY2027 business plan</a:t>
             </a:r>
           </a:p>
         </p:txBody>
@@ -6491,166 +5635,9 @@
                 </a:solidFill>
                 <a:latin typeface="Calibri"/>
               </a:rPr>
-              <a:t>The working fleet movement used in the target is +5.0%.</a:t>
-            </a:r>
-          </a:p>
-        </p:txBody>
-      </p:sp>
-      <p:sp>
-        <p:nvSpPr>
-          <p:cNvPr id="12" name="Rounded Rectangle 11"/>
-          <p:cNvSpPr/>
-          <p:nvPr/>
-        </p:nvSpPr>
-        <p:spPr>
-          <a:xfrm>
-            <a:off x="5943600" y="1234440"/>
-            <a:ext cx="5943600" cy="2011680"/>
-          </a:xfrm>
-          <a:prstGeom prst="roundRect">
-            <a:avLst>
-              <a:gd name="adj" fmla="val 6000"/>
-            </a:avLst>
-          </a:prstGeom>
-          <a:solidFill>
-            <a:srgbClr val="ECECEC"/>
-          </a:solidFill>
-          <a:ln>
-            <a:noFill/>
-          </a:ln>
-          <a:effectLst/>
-        </p:spPr>
-        <p:style>
-          <a:lnRef idx="1">
-            <a:schemeClr val="accent1"/>
-          </a:lnRef>
-          <a:fillRef idx="3">
-            <a:schemeClr val="accent1"/>
-          </a:fillRef>
-          <a:effectRef idx="2">
-            <a:schemeClr val="accent1"/>
-          </a:effectRef>
-          <a:fontRef idx="minor">
-            <a:schemeClr val="lt1"/>
-          </a:fontRef>
-        </p:style>
-        <p:txBody>
-          <a:bodyPr rtlCol="0" anchor="ctr"/>
-          <a:lstStyle/>
-          <a:p>
-            <a:pPr algn="ctr"/>
-          </a:p>
-        </p:txBody>
-      </p:sp>
-      <p:sp>
-        <p:nvSpPr>
-          <p:cNvPr id="13" name="Oval 12"/>
-          <p:cNvSpPr/>
-          <p:nvPr/>
-        </p:nvSpPr>
-        <p:spPr>
-          <a:xfrm>
-            <a:off x="6144768" y="1435608"/>
-            <a:ext cx="457200" cy="457200"/>
-          </a:xfrm>
-          <a:prstGeom prst="ellipse">
-            <a:avLst/>
-          </a:prstGeom>
-          <a:solidFill>
-            <a:srgbClr val="CC0E1E"/>
-          </a:solidFill>
-          <a:ln>
-            <a:noFill/>
-          </a:ln>
-          <a:effectLst/>
-        </p:spPr>
-        <p:style>
-          <a:lnRef idx="1">
-            <a:schemeClr val="accent1"/>
-          </a:lnRef>
-          <a:fillRef idx="3">
-            <a:schemeClr val="accent1"/>
-          </a:fillRef>
-          <a:effectRef idx="2">
-            <a:schemeClr val="accent1"/>
-          </a:effectRef>
-          <a:fontRef idx="minor">
-            <a:schemeClr val="lt1"/>
-          </a:fontRef>
-        </p:style>
-        <p:txBody>
-          <a:bodyPr rtlCol="0" anchor="ctr" lIns="0" rIns="0" tIns="0" bIns="0"/>
-          <a:lstStyle/>
-          <a:p>
-            <a:pPr algn="ctr"/>
-            <a:r>
-              <a:rPr sz="1800" b="1">
-                <a:solidFill>
-                  <a:srgbClr val="FFFFFF"/>
-                </a:solidFill>
-                <a:latin typeface="Calibri"/>
-              </a:rPr>
-              <a:t>2</a:t>
-            </a:r>
-          </a:p>
-        </p:txBody>
-      </p:sp>
-      <p:sp>
-        <p:nvSpPr>
-          <p:cNvPr id="14" name="TextBox 13"/>
-          <p:cNvSpPr txBox="1"/>
-          <p:nvPr/>
-        </p:nvSpPr>
-        <p:spPr>
-          <a:xfrm>
-            <a:off x="6766560" y="1435608"/>
-            <a:ext cx="4937760" cy="411480"/>
-          </a:xfrm>
-          <a:prstGeom prst="rect">
-            <a:avLst/>
-          </a:prstGeom>
-          <a:noFill/>
-        </p:spPr>
-        <p:txBody>
-          <a:bodyPr wrap="square">
-            <a:spAutoFit/>
-          </a:bodyPr>
-          <a:lstStyle/>
-          <a:p>
-            <a:pPr algn="l"/>
-            <a:r>
-              <a:rPr sz="1500" b="1">
-                <a:solidFill>
-                  <a:srgbClr val="1A1A1A"/>
-                </a:solidFill>
-                <a:latin typeface="Calibri"/>
-              </a:rPr>
-              <a:t>The price move</a:t>
-            </a:r>
-          </a:p>
-        </p:txBody>
-      </p:sp>
-      <p:sp>
-        <p:nvSpPr>
-          <p:cNvPr id="15" name="TextBox 14"/>
-          <p:cNvSpPr txBox="1"/>
-          <p:nvPr/>
-        </p:nvSpPr>
-        <p:spPr>
-          <a:xfrm>
-            <a:off x="6236208" y="2011680"/>
-            <a:ext cx="5394960" cy="1097280"/>
-          </a:xfrm>
-          <a:prstGeom prst="rect">
-            <a:avLst/>
-          </a:prstGeom>
-          <a:noFill/>
-        </p:spPr>
-        <p:txBody>
-          <a:bodyPr wrap="square">
-            <a:spAutoFit/>
-          </a:bodyPr>
-          <a:lstStyle/>
+              <a:t>The target starts from the FY2027 Business Plan for this market, EUR 539,600.</a:t>
+            </a:r>
+          </a:p>
           <a:p>
             <a:pPr>
               <a:lnSpc>
@@ -6676,9 +5663,166 @@
                 </a:solidFill>
                 <a:latin typeface="Calibri"/>
               </a:rPr>
-              <a:t>ISZE is applying a 5% price adjustment for FY2027, consistent with every ISZE market this year.</a:t>
-            </a:r>
-          </a:p>
+              <a:t>Your fleet outlook (+5.0%) sets the market potential the stretch is measured against.</a:t>
+            </a:r>
+          </a:p>
+        </p:txBody>
+      </p:sp>
+      <p:sp>
+        <p:nvSpPr>
+          <p:cNvPr id="12" name="Rounded Rectangle 11"/>
+          <p:cNvSpPr/>
+          <p:nvPr/>
+        </p:nvSpPr>
+        <p:spPr>
+          <a:xfrm>
+            <a:off x="5943600" y="1234440"/>
+            <a:ext cx="5943600" cy="2011680"/>
+          </a:xfrm>
+          <a:prstGeom prst="roundRect">
+            <a:avLst>
+              <a:gd name="adj" fmla="val 6000"/>
+            </a:avLst>
+          </a:prstGeom>
+          <a:solidFill>
+            <a:srgbClr val="ECECEC"/>
+          </a:solidFill>
+          <a:ln>
+            <a:noFill/>
+          </a:ln>
+          <a:effectLst/>
+        </p:spPr>
+        <p:style>
+          <a:lnRef idx="1">
+            <a:schemeClr val="accent1"/>
+          </a:lnRef>
+          <a:fillRef idx="3">
+            <a:schemeClr val="accent1"/>
+          </a:fillRef>
+          <a:effectRef idx="2">
+            <a:schemeClr val="accent1"/>
+          </a:effectRef>
+          <a:fontRef idx="minor">
+            <a:schemeClr val="lt1"/>
+          </a:fontRef>
+        </p:style>
+        <p:txBody>
+          <a:bodyPr rtlCol="0" anchor="ctr"/>
+          <a:lstStyle/>
+          <a:p>
+            <a:pPr algn="ctr"/>
+          </a:p>
+        </p:txBody>
+      </p:sp>
+      <p:sp>
+        <p:nvSpPr>
+          <p:cNvPr id="13" name="Oval 12"/>
+          <p:cNvSpPr/>
+          <p:nvPr/>
+        </p:nvSpPr>
+        <p:spPr>
+          <a:xfrm>
+            <a:off x="6144768" y="1435608"/>
+            <a:ext cx="457200" cy="457200"/>
+          </a:xfrm>
+          <a:prstGeom prst="ellipse">
+            <a:avLst/>
+          </a:prstGeom>
+          <a:solidFill>
+            <a:srgbClr val="CC0E1E"/>
+          </a:solidFill>
+          <a:ln>
+            <a:noFill/>
+          </a:ln>
+          <a:effectLst/>
+        </p:spPr>
+        <p:style>
+          <a:lnRef idx="1">
+            <a:schemeClr val="accent1"/>
+          </a:lnRef>
+          <a:fillRef idx="3">
+            <a:schemeClr val="accent1"/>
+          </a:fillRef>
+          <a:effectRef idx="2">
+            <a:schemeClr val="accent1"/>
+          </a:effectRef>
+          <a:fontRef idx="minor">
+            <a:schemeClr val="lt1"/>
+          </a:fontRef>
+        </p:style>
+        <p:txBody>
+          <a:bodyPr rtlCol="0" anchor="ctr" lIns="0" rIns="0" tIns="0" bIns="0"/>
+          <a:lstStyle/>
+          <a:p>
+            <a:pPr algn="ctr"/>
+            <a:r>
+              <a:rPr sz="1800" b="1">
+                <a:solidFill>
+                  <a:srgbClr val="FFFFFF"/>
+                </a:solidFill>
+                <a:latin typeface="Calibri"/>
+              </a:rPr>
+              <a:t>2</a:t>
+            </a:r>
+          </a:p>
+        </p:txBody>
+      </p:sp>
+      <p:sp>
+        <p:nvSpPr>
+          <p:cNvPr id="14" name="TextBox 13"/>
+          <p:cNvSpPr txBox="1"/>
+          <p:nvPr/>
+        </p:nvSpPr>
+        <p:spPr>
+          <a:xfrm>
+            <a:off x="6766560" y="1435608"/>
+            <a:ext cx="4937760" cy="411480"/>
+          </a:xfrm>
+          <a:prstGeom prst="rect">
+            <a:avLst/>
+          </a:prstGeom>
+          <a:noFill/>
+        </p:spPr>
+        <p:txBody>
+          <a:bodyPr wrap="square">
+            <a:spAutoFit/>
+          </a:bodyPr>
+          <a:lstStyle/>
+          <a:p>
+            <a:pPr algn="l"/>
+            <a:r>
+              <a:rPr sz="1500" b="1">
+                <a:solidFill>
+                  <a:srgbClr val="1A1A1A"/>
+                </a:solidFill>
+                <a:latin typeface="Calibri"/>
+              </a:rPr>
+              <a:t>The price move</a:t>
+            </a:r>
+          </a:p>
+        </p:txBody>
+      </p:sp>
+      <p:sp>
+        <p:nvSpPr>
+          <p:cNvPr id="15" name="TextBox 14"/>
+          <p:cNvSpPr txBox="1"/>
+          <p:nvPr/>
+        </p:nvSpPr>
+        <p:spPr>
+          <a:xfrm>
+            <a:off x="6236208" y="2011680"/>
+            <a:ext cx="5394960" cy="1097280"/>
+          </a:xfrm>
+          <a:prstGeom prst="rect">
+            <a:avLst/>
+          </a:prstGeom>
+          <a:noFill/>
+        </p:spPr>
+        <p:txBody>
+          <a:bodyPr wrap="square">
+            <a:spAutoFit/>
+          </a:bodyPr>
+          <a:lstStyle/>
           <a:p>
             <a:pPr>
               <a:lnSpc>
@@ -6704,6 +5848,34 @@
                 </a:solidFill>
                 <a:latin typeface="Calibri"/>
               </a:rPr>
+              <a:t>ISZE is applying a 5% price adjustment for FY2027, consistent with every ISZE market this year.</a:t>
+            </a:r>
+          </a:p>
+          <a:p>
+            <a:pPr>
+              <a:lnSpc>
+                <a:spcPct val="115000"/>
+              </a:lnSpc>
+              <a:spcAft>
+                <a:spcPts val="1000"/>
+              </a:spcAft>
+            </a:pPr>
+            <a:r>
+              <a:rPr sz="1250" b="1">
+                <a:solidFill>
+                  <a:srgbClr val="CC0E1E"/>
+                </a:solidFill>
+                <a:latin typeface="Calibri"/>
+              </a:rPr>
+              <a:t>—  </a:t>
+            </a:r>
+            <a:r>
+              <a:rPr sz="1250">
+                <a:solidFill>
+                  <a:srgbClr val="1A1A1A"/>
+                </a:solidFill>
+                <a:latin typeface="Calibri"/>
+              </a:rPr>
               <a:t>It is built into the per-vehicle rate above, not added separately on top.</a:t>
             </a:r>
           </a:p>
@@ -6754,7 +5926,7 @@
         </p:nvGraphicFramePr>
         <p:xfrm>
           <a:off x="292608" y="3785615"/>
-          <a:ext cx="8595360" cy="1234440"/>
+          <a:ext cx="8595360" cy="1417320"/>
         </p:xfrm>
         <a:graphic>
           <a:graphicData uri="http://schemas.openxmlformats.org/drawingml/2006/table">
@@ -6766,7 +5938,7 @@
                 <a:gridCol w="5029200"/>
                 <a:gridCol w="3566160"/>
               </a:tblGrid>
-              <a:tr h="411480">
+              <a:tr h="354330">
                 <a:tc>
                   <a:txBody>
                     <a:bodyPr/>
@@ -6814,7 +5986,7 @@
                   </a:tcPr>
                 </a:tc>
               </a:tr>
-              <a:tr h="411480">
+              <a:tr h="354330">
                 <a:tc>
                   <a:txBody>
                     <a:bodyPr/>
@@ -6828,7 +6000,7 @@
                           </a:solidFill>
                           <a:latin typeface="Calibri"/>
                         </a:rPr>
-                        <a:t>FY2027 Sales-to-Dealer target</a:t>
+                        <a:t>FY2027 extended target (V3.1 col I)</a:t>
                       </a:r>
                     </a:p>
                   </a:txBody>
@@ -6851,7 +6023,7 @@
                           </a:solidFill>
                           <a:latin typeface="Calibri"/>
                         </a:rPr>
-                        <a:t>EUR 693,590</a:t>
+                        <a:t>EUR 552,822</a:t>
                       </a:r>
                     </a:p>
                   </a:txBody>
@@ -6862,7 +6034,55 @@
                   </a:tcPr>
                 </a:tc>
               </a:tr>
-              <a:tr h="411480">
+              <a:tr h="354330">
+                <a:tc>
+                  <a:txBody>
+                    <a:bodyPr/>
+                    <a:lstStyle/>
+                    <a:p>
+                      <a:pPr algn="l"/>
+                      <a:r>
+                        <a:rPr sz="1250" b="0">
+                          <a:solidFill>
+                            <a:srgbClr val="1A1A1A"/>
+                          </a:solidFill>
+                          <a:latin typeface="Calibri"/>
+                        </a:rPr>
+                        <a:t>vs BP FY27 (EUR 539,600)</a:t>
+                      </a:r>
+                    </a:p>
+                  </a:txBody>
+                  <a:tcPr anchor="ctr" marL="73152" marR="73152">
+                    <a:solidFill>
+                      <a:srgbClr val="ECECEC"/>
+                    </a:solidFill>
+                  </a:tcPr>
+                </a:tc>
+                <a:tc>
+                  <a:txBody>
+                    <a:bodyPr/>
+                    <a:lstStyle/>
+                    <a:p>
+                      <a:pPr algn="r"/>
+                      <a:r>
+                        <a:rPr sz="1250" b="0">
+                          <a:solidFill>
+                            <a:srgbClr val="1A1A1A"/>
+                          </a:solidFill>
+                          <a:latin typeface="Calibri"/>
+                        </a:rPr>
+                        <a:t>+2.5%</a:t>
+                      </a:r>
+                    </a:p>
+                  </a:txBody>
+                  <a:tcPr anchor="ctr" marL="73152" marR="73152">
+                    <a:solidFill>
+                      <a:srgbClr val="ECECEC"/>
+                    </a:solidFill>
+                  </a:tcPr>
+                </a:tc>
+              </a:tr>
+              <a:tr h="354330">
                 <a:tc>
                   <a:txBody>
                     <a:bodyPr/>
@@ -6876,7 +6096,7 @@
                           </a:solidFill>
                           <a:latin typeface="Calibri"/>
                         </a:rPr>
-                        <a:t>vs FY2026 Sales-to-Dealer (EUR 618,085)</a:t>
+                        <a:t>Stretch included</a:t>
                       </a:r>
                     </a:p>
                   </a:txBody>
@@ -6899,7 +6119,7 @@
                           </a:solidFill>
                           <a:latin typeface="Calibri"/>
                         </a:rPr>
-                        <a:t>+12.2%</a:t>
+                        <a:t>+1.8%</a:t>
                       </a:r>
                     </a:p>
                   </a:txBody>
@@ -6988,7 +6208,1802 @@
                 </a:solidFill>
                 <a:latin typeface="Calibri"/>
               </a:rPr>
-              <a:t>Until the incentive is confirmed, treat the FY2027 target as the working bridge (fleet × price × additional growth), not a locked commercial commitment.</a:t>
+              <a:t>Until the incentive is confirmed, treat the FY2027 extended target as the working figure (BP + stretch), not a locked commercial commitment.</a:t>
+            </a:r>
+          </a:p>
+        </p:txBody>
+      </p:sp>
+    </p:spTree>
+  </p:cSld>
+  <p:clrMapOvr>
+    <a:masterClrMapping/>
+  </p:clrMapOvr>
+</p:sld>
+</file>
+
+<file path=ppt/slides/slide14.xml><?xml version="1.0" encoding="utf-8"?>
+<p:sld xmlns:a="http://schemas.openxmlformats.org/drawingml/2006/main" xmlns:p="http://schemas.openxmlformats.org/presentationml/2006/main" xmlns:r="http://schemas.openxmlformats.org/officeDocument/2006/relationships">
+  <p:cSld>
+    <p:bg>
+      <p:bgPr>
+        <a:solidFill>
+          <a:srgbClr val="FFFFFF"/>
+        </a:solidFill>
+        <a:effectLst/>
+      </p:bgPr>
+    </p:bg>
+    <p:spTree>
+      <p:nvGrpSpPr>
+        <p:cNvPr id="1" name=""/>
+        <p:cNvGrpSpPr/>
+        <p:nvPr/>
+      </p:nvGrpSpPr>
+      <p:grpSpPr/>
+      <p:pic>
+        <p:nvPicPr>
+          <p:cNvPr id="2" name="Picture 1" descr="isuzu_logo_red.png"/>
+          <p:cNvPicPr>
+            <a:picLocks noChangeAspect="1"/>
+          </p:cNvPicPr>
+          <p:nvPr/>
+        </p:nvPicPr>
+        <p:blipFill>
+          <a:blip r:embed="rId2"/>
+          <a:stretch>
+            <a:fillRect/>
+          </a:stretch>
+        </p:blipFill>
+        <p:spPr>
+          <a:xfrm>
+            <a:off x="256032" y="6263640"/>
+            <a:ext cx="1679787" cy="292608"/>
+          </a:xfrm>
+          <a:prstGeom prst="rect">
+            <a:avLst/>
+          </a:prstGeom>
+        </p:spPr>
+      </p:pic>
+      <p:sp>
+        <p:nvSpPr>
+          <p:cNvPr id="3" name="Rectangle 2"/>
+          <p:cNvSpPr/>
+          <p:nvPr/>
+        </p:nvSpPr>
+        <p:spPr>
+          <a:xfrm>
+            <a:off x="0" y="6766560"/>
+            <a:ext cx="12188952" cy="91440"/>
+          </a:xfrm>
+          <a:prstGeom prst="rect">
+            <a:avLst/>
+          </a:prstGeom>
+          <a:solidFill>
+            <a:srgbClr val="CC0E1E"/>
+          </a:solidFill>
+          <a:ln>
+            <a:noFill/>
+          </a:ln>
+        </p:spPr>
+        <p:style>
+          <a:lnRef idx="1">
+            <a:schemeClr val="accent1"/>
+          </a:lnRef>
+          <a:fillRef idx="3">
+            <a:schemeClr val="accent1"/>
+          </a:fillRef>
+          <a:effectRef idx="2">
+            <a:schemeClr val="accent1"/>
+          </a:effectRef>
+          <a:fontRef idx="minor">
+            <a:schemeClr val="lt1"/>
+          </a:fontRef>
+        </p:style>
+        <p:txBody>
+          <a:bodyPr rtlCol="0" anchor="ctr"/>
+          <a:lstStyle/>
+          <a:p>
+            <a:pPr algn="ctr"/>
+          </a:p>
+        </p:txBody>
+      </p:sp>
+      <p:sp>
+        <p:nvSpPr>
+          <p:cNvPr id="4" name="TextBox 3"/>
+          <p:cNvSpPr txBox="1"/>
+          <p:nvPr/>
+        </p:nvSpPr>
+        <p:spPr>
+          <a:xfrm>
+            <a:off x="292608" y="201168"/>
+            <a:ext cx="11430000" cy="274320"/>
+          </a:xfrm>
+          <a:prstGeom prst="rect">
+            <a:avLst/>
+          </a:prstGeom>
+          <a:noFill/>
+        </p:spPr>
+        <p:txBody>
+          <a:bodyPr wrap="square">
+            <a:spAutoFit/>
+          </a:bodyPr>
+          <a:lstStyle/>
+          <a:p>
+            <a:pPr algn="l"/>
+            <a:r>
+              <a:rPr sz="1100" b="1">
+                <a:solidFill>
+                  <a:srgbClr val="CC0E1E"/>
+                </a:solidFill>
+                <a:latin typeface="Calibri"/>
+              </a:rPr>
+              <a:t>SPA</a:t>
+            </a:r>
+          </a:p>
+        </p:txBody>
+      </p:sp>
+      <p:sp>
+        <p:nvSpPr>
+          <p:cNvPr id="5" name="TextBox 4"/>
+          <p:cNvSpPr txBox="1"/>
+          <p:nvPr/>
+        </p:nvSpPr>
+        <p:spPr>
+          <a:xfrm>
+            <a:off x="292608" y="475488"/>
+            <a:ext cx="11612880" cy="566928"/>
+          </a:xfrm>
+          <a:prstGeom prst="rect">
+            <a:avLst/>
+          </a:prstGeom>
+          <a:noFill/>
+        </p:spPr>
+        <p:txBody>
+          <a:bodyPr wrap="square">
+            <a:spAutoFit/>
+          </a:bodyPr>
+          <a:lstStyle/>
+          <a:p>
+            <a:pPr algn="l"/>
+            <a:r>
+              <a:rPr sz="2500" b="1">
+                <a:solidFill>
+                  <a:srgbClr val="1A1A1A"/>
+                </a:solidFill>
+                <a:latin typeface="Calibri"/>
+              </a:rPr>
+              <a:t>SPA</a:t>
+            </a:r>
+          </a:p>
+        </p:txBody>
+      </p:sp>
+      <p:sp>
+        <p:nvSpPr>
+          <p:cNvPr id="6" name="Rectangle 5"/>
+          <p:cNvSpPr/>
+          <p:nvPr/>
+        </p:nvSpPr>
+        <p:spPr>
+          <a:xfrm>
+            <a:off x="292608" y="1005840"/>
+            <a:ext cx="11612880" cy="28000"/>
+          </a:xfrm>
+          <a:prstGeom prst="rect">
+            <a:avLst/>
+          </a:prstGeom>
+          <a:solidFill>
+            <a:srgbClr val="CC0E1E"/>
+          </a:solidFill>
+          <a:ln>
+            <a:noFill/>
+          </a:ln>
+        </p:spPr>
+        <p:style>
+          <a:lnRef idx="1">
+            <a:schemeClr val="accent1"/>
+          </a:lnRef>
+          <a:fillRef idx="3">
+            <a:schemeClr val="accent1"/>
+          </a:fillRef>
+          <a:effectRef idx="2">
+            <a:schemeClr val="accent1"/>
+          </a:effectRef>
+          <a:fontRef idx="minor">
+            <a:schemeClr val="lt1"/>
+          </a:fontRef>
+        </p:style>
+        <p:txBody>
+          <a:bodyPr rtlCol="0" anchor="ctr"/>
+          <a:lstStyle/>
+          <a:p>
+            <a:pPr algn="ctr"/>
+          </a:p>
+        </p:txBody>
+      </p:sp>
+      <p:sp>
+        <p:nvSpPr>
+          <p:cNvPr id="7" name="TextBox 6"/>
+          <p:cNvSpPr txBox="1"/>
+          <p:nvPr/>
+        </p:nvSpPr>
+        <p:spPr>
+          <a:xfrm>
+            <a:off x="11594592" y="6473952"/>
+            <a:ext cx="365760" cy="274320"/>
+          </a:xfrm>
+          <a:prstGeom prst="rect">
+            <a:avLst/>
+          </a:prstGeom>
+          <a:noFill/>
+        </p:spPr>
+        <p:txBody>
+          <a:bodyPr wrap="square">
+            <a:spAutoFit/>
+          </a:bodyPr>
+          <a:lstStyle/>
+          <a:p>
+            <a:pPr algn="r"/>
+            <a:r>
+              <a:rPr sz="1000" b="0">
+                <a:solidFill>
+                  <a:srgbClr val="5A5A5A"/>
+                </a:solidFill>
+                <a:latin typeface="Calibri"/>
+              </a:rPr>
+              <a:t>14</a:t>
+            </a:r>
+          </a:p>
+        </p:txBody>
+      </p:sp>
+      <p:sp>
+        <p:nvSpPr>
+          <p:cNvPr id="8" name="Rounded Rectangle 7"/>
+          <p:cNvSpPr/>
+          <p:nvPr/>
+        </p:nvSpPr>
+        <p:spPr>
+          <a:xfrm>
+            <a:off x="292608" y="1234440"/>
+            <a:ext cx="2798064" cy="3108960"/>
+          </a:xfrm>
+          <a:prstGeom prst="roundRect">
+            <a:avLst>
+              <a:gd name="adj" fmla="val 6000"/>
+            </a:avLst>
+          </a:prstGeom>
+          <a:solidFill>
+            <a:srgbClr val="ECECEC"/>
+          </a:solidFill>
+          <a:ln>
+            <a:noFill/>
+          </a:ln>
+          <a:effectLst/>
+        </p:spPr>
+        <p:style>
+          <a:lnRef idx="1">
+            <a:schemeClr val="accent1"/>
+          </a:lnRef>
+          <a:fillRef idx="3">
+            <a:schemeClr val="accent1"/>
+          </a:fillRef>
+          <a:effectRef idx="2">
+            <a:schemeClr val="accent1"/>
+          </a:effectRef>
+          <a:fontRef idx="minor">
+            <a:schemeClr val="lt1"/>
+          </a:fontRef>
+        </p:style>
+        <p:txBody>
+          <a:bodyPr rtlCol="0" anchor="ctr"/>
+          <a:lstStyle/>
+          <a:p>
+            <a:pPr algn="ctr"/>
+          </a:p>
+        </p:txBody>
+      </p:sp>
+      <p:sp>
+        <p:nvSpPr>
+          <p:cNvPr id="9" name="Oval 8"/>
+          <p:cNvSpPr/>
+          <p:nvPr/>
+        </p:nvSpPr>
+        <p:spPr>
+          <a:xfrm>
+            <a:off x="493776" y="1435608"/>
+            <a:ext cx="457200" cy="457200"/>
+          </a:xfrm>
+          <a:prstGeom prst="ellipse">
+            <a:avLst/>
+          </a:prstGeom>
+          <a:solidFill>
+            <a:srgbClr val="CC0E1E"/>
+          </a:solidFill>
+          <a:ln>
+            <a:noFill/>
+          </a:ln>
+          <a:effectLst/>
+        </p:spPr>
+        <p:style>
+          <a:lnRef idx="1">
+            <a:schemeClr val="accent1"/>
+          </a:lnRef>
+          <a:fillRef idx="3">
+            <a:schemeClr val="accent1"/>
+          </a:fillRef>
+          <a:effectRef idx="2">
+            <a:schemeClr val="accent1"/>
+          </a:effectRef>
+          <a:fontRef idx="minor">
+            <a:schemeClr val="lt1"/>
+          </a:fontRef>
+        </p:style>
+        <p:txBody>
+          <a:bodyPr rtlCol="0" anchor="ctr" lIns="0" rIns="0" tIns="0" bIns="0"/>
+          <a:lstStyle/>
+          <a:p>
+            <a:pPr algn="ctr"/>
+            <a:r>
+              <a:rPr sz="1800" b="1">
+                <a:solidFill>
+                  <a:srgbClr val="FFFFFF"/>
+                </a:solidFill>
+                <a:latin typeface="Calibri"/>
+              </a:rPr>
+              <a:t>1</a:t>
+            </a:r>
+          </a:p>
+        </p:txBody>
+      </p:sp>
+      <p:sp>
+        <p:nvSpPr>
+          <p:cNvPr id="10" name="TextBox 9"/>
+          <p:cNvSpPr txBox="1"/>
+          <p:nvPr/>
+        </p:nvSpPr>
+        <p:spPr>
+          <a:xfrm>
+            <a:off x="1115568" y="1435608"/>
+            <a:ext cx="1792224" cy="411480"/>
+          </a:xfrm>
+          <a:prstGeom prst="rect">
+            <a:avLst/>
+          </a:prstGeom>
+          <a:noFill/>
+        </p:spPr>
+        <p:txBody>
+          <a:bodyPr wrap="square">
+            <a:spAutoFit/>
+          </a:bodyPr>
+          <a:lstStyle/>
+          <a:p>
+            <a:pPr algn="l"/>
+            <a:r>
+              <a:rPr sz="1500" b="1">
+                <a:solidFill>
+                  <a:srgbClr val="1A1A1A"/>
+                </a:solidFill>
+                <a:latin typeface="Calibri"/>
+              </a:rPr>
+              <a:t>CYPRUS proposal</a:t>
+            </a:r>
+          </a:p>
+        </p:txBody>
+      </p:sp>
+      <p:sp>
+        <p:nvSpPr>
+          <p:cNvPr id="11" name="TextBox 10"/>
+          <p:cNvSpPr txBox="1"/>
+          <p:nvPr/>
+        </p:nvSpPr>
+        <p:spPr>
+          <a:xfrm>
+            <a:off x="585216" y="2011680"/>
+            <a:ext cx="2249424" cy="2194560"/>
+          </a:xfrm>
+          <a:prstGeom prst="rect">
+            <a:avLst/>
+          </a:prstGeom>
+          <a:noFill/>
+        </p:spPr>
+        <p:txBody>
+          <a:bodyPr wrap="square">
+            <a:spAutoFit/>
+          </a:bodyPr>
+          <a:lstStyle/>
+          <a:p>
+            <a:pPr>
+              <a:lnSpc>
+                <a:spcPct val="115000"/>
+              </a:lnSpc>
+              <a:spcAft>
+                <a:spcPts val="1000"/>
+              </a:spcAft>
+            </a:pPr>
+            <a:r>
+              <a:rPr sz="1250" b="1">
+                <a:solidFill>
+                  <a:srgbClr val="CC0E1E"/>
+                </a:solidFill>
+                <a:latin typeface="Calibri"/>
+              </a:rPr>
+              <a:t>—  </a:t>
+            </a:r>
+            <a:r>
+              <a:rPr sz="1250">
+                <a:solidFill>
+                  <a:srgbClr val="1A1A1A"/>
+                </a:solidFill>
+                <a:latin typeface="Calibri"/>
+              </a:rPr>
+              <a:t>Loutsios &amp; Sons submits a proposed parts list.</a:t>
+            </a:r>
+          </a:p>
+        </p:txBody>
+      </p:sp>
+      <p:sp>
+        <p:nvSpPr>
+          <p:cNvPr id="12" name="Rounded Rectangle 11"/>
+          <p:cNvSpPr/>
+          <p:nvPr/>
+        </p:nvSpPr>
+        <p:spPr>
+          <a:xfrm>
+            <a:off x="3227832" y="1234440"/>
+            <a:ext cx="2798064" cy="3108960"/>
+          </a:xfrm>
+          <a:prstGeom prst="roundRect">
+            <a:avLst>
+              <a:gd name="adj" fmla="val 6000"/>
+            </a:avLst>
+          </a:prstGeom>
+          <a:solidFill>
+            <a:srgbClr val="ECECEC"/>
+          </a:solidFill>
+          <a:ln>
+            <a:noFill/>
+          </a:ln>
+          <a:effectLst/>
+        </p:spPr>
+        <p:style>
+          <a:lnRef idx="1">
+            <a:schemeClr val="accent1"/>
+          </a:lnRef>
+          <a:fillRef idx="3">
+            <a:schemeClr val="accent1"/>
+          </a:fillRef>
+          <a:effectRef idx="2">
+            <a:schemeClr val="accent1"/>
+          </a:effectRef>
+          <a:fontRef idx="minor">
+            <a:schemeClr val="lt1"/>
+          </a:fontRef>
+        </p:style>
+        <p:txBody>
+          <a:bodyPr rtlCol="0" anchor="ctr"/>
+          <a:lstStyle/>
+          <a:p>
+            <a:pPr algn="ctr"/>
+          </a:p>
+        </p:txBody>
+      </p:sp>
+      <p:sp>
+        <p:nvSpPr>
+          <p:cNvPr id="13" name="Oval 12"/>
+          <p:cNvSpPr/>
+          <p:nvPr/>
+        </p:nvSpPr>
+        <p:spPr>
+          <a:xfrm>
+            <a:off x="3429000" y="1435608"/>
+            <a:ext cx="457200" cy="457200"/>
+          </a:xfrm>
+          <a:prstGeom prst="ellipse">
+            <a:avLst/>
+          </a:prstGeom>
+          <a:solidFill>
+            <a:srgbClr val="CC0E1E"/>
+          </a:solidFill>
+          <a:ln>
+            <a:noFill/>
+          </a:ln>
+          <a:effectLst/>
+        </p:spPr>
+        <p:style>
+          <a:lnRef idx="1">
+            <a:schemeClr val="accent1"/>
+          </a:lnRef>
+          <a:fillRef idx="3">
+            <a:schemeClr val="accent1"/>
+          </a:fillRef>
+          <a:effectRef idx="2">
+            <a:schemeClr val="accent1"/>
+          </a:effectRef>
+          <a:fontRef idx="minor">
+            <a:schemeClr val="lt1"/>
+          </a:fontRef>
+        </p:style>
+        <p:txBody>
+          <a:bodyPr rtlCol="0" anchor="ctr" lIns="0" rIns="0" tIns="0" bIns="0"/>
+          <a:lstStyle/>
+          <a:p>
+            <a:pPr algn="ctr"/>
+            <a:r>
+              <a:rPr sz="1800" b="1">
+                <a:solidFill>
+                  <a:srgbClr val="FFFFFF"/>
+                </a:solidFill>
+                <a:latin typeface="Calibri"/>
+              </a:rPr>
+              <a:t>2</a:t>
+            </a:r>
+          </a:p>
+        </p:txBody>
+      </p:sp>
+      <p:sp>
+        <p:nvSpPr>
+          <p:cNvPr id="14" name="TextBox 13"/>
+          <p:cNvSpPr txBox="1"/>
+          <p:nvPr/>
+        </p:nvSpPr>
+        <p:spPr>
+          <a:xfrm>
+            <a:off x="4050792" y="1435608"/>
+            <a:ext cx="1792224" cy="411480"/>
+          </a:xfrm>
+          <a:prstGeom prst="rect">
+            <a:avLst/>
+          </a:prstGeom>
+          <a:noFill/>
+        </p:spPr>
+        <p:txBody>
+          <a:bodyPr wrap="square">
+            <a:spAutoFit/>
+          </a:bodyPr>
+          <a:lstStyle/>
+          <a:p>
+            <a:pPr algn="l"/>
+            <a:r>
+              <a:rPr sz="1500" b="1">
+                <a:solidFill>
+                  <a:srgbClr val="1A1A1A"/>
+                </a:solidFill>
+                <a:latin typeface="Calibri"/>
+              </a:rPr>
+              <a:t>ISZE review</a:t>
+            </a:r>
+          </a:p>
+        </p:txBody>
+      </p:sp>
+      <p:sp>
+        <p:nvSpPr>
+          <p:cNvPr id="15" name="TextBox 14"/>
+          <p:cNvSpPr txBox="1"/>
+          <p:nvPr/>
+        </p:nvSpPr>
+        <p:spPr>
+          <a:xfrm>
+            <a:off x="3520440" y="2011680"/>
+            <a:ext cx="2249424" cy="2194560"/>
+          </a:xfrm>
+          <a:prstGeom prst="rect">
+            <a:avLst/>
+          </a:prstGeom>
+          <a:noFill/>
+        </p:spPr>
+        <p:txBody>
+          <a:bodyPr wrap="square">
+            <a:spAutoFit/>
+          </a:bodyPr>
+          <a:lstStyle/>
+          <a:p>
+            <a:pPr>
+              <a:lnSpc>
+                <a:spcPct val="115000"/>
+              </a:lnSpc>
+              <a:spcAft>
+                <a:spcPts val="1000"/>
+              </a:spcAft>
+            </a:pPr>
+            <a:r>
+              <a:rPr sz="1250" b="1">
+                <a:solidFill>
+                  <a:srgbClr val="CC0E1E"/>
+                </a:solidFill>
+                <a:latin typeface="Calibri"/>
+              </a:rPr>
+              <a:t>—  </a:t>
+            </a:r>
+            <a:r>
+              <a:rPr sz="1250">
+                <a:solidFill>
+                  <a:srgbClr val="1A1A1A"/>
+                </a:solidFill>
+                <a:latin typeface="Calibri"/>
+              </a:rPr>
+              <a:t>ISZE reviews the proposal against network data and fit.</a:t>
+            </a:r>
+          </a:p>
+        </p:txBody>
+      </p:sp>
+      <p:sp>
+        <p:nvSpPr>
+          <p:cNvPr id="16" name="Rounded Rectangle 15"/>
+          <p:cNvSpPr/>
+          <p:nvPr/>
+        </p:nvSpPr>
+        <p:spPr>
+          <a:xfrm>
+            <a:off x="6163056" y="1234440"/>
+            <a:ext cx="2798064" cy="3108960"/>
+          </a:xfrm>
+          <a:prstGeom prst="roundRect">
+            <a:avLst>
+              <a:gd name="adj" fmla="val 6000"/>
+            </a:avLst>
+          </a:prstGeom>
+          <a:solidFill>
+            <a:srgbClr val="ECECEC"/>
+          </a:solidFill>
+          <a:ln>
+            <a:noFill/>
+          </a:ln>
+          <a:effectLst/>
+        </p:spPr>
+        <p:style>
+          <a:lnRef idx="1">
+            <a:schemeClr val="accent1"/>
+          </a:lnRef>
+          <a:fillRef idx="3">
+            <a:schemeClr val="accent1"/>
+          </a:fillRef>
+          <a:effectRef idx="2">
+            <a:schemeClr val="accent1"/>
+          </a:effectRef>
+          <a:fontRef idx="minor">
+            <a:schemeClr val="lt1"/>
+          </a:fontRef>
+        </p:style>
+        <p:txBody>
+          <a:bodyPr rtlCol="0" anchor="ctr"/>
+          <a:lstStyle/>
+          <a:p>
+            <a:pPr algn="ctr"/>
+          </a:p>
+        </p:txBody>
+      </p:sp>
+      <p:sp>
+        <p:nvSpPr>
+          <p:cNvPr id="17" name="Oval 16"/>
+          <p:cNvSpPr/>
+          <p:nvPr/>
+        </p:nvSpPr>
+        <p:spPr>
+          <a:xfrm>
+            <a:off x="6364224" y="1435608"/>
+            <a:ext cx="457200" cy="457200"/>
+          </a:xfrm>
+          <a:prstGeom prst="ellipse">
+            <a:avLst/>
+          </a:prstGeom>
+          <a:solidFill>
+            <a:srgbClr val="CC0E1E"/>
+          </a:solidFill>
+          <a:ln>
+            <a:noFill/>
+          </a:ln>
+          <a:effectLst/>
+        </p:spPr>
+        <p:style>
+          <a:lnRef idx="1">
+            <a:schemeClr val="accent1"/>
+          </a:lnRef>
+          <a:fillRef idx="3">
+            <a:schemeClr val="accent1"/>
+          </a:fillRef>
+          <a:effectRef idx="2">
+            <a:schemeClr val="accent1"/>
+          </a:effectRef>
+          <a:fontRef idx="minor">
+            <a:schemeClr val="lt1"/>
+          </a:fontRef>
+        </p:style>
+        <p:txBody>
+          <a:bodyPr rtlCol="0" anchor="ctr" lIns="0" rIns="0" tIns="0" bIns="0"/>
+          <a:lstStyle/>
+          <a:p>
+            <a:pPr algn="ctr"/>
+            <a:r>
+              <a:rPr sz="1800" b="1">
+                <a:solidFill>
+                  <a:srgbClr val="FFFFFF"/>
+                </a:solidFill>
+                <a:latin typeface="Calibri"/>
+              </a:rPr>
+              <a:t>3</a:t>
+            </a:r>
+          </a:p>
+        </p:txBody>
+      </p:sp>
+      <p:sp>
+        <p:nvSpPr>
+          <p:cNvPr id="18" name="TextBox 17"/>
+          <p:cNvSpPr txBox="1"/>
+          <p:nvPr/>
+        </p:nvSpPr>
+        <p:spPr>
+          <a:xfrm>
+            <a:off x="6986016" y="1435608"/>
+            <a:ext cx="1792224" cy="411480"/>
+          </a:xfrm>
+          <a:prstGeom prst="rect">
+            <a:avLst/>
+          </a:prstGeom>
+          <a:noFill/>
+        </p:spPr>
+        <p:txBody>
+          <a:bodyPr wrap="square">
+            <a:spAutoFit/>
+          </a:bodyPr>
+          <a:lstStyle/>
+          <a:p>
+            <a:pPr algn="l"/>
+            <a:r>
+              <a:rPr sz="1500" b="1">
+                <a:solidFill>
+                  <a:srgbClr val="1A1A1A"/>
+                </a:solidFill>
+                <a:latin typeface="Calibri"/>
+              </a:rPr>
+              <a:t>Counter-proposal</a:t>
+            </a:r>
+          </a:p>
+        </p:txBody>
+      </p:sp>
+      <p:sp>
+        <p:nvSpPr>
+          <p:cNvPr id="19" name="TextBox 18"/>
+          <p:cNvSpPr txBox="1"/>
+          <p:nvPr/>
+        </p:nvSpPr>
+        <p:spPr>
+          <a:xfrm>
+            <a:off x="6455664" y="2011680"/>
+            <a:ext cx="2249424" cy="2194560"/>
+          </a:xfrm>
+          <a:prstGeom prst="rect">
+            <a:avLst/>
+          </a:prstGeom>
+          <a:noFill/>
+        </p:spPr>
+        <p:txBody>
+          <a:bodyPr wrap="square">
+            <a:spAutoFit/>
+          </a:bodyPr>
+          <a:lstStyle/>
+          <a:p>
+            <a:pPr>
+              <a:lnSpc>
+                <a:spcPct val="115000"/>
+              </a:lnSpc>
+              <a:spcAft>
+                <a:spcPts val="1000"/>
+              </a:spcAft>
+            </a:pPr>
+            <a:r>
+              <a:rPr sz="1250" b="1">
+                <a:solidFill>
+                  <a:srgbClr val="CC0E1E"/>
+                </a:solidFill>
+                <a:latin typeface="Calibri"/>
+              </a:rPr>
+              <a:t>—  </a:t>
+            </a:r>
+            <a:r>
+              <a:rPr sz="1250">
+                <a:solidFill>
+                  <a:srgbClr val="1A1A1A"/>
+                </a:solidFill>
+                <a:latin typeface="Calibri"/>
+              </a:rPr>
+              <a:t>ISZE returns a counter-proposal where needed.</a:t>
+            </a:r>
+          </a:p>
+        </p:txBody>
+      </p:sp>
+      <p:sp>
+        <p:nvSpPr>
+          <p:cNvPr id="20" name="Rounded Rectangle 19"/>
+          <p:cNvSpPr/>
+          <p:nvPr/>
+        </p:nvSpPr>
+        <p:spPr>
+          <a:xfrm>
+            <a:off x="9098280" y="1234440"/>
+            <a:ext cx="2798064" cy="3108960"/>
+          </a:xfrm>
+          <a:prstGeom prst="roundRect">
+            <a:avLst>
+              <a:gd name="adj" fmla="val 6000"/>
+            </a:avLst>
+          </a:prstGeom>
+          <a:solidFill>
+            <a:srgbClr val="ECECEC"/>
+          </a:solidFill>
+          <a:ln>
+            <a:noFill/>
+          </a:ln>
+          <a:effectLst/>
+        </p:spPr>
+        <p:style>
+          <a:lnRef idx="1">
+            <a:schemeClr val="accent1"/>
+          </a:lnRef>
+          <a:fillRef idx="3">
+            <a:schemeClr val="accent1"/>
+          </a:fillRef>
+          <a:effectRef idx="2">
+            <a:schemeClr val="accent1"/>
+          </a:effectRef>
+          <a:fontRef idx="minor">
+            <a:schemeClr val="lt1"/>
+          </a:fontRef>
+        </p:style>
+        <p:txBody>
+          <a:bodyPr rtlCol="0" anchor="ctr"/>
+          <a:lstStyle/>
+          <a:p>
+            <a:pPr algn="ctr"/>
+          </a:p>
+        </p:txBody>
+      </p:sp>
+      <p:sp>
+        <p:nvSpPr>
+          <p:cNvPr id="21" name="Oval 20"/>
+          <p:cNvSpPr/>
+          <p:nvPr/>
+        </p:nvSpPr>
+        <p:spPr>
+          <a:xfrm>
+            <a:off x="9299448" y="1435608"/>
+            <a:ext cx="457200" cy="457200"/>
+          </a:xfrm>
+          <a:prstGeom prst="ellipse">
+            <a:avLst/>
+          </a:prstGeom>
+          <a:solidFill>
+            <a:srgbClr val="CC0E1E"/>
+          </a:solidFill>
+          <a:ln>
+            <a:noFill/>
+          </a:ln>
+          <a:effectLst/>
+        </p:spPr>
+        <p:style>
+          <a:lnRef idx="1">
+            <a:schemeClr val="accent1"/>
+          </a:lnRef>
+          <a:fillRef idx="3">
+            <a:schemeClr val="accent1"/>
+          </a:fillRef>
+          <a:effectRef idx="2">
+            <a:schemeClr val="accent1"/>
+          </a:effectRef>
+          <a:fontRef idx="minor">
+            <a:schemeClr val="lt1"/>
+          </a:fontRef>
+        </p:style>
+        <p:txBody>
+          <a:bodyPr rtlCol="0" anchor="ctr" lIns="0" rIns="0" tIns="0" bIns="0"/>
+          <a:lstStyle/>
+          <a:p>
+            <a:pPr algn="ctr"/>
+            <a:r>
+              <a:rPr sz="1800" b="1">
+                <a:solidFill>
+                  <a:srgbClr val="FFFFFF"/>
+                </a:solidFill>
+                <a:latin typeface="Calibri"/>
+              </a:rPr>
+              <a:t>4</a:t>
+            </a:r>
+          </a:p>
+        </p:txBody>
+      </p:sp>
+      <p:sp>
+        <p:nvSpPr>
+          <p:cNvPr id="22" name="TextBox 21"/>
+          <p:cNvSpPr txBox="1"/>
+          <p:nvPr/>
+        </p:nvSpPr>
+        <p:spPr>
+          <a:xfrm>
+            <a:off x="9921240" y="1435608"/>
+            <a:ext cx="1792224" cy="411480"/>
+          </a:xfrm>
+          <a:prstGeom prst="rect">
+            <a:avLst/>
+          </a:prstGeom>
+          <a:noFill/>
+        </p:spPr>
+        <p:txBody>
+          <a:bodyPr wrap="square">
+            <a:spAutoFit/>
+          </a:bodyPr>
+          <a:lstStyle/>
+          <a:p>
+            <a:pPr algn="l"/>
+            <a:r>
+              <a:rPr sz="1500" b="1">
+                <a:solidFill>
+                  <a:srgbClr val="1A1A1A"/>
+                </a:solidFill>
+                <a:latin typeface="Calibri"/>
+              </a:rPr>
+              <a:t>Final approval</a:t>
+            </a:r>
+          </a:p>
+        </p:txBody>
+      </p:sp>
+      <p:sp>
+        <p:nvSpPr>
+          <p:cNvPr id="23" name="TextBox 22"/>
+          <p:cNvSpPr txBox="1"/>
+          <p:nvPr/>
+        </p:nvSpPr>
+        <p:spPr>
+          <a:xfrm>
+            <a:off x="9390888" y="2011680"/>
+            <a:ext cx="2249424" cy="2194560"/>
+          </a:xfrm>
+          <a:prstGeom prst="rect">
+            <a:avLst/>
+          </a:prstGeom>
+          <a:noFill/>
+        </p:spPr>
+        <p:txBody>
+          <a:bodyPr wrap="square">
+            <a:spAutoFit/>
+          </a:bodyPr>
+          <a:lstStyle/>
+          <a:p>
+            <a:pPr>
+              <a:lnSpc>
+                <a:spcPct val="115000"/>
+              </a:lnSpc>
+              <a:spcAft>
+                <a:spcPts val="1000"/>
+              </a:spcAft>
+            </a:pPr>
+            <a:r>
+              <a:rPr sz="1250" b="1">
+                <a:solidFill>
+                  <a:srgbClr val="CC0E1E"/>
+                </a:solidFill>
+                <a:latin typeface="Calibri"/>
+              </a:rPr>
+              <a:t>—  </a:t>
+            </a:r>
+            <a:r>
+              <a:rPr sz="1250">
+                <a:solidFill>
+                  <a:srgbClr val="1A1A1A"/>
+                </a:solidFill>
+                <a:latin typeface="Calibri"/>
+              </a:rPr>
+              <a:t>Signed off by ISZE management.</a:t>
+            </a:r>
+          </a:p>
+        </p:txBody>
+      </p:sp>
+      <p:sp>
+        <p:nvSpPr>
+          <p:cNvPr id="24" name="TextBox 23"/>
+          <p:cNvSpPr txBox="1"/>
+          <p:nvPr/>
+        </p:nvSpPr>
+        <p:spPr>
+          <a:xfrm>
+            <a:off x="292608" y="4572000"/>
+            <a:ext cx="8595360" cy="365760"/>
+          </a:xfrm>
+          <a:prstGeom prst="rect">
+            <a:avLst/>
+          </a:prstGeom>
+          <a:noFill/>
+        </p:spPr>
+        <p:txBody>
+          <a:bodyPr wrap="square">
+            <a:spAutoFit/>
+          </a:bodyPr>
+          <a:lstStyle/>
+          <a:p>
+            <a:pPr algn="l"/>
+            <a:r>
+              <a:rPr sz="1400" b="1">
+                <a:solidFill>
+                  <a:srgbClr val="CC0E1E"/>
+                </a:solidFill>
+                <a:latin typeface="Calibri"/>
+              </a:rPr>
+              <a:t>Purpose: higher turnover for both sides.</a:t>
+            </a:r>
+          </a:p>
+        </p:txBody>
+      </p:sp>
+    </p:spTree>
+  </p:cSld>
+  <p:clrMapOvr>
+    <a:masterClrMapping/>
+  </p:clrMapOvr>
+</p:sld>
+</file>
+
+<file path=ppt/slides/slide15.xml><?xml version="1.0" encoding="utf-8"?>
+<p:sld xmlns:a="http://schemas.openxmlformats.org/drawingml/2006/main" xmlns:p="http://schemas.openxmlformats.org/presentationml/2006/main" xmlns:r="http://schemas.openxmlformats.org/officeDocument/2006/relationships">
+  <p:cSld>
+    <p:bg>
+      <p:bgPr>
+        <a:solidFill>
+          <a:srgbClr val="FFFFFF"/>
+        </a:solidFill>
+        <a:effectLst/>
+      </p:bgPr>
+    </p:bg>
+    <p:spTree>
+      <p:nvGrpSpPr>
+        <p:cNvPr id="1" name=""/>
+        <p:cNvGrpSpPr/>
+        <p:nvPr/>
+      </p:nvGrpSpPr>
+      <p:grpSpPr/>
+      <p:pic>
+        <p:nvPicPr>
+          <p:cNvPr id="2" name="Picture 1" descr="isuzu_logo_red.png"/>
+          <p:cNvPicPr>
+            <a:picLocks noChangeAspect="1"/>
+          </p:cNvPicPr>
+          <p:nvPr/>
+        </p:nvPicPr>
+        <p:blipFill>
+          <a:blip r:embed="rId2"/>
+          <a:stretch>
+            <a:fillRect/>
+          </a:stretch>
+        </p:blipFill>
+        <p:spPr>
+          <a:xfrm>
+            <a:off x="256032" y="6263640"/>
+            <a:ext cx="1679787" cy="292608"/>
+          </a:xfrm>
+          <a:prstGeom prst="rect">
+            <a:avLst/>
+          </a:prstGeom>
+        </p:spPr>
+      </p:pic>
+      <p:sp>
+        <p:nvSpPr>
+          <p:cNvPr id="3" name="Rectangle 2"/>
+          <p:cNvSpPr/>
+          <p:nvPr/>
+        </p:nvSpPr>
+        <p:spPr>
+          <a:xfrm>
+            <a:off x="0" y="6766560"/>
+            <a:ext cx="12188952" cy="91440"/>
+          </a:xfrm>
+          <a:prstGeom prst="rect">
+            <a:avLst/>
+          </a:prstGeom>
+          <a:solidFill>
+            <a:srgbClr val="CC0E1E"/>
+          </a:solidFill>
+          <a:ln>
+            <a:noFill/>
+          </a:ln>
+        </p:spPr>
+        <p:style>
+          <a:lnRef idx="1">
+            <a:schemeClr val="accent1"/>
+          </a:lnRef>
+          <a:fillRef idx="3">
+            <a:schemeClr val="accent1"/>
+          </a:fillRef>
+          <a:effectRef idx="2">
+            <a:schemeClr val="accent1"/>
+          </a:effectRef>
+          <a:fontRef idx="minor">
+            <a:schemeClr val="lt1"/>
+          </a:fontRef>
+        </p:style>
+        <p:txBody>
+          <a:bodyPr rtlCol="0" anchor="ctr"/>
+          <a:lstStyle/>
+          <a:p>
+            <a:pPr algn="ctr"/>
+          </a:p>
+        </p:txBody>
+      </p:sp>
+      <p:sp>
+        <p:nvSpPr>
+          <p:cNvPr id="4" name="TextBox 3"/>
+          <p:cNvSpPr txBox="1"/>
+          <p:nvPr/>
+        </p:nvSpPr>
+        <p:spPr>
+          <a:xfrm>
+            <a:off x="292608" y="201168"/>
+            <a:ext cx="11430000" cy="274320"/>
+          </a:xfrm>
+          <a:prstGeom prst="rect">
+            <a:avLst/>
+          </a:prstGeom>
+          <a:noFill/>
+        </p:spPr>
+        <p:txBody>
+          <a:bodyPr wrap="square">
+            <a:spAutoFit/>
+          </a:bodyPr>
+          <a:lstStyle/>
+          <a:p>
+            <a:pPr algn="l"/>
+            <a:r>
+              <a:rPr sz="1100" b="1">
+                <a:solidFill>
+                  <a:srgbClr val="CC0E1E"/>
+                </a:solidFill>
+                <a:latin typeface="Calibri"/>
+              </a:rPr>
+              <a:t>R&amp;M</a:t>
+            </a:r>
+          </a:p>
+        </p:txBody>
+      </p:sp>
+      <p:sp>
+        <p:nvSpPr>
+          <p:cNvPr id="5" name="TextBox 4"/>
+          <p:cNvSpPr txBox="1"/>
+          <p:nvPr/>
+        </p:nvSpPr>
+        <p:spPr>
+          <a:xfrm>
+            <a:off x="292608" y="475488"/>
+            <a:ext cx="11612880" cy="566928"/>
+          </a:xfrm>
+          <a:prstGeom prst="rect">
+            <a:avLst/>
+          </a:prstGeom>
+          <a:noFill/>
+        </p:spPr>
+        <p:txBody>
+          <a:bodyPr wrap="square">
+            <a:spAutoFit/>
+          </a:bodyPr>
+          <a:lstStyle/>
+          <a:p>
+            <a:pPr algn="l"/>
+            <a:r>
+              <a:rPr sz="2500" b="1">
+                <a:solidFill>
+                  <a:srgbClr val="1A1A1A"/>
+                </a:solidFill>
+                <a:latin typeface="Calibri"/>
+              </a:rPr>
+              <a:t>R&amp;M — let's align on the market</a:t>
+            </a:r>
+          </a:p>
+        </p:txBody>
+      </p:sp>
+      <p:sp>
+        <p:nvSpPr>
+          <p:cNvPr id="6" name="Rectangle 5"/>
+          <p:cNvSpPr/>
+          <p:nvPr/>
+        </p:nvSpPr>
+        <p:spPr>
+          <a:xfrm>
+            <a:off x="292608" y="1005840"/>
+            <a:ext cx="11612880" cy="28000"/>
+          </a:xfrm>
+          <a:prstGeom prst="rect">
+            <a:avLst/>
+          </a:prstGeom>
+          <a:solidFill>
+            <a:srgbClr val="CC0E1E"/>
+          </a:solidFill>
+          <a:ln>
+            <a:noFill/>
+          </a:ln>
+        </p:spPr>
+        <p:style>
+          <a:lnRef idx="1">
+            <a:schemeClr val="accent1"/>
+          </a:lnRef>
+          <a:fillRef idx="3">
+            <a:schemeClr val="accent1"/>
+          </a:fillRef>
+          <a:effectRef idx="2">
+            <a:schemeClr val="accent1"/>
+          </a:effectRef>
+          <a:fontRef idx="minor">
+            <a:schemeClr val="lt1"/>
+          </a:fontRef>
+        </p:style>
+        <p:txBody>
+          <a:bodyPr rtlCol="0" anchor="ctr"/>
+          <a:lstStyle/>
+          <a:p>
+            <a:pPr algn="ctr"/>
+          </a:p>
+        </p:txBody>
+      </p:sp>
+      <p:sp>
+        <p:nvSpPr>
+          <p:cNvPr id="7" name="TextBox 6"/>
+          <p:cNvSpPr txBox="1"/>
+          <p:nvPr/>
+        </p:nvSpPr>
+        <p:spPr>
+          <a:xfrm>
+            <a:off x="11594592" y="6473952"/>
+            <a:ext cx="365760" cy="274320"/>
+          </a:xfrm>
+          <a:prstGeom prst="rect">
+            <a:avLst/>
+          </a:prstGeom>
+          <a:noFill/>
+        </p:spPr>
+        <p:txBody>
+          <a:bodyPr wrap="square">
+            <a:spAutoFit/>
+          </a:bodyPr>
+          <a:lstStyle/>
+          <a:p>
+            <a:pPr algn="r"/>
+            <a:r>
+              <a:rPr sz="1000" b="0">
+                <a:solidFill>
+                  <a:srgbClr val="5A5A5A"/>
+                </a:solidFill>
+                <a:latin typeface="Calibri"/>
+              </a:rPr>
+              <a:t>15</a:t>
+            </a:r>
+          </a:p>
+        </p:txBody>
+      </p:sp>
+      <p:sp>
+        <p:nvSpPr>
+          <p:cNvPr id="8" name="Rounded Rectangle 7"/>
+          <p:cNvSpPr/>
+          <p:nvPr/>
+        </p:nvSpPr>
+        <p:spPr>
+          <a:xfrm>
+            <a:off x="292608" y="1188720"/>
+            <a:ext cx="5486400" cy="4023360"/>
+          </a:xfrm>
+          <a:prstGeom prst="roundRect">
+            <a:avLst>
+              <a:gd name="adj" fmla="val 6000"/>
+            </a:avLst>
+          </a:prstGeom>
+          <a:solidFill>
+            <a:srgbClr val="ECECEC"/>
+          </a:solidFill>
+          <a:ln>
+            <a:noFill/>
+          </a:ln>
+          <a:effectLst/>
+        </p:spPr>
+        <p:style>
+          <a:lnRef idx="1">
+            <a:schemeClr val="accent1"/>
+          </a:lnRef>
+          <a:fillRef idx="3">
+            <a:schemeClr val="accent1"/>
+          </a:fillRef>
+          <a:effectRef idx="2">
+            <a:schemeClr val="accent1"/>
+          </a:effectRef>
+          <a:fontRef idx="minor">
+            <a:schemeClr val="lt1"/>
+          </a:fontRef>
+        </p:style>
+        <p:txBody>
+          <a:bodyPr rtlCol="0" anchor="ctr"/>
+          <a:lstStyle/>
+          <a:p>
+            <a:pPr algn="ctr"/>
+          </a:p>
+        </p:txBody>
+      </p:sp>
+      <p:sp>
+        <p:nvSpPr>
+          <p:cNvPr id="9" name="Oval 8"/>
+          <p:cNvSpPr/>
+          <p:nvPr/>
+        </p:nvSpPr>
+        <p:spPr>
+          <a:xfrm>
+            <a:off x="493776" y="1389888"/>
+            <a:ext cx="457200" cy="457200"/>
+          </a:xfrm>
+          <a:prstGeom prst="ellipse">
+            <a:avLst/>
+          </a:prstGeom>
+          <a:solidFill>
+            <a:srgbClr val="CC0E1E"/>
+          </a:solidFill>
+          <a:ln>
+            <a:noFill/>
+          </a:ln>
+          <a:effectLst/>
+        </p:spPr>
+        <p:style>
+          <a:lnRef idx="1">
+            <a:schemeClr val="accent1"/>
+          </a:lnRef>
+          <a:fillRef idx="3">
+            <a:schemeClr val="accent1"/>
+          </a:fillRef>
+          <a:effectRef idx="2">
+            <a:schemeClr val="accent1"/>
+          </a:effectRef>
+          <a:fontRef idx="minor">
+            <a:schemeClr val="lt1"/>
+          </a:fontRef>
+        </p:style>
+        <p:txBody>
+          <a:bodyPr rtlCol="0" anchor="ctr" lIns="0" rIns="0" tIns="0" bIns="0"/>
+          <a:lstStyle/>
+          <a:p>
+            <a:pPr algn="ctr"/>
+            <a:r>
+              <a:rPr sz="1800" b="1">
+                <a:solidFill>
+                  <a:srgbClr val="FFFFFF"/>
+                </a:solidFill>
+                <a:latin typeface="Calibri"/>
+              </a:rPr>
+              <a:t>M</a:t>
+            </a:r>
+          </a:p>
+        </p:txBody>
+      </p:sp>
+      <p:sp>
+        <p:nvSpPr>
+          <p:cNvPr id="10" name="TextBox 9"/>
+          <p:cNvSpPr txBox="1"/>
+          <p:nvPr/>
+        </p:nvSpPr>
+        <p:spPr>
+          <a:xfrm>
+            <a:off x="1115568" y="1389888"/>
+            <a:ext cx="4480560" cy="411480"/>
+          </a:xfrm>
+          <a:prstGeom prst="rect">
+            <a:avLst/>
+          </a:prstGeom>
+          <a:noFill/>
+        </p:spPr>
+        <p:txBody>
+          <a:bodyPr wrap="square">
+            <a:spAutoFit/>
+          </a:bodyPr>
+          <a:lstStyle/>
+          <a:p>
+            <a:pPr algn="l"/>
+            <a:r>
+              <a:rPr sz="1500" b="1">
+                <a:solidFill>
+                  <a:srgbClr val="1A1A1A"/>
+                </a:solidFill>
+                <a:latin typeface="Calibri"/>
+              </a:rPr>
+              <a:t>Market</a:t>
+            </a:r>
+          </a:p>
+        </p:txBody>
+      </p:sp>
+      <p:sp>
+        <p:nvSpPr>
+          <p:cNvPr id="11" name="TextBox 10"/>
+          <p:cNvSpPr txBox="1"/>
+          <p:nvPr/>
+        </p:nvSpPr>
+        <p:spPr>
+          <a:xfrm>
+            <a:off x="585216" y="1965960"/>
+            <a:ext cx="4937760" cy="3108960"/>
+          </a:xfrm>
+          <a:prstGeom prst="rect">
+            <a:avLst/>
+          </a:prstGeom>
+          <a:noFill/>
+        </p:spPr>
+        <p:txBody>
+          <a:bodyPr wrap="square">
+            <a:spAutoFit/>
+          </a:bodyPr>
+          <a:lstStyle/>
+          <a:p>
+            <a:pPr>
+              <a:lnSpc>
+                <a:spcPct val="115000"/>
+              </a:lnSpc>
+              <a:spcAft>
+                <a:spcPts val="1000"/>
+              </a:spcAft>
+            </a:pPr>
+            <a:r>
+              <a:rPr sz="1250" b="1">
+                <a:solidFill>
+                  <a:srgbClr val="CC0E1E"/>
+                </a:solidFill>
+                <a:latin typeface="Calibri"/>
+              </a:rPr>
+              <a:t>—  </a:t>
+            </a:r>
+            <a:r>
+              <a:rPr sz="1250">
+                <a:solidFill>
+                  <a:srgbClr val="1A1A1A"/>
+                </a:solidFill>
+                <a:latin typeface="Calibri"/>
+              </a:rPr>
+              <a:t>How is the market moving for you right now?</a:t>
+            </a:r>
+          </a:p>
+          <a:p>
+            <a:pPr>
+              <a:lnSpc>
+                <a:spcPct val="115000"/>
+              </a:lnSpc>
+              <a:spcAft>
+                <a:spcPts val="1000"/>
+              </a:spcAft>
+            </a:pPr>
+            <a:r>
+              <a:rPr sz="1250" b="1">
+                <a:solidFill>
+                  <a:srgbClr val="CC0E1E"/>
+                </a:solidFill>
+                <a:latin typeface="Calibri"/>
+              </a:rPr>
+              <a:t>—  </a:t>
+            </a:r>
+            <a:r>
+              <a:rPr sz="1250">
+                <a:solidFill>
+                  <a:srgbClr val="1A1A1A"/>
+                </a:solidFill>
+                <a:latin typeface="Calibri"/>
+              </a:rPr>
+              <a:t>How much of your volume is fleet business rather than retail?</a:t>
+            </a:r>
+          </a:p>
+          <a:p>
+            <a:pPr>
+              <a:lnSpc>
+                <a:spcPct val="115000"/>
+              </a:lnSpc>
+              <a:spcAft>
+                <a:spcPts val="1000"/>
+              </a:spcAft>
+            </a:pPr>
+            <a:r>
+              <a:rPr sz="1250" b="1">
+                <a:solidFill>
+                  <a:srgbClr val="CC0E1E"/>
+                </a:solidFill>
+                <a:latin typeface="Calibri"/>
+              </a:rPr>
+              <a:t>—  </a:t>
+            </a:r>
+            <a:r>
+              <a:rPr sz="1250">
+                <a:solidFill>
+                  <a:srgbClr val="1A1A1A"/>
+                </a:solidFill>
+                <a:latin typeface="Calibri"/>
+              </a:rPr>
+              <a:t>Where do you see the biggest hurdles this year?</a:t>
+            </a:r>
+          </a:p>
+          <a:p>
+            <a:pPr>
+              <a:lnSpc>
+                <a:spcPct val="115000"/>
+              </a:lnSpc>
+              <a:spcAft>
+                <a:spcPts val="1000"/>
+              </a:spcAft>
+            </a:pPr>
+            <a:r>
+              <a:rPr sz="1250" b="1">
+                <a:solidFill>
+                  <a:srgbClr val="CC0E1E"/>
+                </a:solidFill>
+                <a:latin typeface="Calibri"/>
+              </a:rPr>
+              <a:t>—  </a:t>
+            </a:r>
+            <a:r>
+              <a:rPr sz="1250">
+                <a:solidFill>
+                  <a:srgbClr val="1A1A1A"/>
+                </a:solidFill>
+                <a:latin typeface="Calibri"/>
+              </a:rPr>
+              <a:t>Where are your real strengths in this segment?</a:t>
+            </a:r>
+          </a:p>
+        </p:txBody>
+      </p:sp>
+      <p:sp>
+        <p:nvSpPr>
+          <p:cNvPr id="12" name="Rounded Rectangle 11"/>
+          <p:cNvSpPr/>
+          <p:nvPr/>
+        </p:nvSpPr>
+        <p:spPr>
+          <a:xfrm>
+            <a:off x="5943600" y="1188720"/>
+            <a:ext cx="5943600" cy="4023360"/>
+          </a:xfrm>
+          <a:prstGeom prst="roundRect">
+            <a:avLst>
+              <a:gd name="adj" fmla="val 6000"/>
+            </a:avLst>
+          </a:prstGeom>
+          <a:solidFill>
+            <a:srgbClr val="ECECEC"/>
+          </a:solidFill>
+          <a:ln>
+            <a:noFill/>
+          </a:ln>
+          <a:effectLst/>
+        </p:spPr>
+        <p:style>
+          <a:lnRef idx="1">
+            <a:schemeClr val="accent1"/>
+          </a:lnRef>
+          <a:fillRef idx="3">
+            <a:schemeClr val="accent1"/>
+          </a:fillRef>
+          <a:effectRef idx="2">
+            <a:schemeClr val="accent1"/>
+          </a:effectRef>
+          <a:fontRef idx="minor">
+            <a:schemeClr val="lt1"/>
+          </a:fontRef>
+        </p:style>
+        <p:txBody>
+          <a:bodyPr rtlCol="0" anchor="ctr"/>
+          <a:lstStyle/>
+          <a:p>
+            <a:pPr algn="ctr"/>
+          </a:p>
+        </p:txBody>
+      </p:sp>
+      <p:sp>
+        <p:nvSpPr>
+          <p:cNvPr id="13" name="Oval 12"/>
+          <p:cNvSpPr/>
+          <p:nvPr/>
+        </p:nvSpPr>
+        <p:spPr>
+          <a:xfrm>
+            <a:off x="6144768" y="1389888"/>
+            <a:ext cx="457200" cy="457200"/>
+          </a:xfrm>
+          <a:prstGeom prst="ellipse">
+            <a:avLst/>
+          </a:prstGeom>
+          <a:solidFill>
+            <a:srgbClr val="CC0E1E"/>
+          </a:solidFill>
+          <a:ln>
+            <a:noFill/>
+          </a:ln>
+          <a:effectLst/>
+        </p:spPr>
+        <p:style>
+          <a:lnRef idx="1">
+            <a:schemeClr val="accent1"/>
+          </a:lnRef>
+          <a:fillRef idx="3">
+            <a:schemeClr val="accent1"/>
+          </a:fillRef>
+          <a:effectRef idx="2">
+            <a:schemeClr val="accent1"/>
+          </a:effectRef>
+          <a:fontRef idx="minor">
+            <a:schemeClr val="lt1"/>
+          </a:fontRef>
+        </p:style>
+        <p:txBody>
+          <a:bodyPr rtlCol="0" anchor="ctr" lIns="0" rIns="0" tIns="0" bIns="0"/>
+          <a:lstStyle/>
+          <a:p>
+            <a:pPr algn="ctr"/>
+            <a:r>
+              <a:rPr sz="1800" b="1">
+                <a:solidFill>
+                  <a:srgbClr val="FFFFFF"/>
+                </a:solidFill>
+                <a:latin typeface="Calibri"/>
+              </a:rPr>
+              <a:t>S</a:t>
+            </a:r>
+          </a:p>
+        </p:txBody>
+      </p:sp>
+      <p:sp>
+        <p:nvSpPr>
+          <p:cNvPr id="14" name="TextBox 13"/>
+          <p:cNvSpPr txBox="1"/>
+          <p:nvPr/>
+        </p:nvSpPr>
+        <p:spPr>
+          <a:xfrm>
+            <a:off x="6766560" y="1389888"/>
+            <a:ext cx="4937760" cy="411480"/>
+          </a:xfrm>
+          <a:prstGeom prst="rect">
+            <a:avLst/>
+          </a:prstGeom>
+          <a:noFill/>
+        </p:spPr>
+        <p:txBody>
+          <a:bodyPr wrap="square">
+            <a:spAutoFit/>
+          </a:bodyPr>
+          <a:lstStyle/>
+          <a:p>
+            <a:pPr algn="l"/>
+            <a:r>
+              <a:rPr sz="1500" b="1">
+                <a:solidFill>
+                  <a:srgbClr val="1A1A1A"/>
+                </a:solidFill>
+                <a:latin typeface="Calibri"/>
+              </a:rPr>
+              <a:t>Servicing &amp; R&amp;M</a:t>
+            </a:r>
+          </a:p>
+        </p:txBody>
+      </p:sp>
+      <p:sp>
+        <p:nvSpPr>
+          <p:cNvPr id="15" name="TextBox 14"/>
+          <p:cNvSpPr txBox="1"/>
+          <p:nvPr/>
+        </p:nvSpPr>
+        <p:spPr>
+          <a:xfrm>
+            <a:off x="6236208" y="1965960"/>
+            <a:ext cx="5394960" cy="3108960"/>
+          </a:xfrm>
+          <a:prstGeom prst="rect">
+            <a:avLst/>
+          </a:prstGeom>
+          <a:noFill/>
+        </p:spPr>
+        <p:txBody>
+          <a:bodyPr wrap="square">
+            <a:spAutoFit/>
+          </a:bodyPr>
+          <a:lstStyle/>
+          <a:p>
+            <a:pPr>
+              <a:lnSpc>
+                <a:spcPct val="115000"/>
+              </a:lnSpc>
+              <a:spcAft>
+                <a:spcPts val="1000"/>
+              </a:spcAft>
+            </a:pPr>
+            <a:r>
+              <a:rPr sz="1250" b="1">
+                <a:solidFill>
+                  <a:srgbClr val="CC0E1E"/>
+                </a:solidFill>
+                <a:latin typeface="Calibri"/>
+              </a:rPr>
+              <a:t>—  </a:t>
+            </a:r>
+            <a:r>
+              <a:rPr sz="1250">
+                <a:solidFill>
+                  <a:srgbClr val="1A1A1A"/>
+                </a:solidFill>
+                <a:latin typeface="Calibri"/>
+              </a:rPr>
+              <a:t>Do you offer an R&amp;M or service-plan product today?</a:t>
+            </a:r>
+          </a:p>
+          <a:p>
+            <a:pPr>
+              <a:lnSpc>
+                <a:spcPct val="115000"/>
+              </a:lnSpc>
+              <a:spcAft>
+                <a:spcPts val="1000"/>
+              </a:spcAft>
+            </a:pPr>
+            <a:r>
+              <a:rPr sz="1250" b="1">
+                <a:solidFill>
+                  <a:srgbClr val="CC0E1E"/>
+                </a:solidFill>
+                <a:latin typeface="Calibri"/>
+              </a:rPr>
+              <a:t>—  </a:t>
+            </a:r>
+            <a:r>
+              <a:rPr sz="1250">
+                <a:solidFill>
+                  <a:srgbClr val="1A1A1A"/>
+                </a:solidFill>
+                <a:latin typeface="Calibri"/>
+              </a:rPr>
+              <a:t>What share of the parc do you retain for servicing after year three?</a:t>
+            </a:r>
+          </a:p>
+          <a:p>
+            <a:pPr>
+              <a:lnSpc>
+                <a:spcPct val="115000"/>
+              </a:lnSpc>
+              <a:spcAft>
+                <a:spcPts val="1000"/>
+              </a:spcAft>
+            </a:pPr>
+            <a:r>
+              <a:rPr sz="1250" b="1">
+                <a:solidFill>
+                  <a:srgbClr val="CC0E1E"/>
+                </a:solidFill>
+                <a:latin typeface="Calibri"/>
+              </a:rPr>
+              <a:t>—  </a:t>
+            </a:r>
+            <a:r>
+              <a:rPr sz="1250">
+                <a:solidFill>
+                  <a:srgbClr val="1A1A1A"/>
+                </a:solidFill>
+                <a:latin typeface="Calibri"/>
+              </a:rPr>
+              <a:t>Does R&amp;M business come bundled with fleet tenders — roughly what share?</a:t>
+            </a:r>
+          </a:p>
+          <a:p>
+            <a:pPr>
+              <a:lnSpc>
+                <a:spcPct val="115000"/>
+              </a:lnSpc>
+              <a:spcAft>
+                <a:spcPts val="1000"/>
+              </a:spcAft>
+            </a:pPr>
+            <a:r>
+              <a:rPr sz="1250" b="1">
+                <a:solidFill>
+                  <a:srgbClr val="CC0E1E"/>
+                </a:solidFill>
+                <a:latin typeface="Calibri"/>
+              </a:rPr>
+              <a:t>—  </a:t>
+            </a:r>
+            <a:r>
+              <a:rPr sz="1250">
+                <a:solidFill>
+                  <a:srgbClr val="1A1A1A"/>
+                </a:solidFill>
+                <a:latin typeface="Calibri"/>
+              </a:rPr>
+              <a:t>What would it take to bring more out-of-network servicing back?</a:t>
             </a:r>
           </a:p>
         </p:txBody>
@@ -7116,7 +8131,7 @@
                 </a:solidFill>
                 <a:latin typeface="Calibri"/>
               </a:rPr>
-              <a:t>SPA</a:t>
+              <a:t>ASK</a:t>
             </a:r>
           </a:p>
         </p:txBody>
@@ -7151,7 +8166,7 @@
                 </a:solidFill>
                 <a:latin typeface="Calibri"/>
               </a:rPr>
-              <a:t>SPA</a:t>
+              <a:t>Part-level Sales-to-Dealer Data</a:t>
             </a:r>
           </a:p>
         </p:txBody>
@@ -7243,7 +8258,7 @@
         <p:spPr>
           <a:xfrm>
             <a:off x="292608" y="1234440"/>
-            <a:ext cx="2798064" cy="3108960"/>
+            <a:ext cx="3611880" cy="2377440"/>
           </a:xfrm>
           <a:prstGeom prst="roundRect">
             <a:avLst>
@@ -7342,7 +8357,7 @@
         <p:spPr>
           <a:xfrm>
             <a:off x="1115568" y="1435608"/>
-            <a:ext cx="1792224" cy="411480"/>
+            <a:ext cx="2606040" cy="411480"/>
           </a:xfrm>
           <a:prstGeom prst="rect">
             <a:avLst/>
@@ -7363,7 +8378,7 @@
                 </a:solidFill>
                 <a:latin typeface="Calibri"/>
               </a:rPr>
-              <a:t>CYPRUS proposal</a:t>
+              <a:t>The starting point</a:t>
             </a:r>
           </a:p>
         </p:txBody>
@@ -7377,7 +8392,7 @@
         <p:spPr>
           <a:xfrm>
             <a:off x="585216" y="2011680"/>
-            <a:ext cx="2249424" cy="2194560"/>
+            <a:ext cx="3063240" cy="1463040"/>
           </a:xfrm>
           <a:prstGeom prst="rect">
             <a:avLst/>
@@ -7414,7 +8429,7 @@
                 </a:solidFill>
                 <a:latin typeface="Calibri"/>
               </a:rPr>
-              <a:t>Loutsios &amp; Sons submits a proposed parts list.</a:t>
+              <a:t>We have no Sales-to-Dealer figures from you for FY2026. The ask is monthly Sales-to-Dealer, at part-number level.</a:t>
             </a:r>
           </a:p>
         </p:txBody>
@@ -7427,8 +8442,8 @@
         </p:nvSpPr>
         <p:spPr>
           <a:xfrm>
-            <a:off x="3227832" y="1234440"/>
-            <a:ext cx="2798064" cy="3108960"/>
+            <a:off x="4087368" y="1234440"/>
+            <a:ext cx="3611880" cy="2377440"/>
           </a:xfrm>
           <a:prstGeom prst="roundRect">
             <a:avLst>
@@ -7473,7 +8488,7 @@
         </p:nvSpPr>
         <p:spPr>
           <a:xfrm>
-            <a:off x="3429000" y="1435608"/>
+            <a:off x="4288536" y="1435608"/>
             <a:ext cx="457200" cy="457200"/>
           </a:xfrm>
           <a:prstGeom prst="ellipse">
@@ -7526,8 +8541,8 @@
         </p:nvSpPr>
         <p:spPr>
           <a:xfrm>
-            <a:off x="4050792" y="1435608"/>
-            <a:ext cx="1792224" cy="411480"/>
+            <a:off x="4910328" y="1435608"/>
+            <a:ext cx="2606040" cy="411480"/>
           </a:xfrm>
           <a:prstGeom prst="rect">
             <a:avLst/>
@@ -7548,7 +8563,7 @@
                 </a:solidFill>
                 <a:latin typeface="Calibri"/>
               </a:rPr>
-              <a:t>ISZE review</a:t>
+              <a:t>Sharper insight</a:t>
             </a:r>
           </a:p>
         </p:txBody>
@@ -7561,8 +8576,8 @@
         </p:nvSpPr>
         <p:spPr>
           <a:xfrm>
-            <a:off x="3520440" y="2011680"/>
-            <a:ext cx="2249424" cy="2194560"/>
+            <a:off x="4379976" y="2011680"/>
+            <a:ext cx="3063240" cy="1463040"/>
           </a:xfrm>
           <a:prstGeom prst="rect">
             <a:avLst/>
@@ -7599,7 +8614,7 @@
                 </a:solidFill>
                 <a:latin typeface="Calibri"/>
               </a:rPr>
-              <a:t>ISZE reviews the proposal against network data and fit.</a:t>
+              <a:t>Part-by-part visibility separates a stock movement from a lost job — and tells us where the volume actually went.</a:t>
             </a:r>
           </a:p>
         </p:txBody>
@@ -7612,8 +8627,8 @@
         </p:nvSpPr>
         <p:spPr>
           <a:xfrm>
-            <a:off x="6163056" y="1234440"/>
-            <a:ext cx="2798064" cy="3108960"/>
+            <a:off x="7882127" y="1234440"/>
+            <a:ext cx="3611880" cy="2377440"/>
           </a:xfrm>
           <a:prstGeom prst="roundRect">
             <a:avLst>
@@ -7658,7 +8673,7 @@
         </p:nvSpPr>
         <p:spPr>
           <a:xfrm>
-            <a:off x="6364224" y="1435608"/>
+            <a:off x="8083295" y="1435608"/>
             <a:ext cx="457200" cy="457200"/>
           </a:xfrm>
           <a:prstGeom prst="ellipse">
@@ -7711,8 +8726,8 @@
         </p:nvSpPr>
         <p:spPr>
           <a:xfrm>
-            <a:off x="6986016" y="1435608"/>
-            <a:ext cx="1792224" cy="411480"/>
+            <a:off x="8705087" y="1435608"/>
+            <a:ext cx="2606040" cy="411480"/>
           </a:xfrm>
           <a:prstGeom prst="rect">
             <a:avLst/>
@@ -7733,7 +8748,7 @@
                 </a:solidFill>
                 <a:latin typeface="Calibri"/>
               </a:rPr>
-              <a:t>Counter-proposal</a:t>
+              <a:t>Shared benefit</a:t>
             </a:r>
           </a:p>
         </p:txBody>
@@ -7746,8 +8761,8 @@
         </p:nvSpPr>
         <p:spPr>
           <a:xfrm>
-            <a:off x="6455664" y="2011680"/>
-            <a:ext cx="2249424" cy="2194560"/>
+            <a:off x="8174735" y="2011680"/>
+            <a:ext cx="3063240" cy="1463040"/>
           </a:xfrm>
           <a:prstGeom prst="rect">
             <a:avLst/>
@@ -7784,120 +8799,21 @@
                 </a:solidFill>
                 <a:latin typeface="Calibri"/>
               </a:rPr>
-              <a:t>ISZE returns a counter-proposal where needed.</a:t>
-            </a:r>
-          </a:p>
-        </p:txBody>
-      </p:sp>
-      <p:sp>
-        <p:nvSpPr>
-          <p:cNvPr id="20" name="Rounded Rectangle 19"/>
-          <p:cNvSpPr/>
-          <p:nvPr/>
-        </p:nvSpPr>
-        <p:spPr>
-          <a:xfrm>
-            <a:off x="9098280" y="1234440"/>
-            <a:ext cx="2798064" cy="3108960"/>
-          </a:xfrm>
-          <a:prstGeom prst="roundRect">
-            <a:avLst>
-              <a:gd name="adj" fmla="val 6000"/>
-            </a:avLst>
-          </a:prstGeom>
-          <a:solidFill>
-            <a:srgbClr val="ECECEC"/>
-          </a:solidFill>
-          <a:ln>
-            <a:noFill/>
-          </a:ln>
-          <a:effectLst/>
-        </p:spPr>
-        <p:style>
-          <a:lnRef idx="1">
-            <a:schemeClr val="accent1"/>
-          </a:lnRef>
-          <a:fillRef idx="3">
-            <a:schemeClr val="accent1"/>
-          </a:fillRef>
-          <a:effectRef idx="2">
-            <a:schemeClr val="accent1"/>
-          </a:effectRef>
-          <a:fontRef idx="minor">
-            <a:schemeClr val="lt1"/>
-          </a:fontRef>
-        </p:style>
-        <p:txBody>
-          <a:bodyPr rtlCol="0" anchor="ctr"/>
-          <a:lstStyle/>
-          <a:p>
-            <a:pPr algn="ctr"/>
-          </a:p>
-        </p:txBody>
-      </p:sp>
-      <p:sp>
-        <p:nvSpPr>
-          <p:cNvPr id="21" name="Oval 20"/>
-          <p:cNvSpPr/>
-          <p:nvPr/>
-        </p:nvSpPr>
-        <p:spPr>
-          <a:xfrm>
-            <a:off x="9299448" y="1435608"/>
-            <a:ext cx="457200" cy="457200"/>
-          </a:xfrm>
-          <a:prstGeom prst="ellipse">
-            <a:avLst/>
-          </a:prstGeom>
-          <a:solidFill>
-            <a:srgbClr val="CC0E1E"/>
-          </a:solidFill>
-          <a:ln>
-            <a:noFill/>
-          </a:ln>
-          <a:effectLst/>
-        </p:spPr>
-        <p:style>
-          <a:lnRef idx="1">
-            <a:schemeClr val="accent1"/>
-          </a:lnRef>
-          <a:fillRef idx="3">
-            <a:schemeClr val="accent1"/>
-          </a:fillRef>
-          <a:effectRef idx="2">
-            <a:schemeClr val="accent1"/>
-          </a:effectRef>
-          <a:fontRef idx="minor">
-            <a:schemeClr val="lt1"/>
-          </a:fontRef>
-        </p:style>
-        <p:txBody>
-          <a:bodyPr rtlCol="0" anchor="ctr" lIns="0" rIns="0" tIns="0" bIns="0"/>
-          <a:lstStyle/>
-          <a:p>
-            <a:pPr algn="ctr"/>
-            <a:r>
-              <a:rPr sz="1800" b="1">
-                <a:solidFill>
-                  <a:srgbClr val="FFFFFF"/>
-                </a:solidFill>
-                <a:latin typeface="Calibri"/>
-              </a:rPr>
-              <a:t>4</a:t>
-            </a:r>
-          </a:p>
-        </p:txBody>
-      </p:sp>
-      <p:sp>
-        <p:nvSpPr>
-          <p:cNvPr id="22" name="TextBox 21"/>
+              <a:t>Better availability on your fast movers, a sharper target for us, and a factual basis for the SPA — same data, both sides gain.</a:t>
+            </a:r>
+          </a:p>
+        </p:txBody>
+      </p:sp>
+      <p:sp>
+        <p:nvSpPr>
+          <p:cNvPr id="20" name="TextBox 19"/>
           <p:cNvSpPr txBox="1"/>
           <p:nvPr/>
         </p:nvSpPr>
         <p:spPr>
           <a:xfrm>
-            <a:off x="9921240" y="1435608"/>
-            <a:ext cx="1792224" cy="411480"/>
+            <a:off x="292608" y="3886200"/>
+            <a:ext cx="8595360" cy="365760"/>
           </a:xfrm>
           <a:prstGeom prst="rect">
             <a:avLst/>
@@ -7912,99 +8828,13 @@
           <a:p>
             <a:pPr algn="l"/>
             <a:r>
-              <a:rPr sz="1500" b="1">
-                <a:solidFill>
-                  <a:srgbClr val="1A1A1A"/>
-                </a:solidFill>
-                <a:latin typeface="Calibri"/>
-              </a:rPr>
-              <a:t>Final approval</a:t>
-            </a:r>
-          </a:p>
-        </p:txBody>
-      </p:sp>
-      <p:sp>
-        <p:nvSpPr>
-          <p:cNvPr id="23" name="TextBox 22"/>
-          <p:cNvSpPr txBox="1"/>
-          <p:nvPr/>
-        </p:nvSpPr>
-        <p:spPr>
-          <a:xfrm>
-            <a:off x="9390888" y="2011680"/>
-            <a:ext cx="2249424" cy="2194560"/>
-          </a:xfrm>
-          <a:prstGeom prst="rect">
-            <a:avLst/>
-          </a:prstGeom>
-          <a:noFill/>
-        </p:spPr>
-        <p:txBody>
-          <a:bodyPr wrap="square">
-            <a:spAutoFit/>
-          </a:bodyPr>
-          <a:lstStyle/>
-          <a:p>
-            <a:pPr>
-              <a:lnSpc>
-                <a:spcPct val="115000"/>
-              </a:lnSpc>
-              <a:spcAft>
-                <a:spcPts val="1000"/>
-              </a:spcAft>
-            </a:pPr>
-            <a:r>
-              <a:rPr sz="1250" b="1">
+              <a:rPr sz="1400" b="1">
                 <a:solidFill>
                   <a:srgbClr val="CC0E1E"/>
                 </a:solidFill>
                 <a:latin typeface="Calibri"/>
               </a:rPr>
-              <a:t>—  </a:t>
-            </a:r>
-            <a:r>
-              <a:rPr sz="1250">
-                <a:solidFill>
-                  <a:srgbClr val="1A1A1A"/>
-                </a:solidFill>
-                <a:latin typeface="Calibri"/>
-              </a:rPr>
-              <a:t>Signed off by ISZE management.</a:t>
-            </a:r>
-          </a:p>
-        </p:txBody>
-      </p:sp>
-      <p:sp>
-        <p:nvSpPr>
-          <p:cNvPr id="24" name="TextBox 23"/>
-          <p:cNvSpPr txBox="1"/>
-          <p:nvPr/>
-        </p:nvSpPr>
-        <p:spPr>
-          <a:xfrm>
-            <a:off x="292608" y="4572000"/>
-            <a:ext cx="8595360" cy="365760"/>
-          </a:xfrm>
-          <a:prstGeom prst="rect">
-            <a:avLst/>
-          </a:prstGeom>
-          <a:noFill/>
-        </p:spPr>
-        <p:txBody>
-          <a:bodyPr wrap="square">
-            <a:spAutoFit/>
-          </a:bodyPr>
-          <a:lstStyle/>
-          <a:p>
-            <a:pPr algn="l"/>
-            <a:r>
-              <a:rPr sz="1400" b="1">
-                <a:solidFill>
-                  <a:srgbClr val="CC0E1E"/>
-                </a:solidFill>
-                <a:latin typeface="Calibri"/>
-              </a:rPr>
-              <a:t>Purpose: higher turnover for both sides.</a:t>
+              <a:t>Requested from 01/01/2025, part number level, monthly.</a:t>
             </a:r>
           </a:p>
         </p:txBody>
@@ -8132,7 +8962,7 @@
                 </a:solidFill>
                 <a:latin typeface="Calibri"/>
               </a:rPr>
-              <a:t>R&amp;M</a:t>
+              <a:t>SUMMARY</a:t>
             </a:r>
           </a:p>
         </p:txBody>
@@ -8167,7 +8997,7 @@
                 </a:solidFill>
                 <a:latin typeface="Calibri"/>
               </a:rPr>
-              <a:t>R&amp;M — let's align on the market</a:t>
+              <a:t>Next steps</a:t>
             </a:r>
           </a:p>
         </p:txBody>
@@ -8252,113 +9082,14 @@
       </p:sp>
       <p:sp>
         <p:nvSpPr>
-          <p:cNvPr id="8" name="Rounded Rectangle 7"/>
-          <p:cNvSpPr/>
-          <p:nvPr/>
-        </p:nvSpPr>
-        <p:spPr>
-          <a:xfrm>
-            <a:off x="292608" y="1188720"/>
-            <a:ext cx="5486400" cy="4023360"/>
-          </a:xfrm>
-          <a:prstGeom prst="roundRect">
-            <a:avLst>
-              <a:gd name="adj" fmla="val 6000"/>
-            </a:avLst>
-          </a:prstGeom>
-          <a:solidFill>
-            <a:srgbClr val="ECECEC"/>
-          </a:solidFill>
-          <a:ln>
-            <a:noFill/>
-          </a:ln>
-          <a:effectLst/>
-        </p:spPr>
-        <p:style>
-          <a:lnRef idx="1">
-            <a:schemeClr val="accent1"/>
-          </a:lnRef>
-          <a:fillRef idx="3">
-            <a:schemeClr val="accent1"/>
-          </a:fillRef>
-          <a:effectRef idx="2">
-            <a:schemeClr val="accent1"/>
-          </a:effectRef>
-          <a:fontRef idx="minor">
-            <a:schemeClr val="lt1"/>
-          </a:fontRef>
-        </p:style>
-        <p:txBody>
-          <a:bodyPr rtlCol="0" anchor="ctr"/>
-          <a:lstStyle/>
-          <a:p>
-            <a:pPr algn="ctr"/>
-          </a:p>
-        </p:txBody>
-      </p:sp>
-      <p:sp>
-        <p:nvSpPr>
-          <p:cNvPr id="9" name="Oval 8"/>
-          <p:cNvSpPr/>
-          <p:nvPr/>
-        </p:nvSpPr>
-        <p:spPr>
-          <a:xfrm>
-            <a:off x="493776" y="1389888"/>
-            <a:ext cx="457200" cy="457200"/>
-          </a:xfrm>
-          <a:prstGeom prst="ellipse">
-            <a:avLst/>
-          </a:prstGeom>
-          <a:solidFill>
-            <a:srgbClr val="CC0E1E"/>
-          </a:solidFill>
-          <a:ln>
-            <a:noFill/>
-          </a:ln>
-          <a:effectLst/>
-        </p:spPr>
-        <p:style>
-          <a:lnRef idx="1">
-            <a:schemeClr val="accent1"/>
-          </a:lnRef>
-          <a:fillRef idx="3">
-            <a:schemeClr val="accent1"/>
-          </a:fillRef>
-          <a:effectRef idx="2">
-            <a:schemeClr val="accent1"/>
-          </a:effectRef>
-          <a:fontRef idx="minor">
-            <a:schemeClr val="lt1"/>
-          </a:fontRef>
-        </p:style>
-        <p:txBody>
-          <a:bodyPr rtlCol="0" anchor="ctr" lIns="0" rIns="0" tIns="0" bIns="0"/>
-          <a:lstStyle/>
-          <a:p>
-            <a:pPr algn="ctr"/>
-            <a:r>
-              <a:rPr sz="1800" b="1">
-                <a:solidFill>
-                  <a:srgbClr val="FFFFFF"/>
-                </a:solidFill>
-                <a:latin typeface="Calibri"/>
-              </a:rPr>
-              <a:t>M</a:t>
-            </a:r>
-          </a:p>
-        </p:txBody>
-      </p:sp>
-      <p:sp>
-        <p:nvSpPr>
-          <p:cNvPr id="10" name="TextBox 9"/>
+          <p:cNvPr id="8" name="TextBox 7"/>
           <p:cNvSpPr txBox="1"/>
           <p:nvPr/>
         </p:nvSpPr>
         <p:spPr>
           <a:xfrm>
-            <a:off x="1115568" y="1389888"/>
-            <a:ext cx="4480560" cy="411480"/>
+            <a:off x="292608" y="1234440"/>
+            <a:ext cx="11612880" cy="4206240"/>
           </a:xfrm>
           <a:prstGeom prst="rect">
             <a:avLst/>
@@ -8371,51 +9102,16 @@
           </a:bodyPr>
           <a:lstStyle/>
           <a:p>
-            <a:pPr algn="l"/>
-            <a:r>
-              <a:rPr sz="1500" b="1">
-                <a:solidFill>
-                  <a:srgbClr val="1A1A1A"/>
-                </a:solidFill>
-                <a:latin typeface="Calibri"/>
-              </a:rPr>
-              <a:t>Market</a:t>
-            </a:r>
-          </a:p>
-        </p:txBody>
-      </p:sp>
-      <p:sp>
-        <p:nvSpPr>
-          <p:cNvPr id="11" name="TextBox 10"/>
-          <p:cNvSpPr txBox="1"/>
-          <p:nvPr/>
-        </p:nvSpPr>
-        <p:spPr>
-          <a:xfrm>
-            <a:off x="585216" y="1965960"/>
-            <a:ext cx="4937760" cy="3108960"/>
-          </a:xfrm>
-          <a:prstGeom prst="rect">
-            <a:avLst/>
-          </a:prstGeom>
-          <a:noFill/>
-        </p:spPr>
-        <p:txBody>
-          <a:bodyPr wrap="square">
-            <a:spAutoFit/>
-          </a:bodyPr>
-          <a:lstStyle/>
-          <a:p>
             <a:pPr>
               <a:lnSpc>
-                <a:spcPct val="115000"/>
+                <a:spcPct val="125000"/>
               </a:lnSpc>
               <a:spcAft>
                 <a:spcPts val="1000"/>
               </a:spcAft>
             </a:pPr>
             <a:r>
-              <a:rPr sz="1250" b="1">
+              <a:rPr sz="1500" b="1">
                 <a:solidFill>
                   <a:srgbClr val="CC0E1E"/>
                 </a:solidFill>
@@ -8424,26 +9120,26 @@
               <a:t>—  </a:t>
             </a:r>
             <a:r>
-              <a:rPr sz="1250">
+              <a:rPr sz="1500">
                 <a:solidFill>
                   <a:srgbClr val="1A1A1A"/>
                 </a:solidFill>
                 <a:latin typeface="Calibri"/>
               </a:rPr>
-              <a:t>How is the market moving for you right now?</a:t>
+              <a:t>Confirm FY2027 extended target: EUR 552,822 (V3.1 Dashboard column I, +1.8% stretch).</a:t>
             </a:r>
           </a:p>
           <a:p>
             <a:pPr>
               <a:lnSpc>
-                <a:spcPct val="115000"/>
+                <a:spcPct val="125000"/>
               </a:lnSpc>
               <a:spcAft>
                 <a:spcPts val="1000"/>
               </a:spcAft>
             </a:pPr>
             <a:r>
-              <a:rPr sz="1250" b="1">
+              <a:rPr sz="1500" b="1">
                 <a:solidFill>
                   <a:srgbClr val="CC0E1E"/>
                 </a:solidFill>
@@ -8452,26 +9148,26 @@
               <a:t>—  </a:t>
             </a:r>
             <a:r>
-              <a:rPr sz="1250">
+              <a:rPr sz="1500">
                 <a:solidFill>
                   <a:srgbClr val="1A1A1A"/>
                 </a:solidFill>
                 <a:latin typeface="Calibri"/>
               </a:rPr>
-              <a:t>How much of your volume is fleet business rather than retail?</a:t>
+              <a:t>Confirm the incentive alongside the price adjustment once approved on our side.</a:t>
             </a:r>
           </a:p>
           <a:p>
             <a:pPr>
               <a:lnSpc>
-                <a:spcPct val="115000"/>
+                <a:spcPct val="125000"/>
               </a:lnSpc>
               <a:spcAft>
                 <a:spcPts val="1000"/>
               </a:spcAft>
             </a:pPr>
             <a:r>
-              <a:rPr sz="1250" b="1">
+              <a:rPr sz="1500" b="1">
                 <a:solidFill>
                   <a:srgbClr val="CC0E1E"/>
                 </a:solidFill>
@@ -8480,26 +9176,26 @@
               <a:t>—  </a:t>
             </a:r>
             <a:r>
-              <a:rPr sz="1250">
+              <a:rPr sz="1500">
                 <a:solidFill>
                   <a:srgbClr val="1A1A1A"/>
                 </a:solidFill>
                 <a:latin typeface="Calibri"/>
               </a:rPr>
-              <a:t>Where do you see the biggest hurdles this year?</a:t>
+              <a:t>Body parts / Air conditioning / Filters: agree which category we tackle first, and what the joint action is.</a:t>
             </a:r>
           </a:p>
           <a:p>
             <a:pPr>
               <a:lnSpc>
-                <a:spcPct val="115000"/>
+                <a:spcPct val="125000"/>
               </a:lnSpc>
               <a:spcAft>
                 <a:spcPts val="1000"/>
               </a:spcAft>
             </a:pPr>
             <a:r>
-              <a:rPr sz="1250" b="1">
+              <a:rPr sz="1500" b="1">
                 <a:solidFill>
                   <a:srgbClr val="CC0E1E"/>
                 </a:solidFill>
@@ -8508,183 +9204,26 @@
               <a:t>—  </a:t>
             </a:r>
             <a:r>
-              <a:rPr sz="1250">
+              <a:rPr sz="1500">
                 <a:solidFill>
                   <a:srgbClr val="1A1A1A"/>
                 </a:solidFill>
                 <a:latin typeface="Calibri"/>
               </a:rPr>
-              <a:t>Where are your real strengths in this segment?</a:t>
-            </a:r>
-          </a:p>
-        </p:txBody>
-      </p:sp>
-      <p:sp>
-        <p:nvSpPr>
-          <p:cNvPr id="12" name="Rounded Rectangle 11"/>
-          <p:cNvSpPr/>
-          <p:nvPr/>
-        </p:nvSpPr>
-        <p:spPr>
-          <a:xfrm>
-            <a:off x="5943600" y="1188720"/>
-            <a:ext cx="5943600" cy="4023360"/>
-          </a:xfrm>
-          <a:prstGeom prst="roundRect">
-            <a:avLst>
-              <a:gd name="adj" fmla="val 6000"/>
-            </a:avLst>
-          </a:prstGeom>
-          <a:solidFill>
-            <a:srgbClr val="ECECEC"/>
-          </a:solidFill>
-          <a:ln>
-            <a:noFill/>
-          </a:ln>
-          <a:effectLst/>
-        </p:spPr>
-        <p:style>
-          <a:lnRef idx="1">
-            <a:schemeClr val="accent1"/>
-          </a:lnRef>
-          <a:fillRef idx="3">
-            <a:schemeClr val="accent1"/>
-          </a:fillRef>
-          <a:effectRef idx="2">
-            <a:schemeClr val="accent1"/>
-          </a:effectRef>
-          <a:fontRef idx="minor">
-            <a:schemeClr val="lt1"/>
-          </a:fontRef>
-        </p:style>
-        <p:txBody>
-          <a:bodyPr rtlCol="0" anchor="ctr"/>
-          <a:lstStyle/>
-          <a:p>
-            <a:pPr algn="ctr"/>
-          </a:p>
-        </p:txBody>
-      </p:sp>
-      <p:sp>
-        <p:nvSpPr>
-          <p:cNvPr id="13" name="Oval 12"/>
-          <p:cNvSpPr/>
-          <p:nvPr/>
-        </p:nvSpPr>
-        <p:spPr>
-          <a:xfrm>
-            <a:off x="6144768" y="1389888"/>
-            <a:ext cx="457200" cy="457200"/>
-          </a:xfrm>
-          <a:prstGeom prst="ellipse">
-            <a:avLst/>
-          </a:prstGeom>
-          <a:solidFill>
-            <a:srgbClr val="CC0E1E"/>
-          </a:solidFill>
-          <a:ln>
-            <a:noFill/>
-          </a:ln>
-          <a:effectLst/>
-        </p:spPr>
-        <p:style>
-          <a:lnRef idx="1">
-            <a:schemeClr val="accent1"/>
-          </a:lnRef>
-          <a:fillRef idx="3">
-            <a:schemeClr val="accent1"/>
-          </a:fillRef>
-          <a:effectRef idx="2">
-            <a:schemeClr val="accent1"/>
-          </a:effectRef>
-          <a:fontRef idx="minor">
-            <a:schemeClr val="lt1"/>
-          </a:fontRef>
-        </p:style>
-        <p:txBody>
-          <a:bodyPr rtlCol="0" anchor="ctr" lIns="0" rIns="0" tIns="0" bIns="0"/>
-          <a:lstStyle/>
-          <a:p>
-            <a:pPr algn="ctr"/>
-            <a:r>
-              <a:rPr sz="1800" b="1">
-                <a:solidFill>
-                  <a:srgbClr val="FFFFFF"/>
-                </a:solidFill>
-                <a:latin typeface="Calibri"/>
-              </a:rPr>
-              <a:t>S</a:t>
-            </a:r>
-          </a:p>
-        </p:txBody>
-      </p:sp>
-      <p:sp>
-        <p:nvSpPr>
-          <p:cNvPr id="14" name="TextBox 13"/>
-          <p:cNvSpPr txBox="1"/>
-          <p:nvPr/>
-        </p:nvSpPr>
-        <p:spPr>
-          <a:xfrm>
-            <a:off x="6766560" y="1389888"/>
-            <a:ext cx="4937760" cy="411480"/>
-          </a:xfrm>
-          <a:prstGeom prst="rect">
-            <a:avLst/>
-          </a:prstGeom>
-          <a:noFill/>
-        </p:spPr>
-        <p:txBody>
-          <a:bodyPr wrap="square">
-            <a:spAutoFit/>
-          </a:bodyPr>
-          <a:lstStyle/>
-          <a:p>
-            <a:pPr algn="l"/>
-            <a:r>
-              <a:rPr sz="1500" b="1">
-                <a:solidFill>
-                  <a:srgbClr val="1A1A1A"/>
-                </a:solidFill>
-                <a:latin typeface="Calibri"/>
-              </a:rPr>
-              <a:t>Servicing &amp; R&amp;M</a:t>
-            </a:r>
-          </a:p>
-        </p:txBody>
-      </p:sp>
-      <p:sp>
-        <p:nvSpPr>
-          <p:cNvPr id="15" name="TextBox 14"/>
-          <p:cNvSpPr txBox="1"/>
-          <p:nvPr/>
-        </p:nvSpPr>
-        <p:spPr>
-          <a:xfrm>
-            <a:off x="6236208" y="1965960"/>
-            <a:ext cx="5394960" cy="3108960"/>
-          </a:xfrm>
-          <a:prstGeom prst="rect">
-            <a:avLst/>
-          </a:prstGeom>
-          <a:noFill/>
-        </p:spPr>
-        <p:txBody>
-          <a:bodyPr wrap="square">
-            <a:spAutoFit/>
-          </a:bodyPr>
-          <a:lstStyle/>
+              <a:t>Agree part-level Sales-to-Dealer data sharing, effective 01/01/2025.</a:t>
+            </a:r>
+          </a:p>
           <a:p>
             <a:pPr>
               <a:lnSpc>
-                <a:spcPct val="115000"/>
+                <a:spcPct val="125000"/>
               </a:lnSpc>
               <a:spcAft>
                 <a:spcPts val="1000"/>
               </a:spcAft>
             </a:pPr>
             <a:r>
-              <a:rPr sz="1250" b="1">
+              <a:rPr sz="1500" b="1">
                 <a:solidFill>
                   <a:srgbClr val="CC0E1E"/>
                 </a:solidFill>
@@ -8693,26 +9232,26 @@
               <a:t>—  </a:t>
             </a:r>
             <a:r>
-              <a:rPr sz="1250">
+              <a:rPr sz="1500">
                 <a:solidFill>
                   <a:srgbClr val="1A1A1A"/>
                 </a:solidFill>
                 <a:latin typeface="Calibri"/>
               </a:rPr>
-              <a:t>Do you offer an R&amp;M or service-plan product today?</a:t>
+              <a:t>SPA: CYPRUS proposal, ISZE review and counter-proposal cycle to follow.</a:t>
             </a:r>
           </a:p>
           <a:p>
             <a:pPr>
               <a:lnSpc>
-                <a:spcPct val="115000"/>
+                <a:spcPct val="125000"/>
               </a:lnSpc>
               <a:spcAft>
                 <a:spcPts val="1000"/>
               </a:spcAft>
             </a:pPr>
             <a:r>
-              <a:rPr sz="1250" b="1">
+              <a:rPr sz="1500" b="1">
                 <a:solidFill>
                   <a:srgbClr val="CC0E1E"/>
                 </a:solidFill>
@@ -8721,69 +9260,13 @@
               <a:t>—  </a:t>
             </a:r>
             <a:r>
-              <a:rPr sz="1250">
+              <a:rPr sz="1500">
                 <a:solidFill>
                   <a:srgbClr val="1A1A1A"/>
                 </a:solidFill>
                 <a:latin typeface="Calibri"/>
               </a:rPr>
-              <a:t>What share of the parc do you retain for servicing after year three?</a:t>
-            </a:r>
-          </a:p>
-          <a:p>
-            <a:pPr>
-              <a:lnSpc>
-                <a:spcPct val="115000"/>
-              </a:lnSpc>
-              <a:spcAft>
-                <a:spcPts val="1000"/>
-              </a:spcAft>
-            </a:pPr>
-            <a:r>
-              <a:rPr sz="1250" b="1">
-                <a:solidFill>
-                  <a:srgbClr val="CC0E1E"/>
-                </a:solidFill>
-                <a:latin typeface="Calibri"/>
-              </a:rPr>
-              <a:t>—  </a:t>
-            </a:r>
-            <a:r>
-              <a:rPr sz="1250">
-                <a:solidFill>
-                  <a:srgbClr val="1A1A1A"/>
-                </a:solidFill>
-                <a:latin typeface="Calibri"/>
-              </a:rPr>
-              <a:t>Does R&amp;M business come bundled with fleet tenders — roughly what share?</a:t>
-            </a:r>
-          </a:p>
-          <a:p>
-            <a:pPr>
-              <a:lnSpc>
-                <a:spcPct val="115000"/>
-              </a:lnSpc>
-              <a:spcAft>
-                <a:spcPts val="1000"/>
-              </a:spcAft>
-            </a:pPr>
-            <a:r>
-              <a:rPr sz="1250" b="1">
-                <a:solidFill>
-                  <a:srgbClr val="CC0E1E"/>
-                </a:solidFill>
-                <a:latin typeface="Calibri"/>
-              </a:rPr>
-              <a:t>—  </a:t>
-            </a:r>
-            <a:r>
-              <a:rPr sz="1250">
-                <a:solidFill>
-                  <a:srgbClr val="1A1A1A"/>
-                </a:solidFill>
-                <a:latin typeface="Calibri"/>
-              </a:rPr>
-              <a:t>What would it take to bring more out-of-network servicing back?</a:t>
+              <a:t>IDS 2026: agree dealer visit dates, starting with the lower-scoring dealers.</a:t>
             </a:r>
           </a:p>
         </p:txBody>
@@ -8814,9 +9297,87 @@
         <p:nvPr/>
       </p:nvGrpSpPr>
       <p:grpSpPr/>
+      <p:sp>
+        <p:nvSpPr>
+          <p:cNvPr id="2" name="Rectangle 1"/>
+          <p:cNvSpPr/>
+          <p:nvPr/>
+        </p:nvSpPr>
+        <p:spPr>
+          <a:xfrm>
+            <a:off x="0" y="0"/>
+            <a:ext cx="201168" cy="6858000"/>
+          </a:xfrm>
+          <a:prstGeom prst="rect">
+            <a:avLst/>
+          </a:prstGeom>
+          <a:solidFill>
+            <a:srgbClr val="CC0E1E"/>
+          </a:solidFill>
+          <a:ln>
+            <a:noFill/>
+          </a:ln>
+        </p:spPr>
+        <p:style>
+          <a:lnRef idx="1">
+            <a:schemeClr val="accent1"/>
+          </a:lnRef>
+          <a:fillRef idx="3">
+            <a:schemeClr val="accent1"/>
+          </a:fillRef>
+          <a:effectRef idx="2">
+            <a:schemeClr val="accent1"/>
+          </a:effectRef>
+          <a:fontRef idx="minor">
+            <a:schemeClr val="lt1"/>
+          </a:fontRef>
+        </p:style>
+        <p:txBody>
+          <a:bodyPr rtlCol="0" anchor="ctr"/>
+          <a:lstStyle/>
+          <a:p>
+            <a:pPr algn="ctr"/>
+          </a:p>
+        </p:txBody>
+      </p:sp>
+      <p:sp>
+        <p:nvSpPr>
+          <p:cNvPr id="3" name="TextBox 2"/>
+          <p:cNvSpPr txBox="1"/>
+          <p:nvPr/>
+        </p:nvSpPr>
+        <p:spPr>
+          <a:xfrm>
+            <a:off x="2286000" y="3063240"/>
+            <a:ext cx="7772400" cy="457200"/>
+          </a:xfrm>
+          <a:prstGeom prst="rect">
+            <a:avLst/>
+          </a:prstGeom>
+          <a:noFill/>
+        </p:spPr>
+        <p:txBody>
+          <a:bodyPr wrap="square">
+            <a:spAutoFit/>
+          </a:bodyPr>
+          <a:lstStyle/>
+          <a:p>
+            <a:pPr algn="ctr"/>
+            <a:r>
+              <a:rPr sz="1600" b="0">
+                <a:solidFill>
+                  <a:srgbClr val="5A5A5A"/>
+                </a:solidFill>
+                <a:latin typeface="Calibri"/>
+              </a:rPr>
+              <a:t>Moving the World – for You</a:t>
+            </a:r>
+          </a:p>
+        </p:txBody>
+      </p:sp>
       <p:pic>
         <p:nvPicPr>
-          <p:cNvPr id="2" name="Picture 1" descr="isuzu_logo_red.png"/>
+          <p:cNvPr id="4" name="Picture 3" descr="isuzu_logo_red.png"/>
           <p:cNvPicPr>
             <a:picLocks noChangeAspect="1"/>
           </p:cNvPicPr>
@@ -8830,1227 +9391,14 @@
         </p:blipFill>
         <p:spPr>
           <a:xfrm>
-            <a:off x="256032" y="6263640"/>
-            <a:ext cx="1679787" cy="292608"/>
+            <a:off x="4631436" y="2468880"/>
+            <a:ext cx="2926080" cy="509704"/>
           </a:xfrm>
           <a:prstGeom prst="rect">
             <a:avLst/>
           </a:prstGeom>
         </p:spPr>
       </p:pic>
-      <p:sp>
-        <p:nvSpPr>
-          <p:cNvPr id="3" name="Rectangle 2"/>
-          <p:cNvSpPr/>
-          <p:nvPr/>
-        </p:nvSpPr>
-        <p:spPr>
-          <a:xfrm>
-            <a:off x="0" y="6766560"/>
-            <a:ext cx="12188952" cy="91440"/>
-          </a:xfrm>
-          <a:prstGeom prst="rect">
-            <a:avLst/>
-          </a:prstGeom>
-          <a:solidFill>
-            <a:srgbClr val="CC0E1E"/>
-          </a:solidFill>
-          <a:ln>
-            <a:noFill/>
-          </a:ln>
-        </p:spPr>
-        <p:style>
-          <a:lnRef idx="1">
-            <a:schemeClr val="accent1"/>
-          </a:lnRef>
-          <a:fillRef idx="3">
-            <a:schemeClr val="accent1"/>
-          </a:fillRef>
-          <a:effectRef idx="2">
-            <a:schemeClr val="accent1"/>
-          </a:effectRef>
-          <a:fontRef idx="minor">
-            <a:schemeClr val="lt1"/>
-          </a:fontRef>
-        </p:style>
-        <p:txBody>
-          <a:bodyPr rtlCol="0" anchor="ctr"/>
-          <a:lstStyle/>
-          <a:p>
-            <a:pPr algn="ctr"/>
-          </a:p>
-        </p:txBody>
-      </p:sp>
-      <p:sp>
-        <p:nvSpPr>
-          <p:cNvPr id="4" name="TextBox 3"/>
-          <p:cNvSpPr txBox="1"/>
-          <p:nvPr/>
-        </p:nvSpPr>
-        <p:spPr>
-          <a:xfrm>
-            <a:off x="292608" y="201168"/>
-            <a:ext cx="11430000" cy="274320"/>
-          </a:xfrm>
-          <a:prstGeom prst="rect">
-            <a:avLst/>
-          </a:prstGeom>
-          <a:noFill/>
-        </p:spPr>
-        <p:txBody>
-          <a:bodyPr wrap="square">
-            <a:spAutoFit/>
-          </a:bodyPr>
-          <a:lstStyle/>
-          <a:p>
-            <a:pPr algn="l"/>
-            <a:r>
-              <a:rPr sz="1100" b="1">
-                <a:solidFill>
-                  <a:srgbClr val="CC0E1E"/>
-                </a:solidFill>
-                <a:latin typeface="Calibri"/>
-              </a:rPr>
-              <a:t>ASK</a:t>
-            </a:r>
-          </a:p>
-        </p:txBody>
-      </p:sp>
-      <p:sp>
-        <p:nvSpPr>
-          <p:cNvPr id="5" name="TextBox 4"/>
-          <p:cNvSpPr txBox="1"/>
-          <p:nvPr/>
-        </p:nvSpPr>
-        <p:spPr>
-          <a:xfrm>
-            <a:off x="292608" y="475488"/>
-            <a:ext cx="11612880" cy="566928"/>
-          </a:xfrm>
-          <a:prstGeom prst="rect">
-            <a:avLst/>
-          </a:prstGeom>
-          <a:noFill/>
-        </p:spPr>
-        <p:txBody>
-          <a:bodyPr wrap="square">
-            <a:spAutoFit/>
-          </a:bodyPr>
-          <a:lstStyle/>
-          <a:p>
-            <a:pPr algn="l"/>
-            <a:r>
-              <a:rPr sz="2500" b="1">
-                <a:solidFill>
-                  <a:srgbClr val="1A1A1A"/>
-                </a:solidFill>
-                <a:latin typeface="Calibri"/>
-              </a:rPr>
-              <a:t>Part-level Sales-to-Dealer Data</a:t>
-            </a:r>
-          </a:p>
-        </p:txBody>
-      </p:sp>
-      <p:sp>
-        <p:nvSpPr>
-          <p:cNvPr id="6" name="Rectangle 5"/>
-          <p:cNvSpPr/>
-          <p:nvPr/>
-        </p:nvSpPr>
-        <p:spPr>
-          <a:xfrm>
-            <a:off x="292608" y="1005840"/>
-            <a:ext cx="11612880" cy="28000"/>
-          </a:xfrm>
-          <a:prstGeom prst="rect">
-            <a:avLst/>
-          </a:prstGeom>
-          <a:solidFill>
-            <a:srgbClr val="CC0E1E"/>
-          </a:solidFill>
-          <a:ln>
-            <a:noFill/>
-          </a:ln>
-        </p:spPr>
-        <p:style>
-          <a:lnRef idx="1">
-            <a:schemeClr val="accent1"/>
-          </a:lnRef>
-          <a:fillRef idx="3">
-            <a:schemeClr val="accent1"/>
-          </a:fillRef>
-          <a:effectRef idx="2">
-            <a:schemeClr val="accent1"/>
-          </a:effectRef>
-          <a:fontRef idx="minor">
-            <a:schemeClr val="lt1"/>
-          </a:fontRef>
-        </p:style>
-        <p:txBody>
-          <a:bodyPr rtlCol="0" anchor="ctr"/>
-          <a:lstStyle/>
-          <a:p>
-            <a:pPr algn="ctr"/>
-          </a:p>
-        </p:txBody>
-      </p:sp>
-      <p:sp>
-        <p:nvSpPr>
-          <p:cNvPr id="7" name="TextBox 6"/>
-          <p:cNvSpPr txBox="1"/>
-          <p:nvPr/>
-        </p:nvSpPr>
-        <p:spPr>
-          <a:xfrm>
-            <a:off x="11594592" y="6473952"/>
-            <a:ext cx="365760" cy="274320"/>
-          </a:xfrm>
-          <a:prstGeom prst="rect">
-            <a:avLst/>
-          </a:prstGeom>
-          <a:noFill/>
-        </p:spPr>
-        <p:txBody>
-          <a:bodyPr wrap="square">
-            <a:spAutoFit/>
-          </a:bodyPr>
-          <a:lstStyle/>
-          <a:p>
-            <a:pPr algn="r"/>
-            <a:r>
-              <a:rPr sz="1000" b="0">
-                <a:solidFill>
-                  <a:srgbClr val="5A5A5A"/>
-                </a:solidFill>
-                <a:latin typeface="Calibri"/>
-              </a:rPr>
-              <a:t>18</a:t>
-            </a:r>
-          </a:p>
-        </p:txBody>
-      </p:sp>
-      <p:sp>
-        <p:nvSpPr>
-          <p:cNvPr id="8" name="Rounded Rectangle 7"/>
-          <p:cNvSpPr/>
-          <p:nvPr/>
-        </p:nvSpPr>
-        <p:spPr>
-          <a:xfrm>
-            <a:off x="292608" y="1234440"/>
-            <a:ext cx="3611880" cy="2377440"/>
-          </a:xfrm>
-          <a:prstGeom prst="roundRect">
-            <a:avLst>
-              <a:gd name="adj" fmla="val 6000"/>
-            </a:avLst>
-          </a:prstGeom>
-          <a:solidFill>
-            <a:srgbClr val="ECECEC"/>
-          </a:solidFill>
-          <a:ln>
-            <a:noFill/>
-          </a:ln>
-          <a:effectLst/>
-        </p:spPr>
-        <p:style>
-          <a:lnRef idx="1">
-            <a:schemeClr val="accent1"/>
-          </a:lnRef>
-          <a:fillRef idx="3">
-            <a:schemeClr val="accent1"/>
-          </a:fillRef>
-          <a:effectRef idx="2">
-            <a:schemeClr val="accent1"/>
-          </a:effectRef>
-          <a:fontRef idx="minor">
-            <a:schemeClr val="lt1"/>
-          </a:fontRef>
-        </p:style>
-        <p:txBody>
-          <a:bodyPr rtlCol="0" anchor="ctr"/>
-          <a:lstStyle/>
-          <a:p>
-            <a:pPr algn="ctr"/>
-          </a:p>
-        </p:txBody>
-      </p:sp>
-      <p:sp>
-        <p:nvSpPr>
-          <p:cNvPr id="9" name="Oval 8"/>
-          <p:cNvSpPr/>
-          <p:nvPr/>
-        </p:nvSpPr>
-        <p:spPr>
-          <a:xfrm>
-            <a:off x="493776" y="1435608"/>
-            <a:ext cx="457200" cy="457200"/>
-          </a:xfrm>
-          <a:prstGeom prst="ellipse">
-            <a:avLst/>
-          </a:prstGeom>
-          <a:solidFill>
-            <a:srgbClr val="CC0E1E"/>
-          </a:solidFill>
-          <a:ln>
-            <a:noFill/>
-          </a:ln>
-          <a:effectLst/>
-        </p:spPr>
-        <p:style>
-          <a:lnRef idx="1">
-            <a:schemeClr val="accent1"/>
-          </a:lnRef>
-          <a:fillRef idx="3">
-            <a:schemeClr val="accent1"/>
-          </a:fillRef>
-          <a:effectRef idx="2">
-            <a:schemeClr val="accent1"/>
-          </a:effectRef>
-          <a:fontRef idx="minor">
-            <a:schemeClr val="lt1"/>
-          </a:fontRef>
-        </p:style>
-        <p:txBody>
-          <a:bodyPr rtlCol="0" anchor="ctr" lIns="0" rIns="0" tIns="0" bIns="0"/>
-          <a:lstStyle/>
-          <a:p>
-            <a:pPr algn="ctr"/>
-            <a:r>
-              <a:rPr sz="1800" b="1">
-                <a:solidFill>
-                  <a:srgbClr val="FFFFFF"/>
-                </a:solidFill>
-                <a:latin typeface="Calibri"/>
-              </a:rPr>
-              <a:t>1</a:t>
-            </a:r>
-          </a:p>
-        </p:txBody>
-      </p:sp>
-      <p:sp>
-        <p:nvSpPr>
-          <p:cNvPr id="10" name="TextBox 9"/>
-          <p:cNvSpPr txBox="1"/>
-          <p:nvPr/>
-        </p:nvSpPr>
-        <p:spPr>
-          <a:xfrm>
-            <a:off x="1115568" y="1435608"/>
-            <a:ext cx="2606040" cy="411480"/>
-          </a:xfrm>
-          <a:prstGeom prst="rect">
-            <a:avLst/>
-          </a:prstGeom>
-          <a:noFill/>
-        </p:spPr>
-        <p:txBody>
-          <a:bodyPr wrap="square">
-            <a:spAutoFit/>
-          </a:bodyPr>
-          <a:lstStyle/>
-          <a:p>
-            <a:pPr algn="l"/>
-            <a:r>
-              <a:rPr sz="1500" b="1">
-                <a:solidFill>
-                  <a:srgbClr val="1A1A1A"/>
-                </a:solidFill>
-                <a:latin typeface="Calibri"/>
-              </a:rPr>
-              <a:t>The starting point</a:t>
-            </a:r>
-          </a:p>
-        </p:txBody>
-      </p:sp>
-      <p:sp>
-        <p:nvSpPr>
-          <p:cNvPr id="11" name="TextBox 10"/>
-          <p:cNvSpPr txBox="1"/>
-          <p:nvPr/>
-        </p:nvSpPr>
-        <p:spPr>
-          <a:xfrm>
-            <a:off x="585216" y="2011680"/>
-            <a:ext cx="3063240" cy="1463040"/>
-          </a:xfrm>
-          <a:prstGeom prst="rect">
-            <a:avLst/>
-          </a:prstGeom>
-          <a:noFill/>
-        </p:spPr>
-        <p:txBody>
-          <a:bodyPr wrap="square">
-            <a:spAutoFit/>
-          </a:bodyPr>
-          <a:lstStyle/>
-          <a:p>
-            <a:pPr>
-              <a:lnSpc>
-                <a:spcPct val="115000"/>
-              </a:lnSpc>
-              <a:spcAft>
-                <a:spcPts val="1000"/>
-              </a:spcAft>
-            </a:pPr>
-            <a:r>
-              <a:rPr sz="1250" b="1">
-                <a:solidFill>
-                  <a:srgbClr val="CC0E1E"/>
-                </a:solidFill>
-                <a:latin typeface="Calibri"/>
-              </a:rPr>
-              <a:t>—  </a:t>
-            </a:r>
-            <a:r>
-              <a:rPr sz="1250">
-                <a:solidFill>
-                  <a:srgbClr val="1A1A1A"/>
-                </a:solidFill>
-                <a:latin typeface="Calibri"/>
-              </a:rPr>
-              <a:t>We have no Sales-to-Dealer figures from you for FY2026. The ask is monthly Sales-to-Dealer, at part-number level.</a:t>
-            </a:r>
-          </a:p>
-        </p:txBody>
-      </p:sp>
-      <p:sp>
-        <p:nvSpPr>
-          <p:cNvPr id="12" name="Rounded Rectangle 11"/>
-          <p:cNvSpPr/>
-          <p:nvPr/>
-        </p:nvSpPr>
-        <p:spPr>
-          <a:xfrm>
-            <a:off x="4087368" y="1234440"/>
-            <a:ext cx="3611880" cy="2377440"/>
-          </a:xfrm>
-          <a:prstGeom prst="roundRect">
-            <a:avLst>
-              <a:gd name="adj" fmla="val 6000"/>
-            </a:avLst>
-          </a:prstGeom>
-          <a:solidFill>
-            <a:srgbClr val="ECECEC"/>
-          </a:solidFill>
-          <a:ln>
-            <a:noFill/>
-          </a:ln>
-          <a:effectLst/>
-        </p:spPr>
-        <p:style>
-          <a:lnRef idx="1">
-            <a:schemeClr val="accent1"/>
-          </a:lnRef>
-          <a:fillRef idx="3">
-            <a:schemeClr val="accent1"/>
-          </a:fillRef>
-          <a:effectRef idx="2">
-            <a:schemeClr val="accent1"/>
-          </a:effectRef>
-          <a:fontRef idx="minor">
-            <a:schemeClr val="lt1"/>
-          </a:fontRef>
-        </p:style>
-        <p:txBody>
-          <a:bodyPr rtlCol="0" anchor="ctr"/>
-          <a:lstStyle/>
-          <a:p>
-            <a:pPr algn="ctr"/>
-          </a:p>
-        </p:txBody>
-      </p:sp>
-      <p:sp>
-        <p:nvSpPr>
-          <p:cNvPr id="13" name="Oval 12"/>
-          <p:cNvSpPr/>
-          <p:nvPr/>
-        </p:nvSpPr>
-        <p:spPr>
-          <a:xfrm>
-            <a:off x="4288536" y="1435608"/>
-            <a:ext cx="457200" cy="457200"/>
-          </a:xfrm>
-          <a:prstGeom prst="ellipse">
-            <a:avLst/>
-          </a:prstGeom>
-          <a:solidFill>
-            <a:srgbClr val="CC0E1E"/>
-          </a:solidFill>
-          <a:ln>
-            <a:noFill/>
-          </a:ln>
-          <a:effectLst/>
-        </p:spPr>
-        <p:style>
-          <a:lnRef idx="1">
-            <a:schemeClr val="accent1"/>
-          </a:lnRef>
-          <a:fillRef idx="3">
-            <a:schemeClr val="accent1"/>
-          </a:fillRef>
-          <a:effectRef idx="2">
-            <a:schemeClr val="accent1"/>
-          </a:effectRef>
-          <a:fontRef idx="minor">
-            <a:schemeClr val="lt1"/>
-          </a:fontRef>
-        </p:style>
-        <p:txBody>
-          <a:bodyPr rtlCol="0" anchor="ctr" lIns="0" rIns="0" tIns="0" bIns="0"/>
-          <a:lstStyle/>
-          <a:p>
-            <a:pPr algn="ctr"/>
-            <a:r>
-              <a:rPr sz="1800" b="1">
-                <a:solidFill>
-                  <a:srgbClr val="FFFFFF"/>
-                </a:solidFill>
-                <a:latin typeface="Calibri"/>
-              </a:rPr>
-              <a:t>2</a:t>
-            </a:r>
-          </a:p>
-        </p:txBody>
-      </p:sp>
-      <p:sp>
-        <p:nvSpPr>
-          <p:cNvPr id="14" name="TextBox 13"/>
-          <p:cNvSpPr txBox="1"/>
-          <p:nvPr/>
-        </p:nvSpPr>
-        <p:spPr>
-          <a:xfrm>
-            <a:off x="4910328" y="1435608"/>
-            <a:ext cx="2606040" cy="411480"/>
-          </a:xfrm>
-          <a:prstGeom prst="rect">
-            <a:avLst/>
-          </a:prstGeom>
-          <a:noFill/>
-        </p:spPr>
-        <p:txBody>
-          <a:bodyPr wrap="square">
-            <a:spAutoFit/>
-          </a:bodyPr>
-          <a:lstStyle/>
-          <a:p>
-            <a:pPr algn="l"/>
-            <a:r>
-              <a:rPr sz="1500" b="1">
-                <a:solidFill>
-                  <a:srgbClr val="1A1A1A"/>
-                </a:solidFill>
-                <a:latin typeface="Calibri"/>
-              </a:rPr>
-              <a:t>Sharper insight</a:t>
-            </a:r>
-          </a:p>
-        </p:txBody>
-      </p:sp>
-      <p:sp>
-        <p:nvSpPr>
-          <p:cNvPr id="15" name="TextBox 14"/>
-          <p:cNvSpPr txBox="1"/>
-          <p:nvPr/>
-        </p:nvSpPr>
-        <p:spPr>
-          <a:xfrm>
-            <a:off x="4379976" y="2011680"/>
-            <a:ext cx="3063240" cy="1463040"/>
-          </a:xfrm>
-          <a:prstGeom prst="rect">
-            <a:avLst/>
-          </a:prstGeom>
-          <a:noFill/>
-        </p:spPr>
-        <p:txBody>
-          <a:bodyPr wrap="square">
-            <a:spAutoFit/>
-          </a:bodyPr>
-          <a:lstStyle/>
-          <a:p>
-            <a:pPr>
-              <a:lnSpc>
-                <a:spcPct val="115000"/>
-              </a:lnSpc>
-              <a:spcAft>
-                <a:spcPts val="1000"/>
-              </a:spcAft>
-            </a:pPr>
-            <a:r>
-              <a:rPr sz="1250" b="1">
-                <a:solidFill>
-                  <a:srgbClr val="CC0E1E"/>
-                </a:solidFill>
-                <a:latin typeface="Calibri"/>
-              </a:rPr>
-              <a:t>—  </a:t>
-            </a:r>
-            <a:r>
-              <a:rPr sz="1250">
-                <a:solidFill>
-                  <a:srgbClr val="1A1A1A"/>
-                </a:solidFill>
-                <a:latin typeface="Calibri"/>
-              </a:rPr>
-              <a:t>Part-by-part visibility separates a stock movement from a lost job — and tells us where the volume actually went.</a:t>
-            </a:r>
-          </a:p>
-        </p:txBody>
-      </p:sp>
-      <p:sp>
-        <p:nvSpPr>
-          <p:cNvPr id="16" name="Rounded Rectangle 15"/>
-          <p:cNvSpPr/>
-          <p:nvPr/>
-        </p:nvSpPr>
-        <p:spPr>
-          <a:xfrm>
-            <a:off x="7882127" y="1234440"/>
-            <a:ext cx="3611880" cy="2377440"/>
-          </a:xfrm>
-          <a:prstGeom prst="roundRect">
-            <a:avLst>
-              <a:gd name="adj" fmla="val 6000"/>
-            </a:avLst>
-          </a:prstGeom>
-          <a:solidFill>
-            <a:srgbClr val="ECECEC"/>
-          </a:solidFill>
-          <a:ln>
-            <a:noFill/>
-          </a:ln>
-          <a:effectLst/>
-        </p:spPr>
-        <p:style>
-          <a:lnRef idx="1">
-            <a:schemeClr val="accent1"/>
-          </a:lnRef>
-          <a:fillRef idx="3">
-            <a:schemeClr val="accent1"/>
-          </a:fillRef>
-          <a:effectRef idx="2">
-            <a:schemeClr val="accent1"/>
-          </a:effectRef>
-          <a:fontRef idx="minor">
-            <a:schemeClr val="lt1"/>
-          </a:fontRef>
-        </p:style>
-        <p:txBody>
-          <a:bodyPr rtlCol="0" anchor="ctr"/>
-          <a:lstStyle/>
-          <a:p>
-            <a:pPr algn="ctr"/>
-          </a:p>
-        </p:txBody>
-      </p:sp>
-      <p:sp>
-        <p:nvSpPr>
-          <p:cNvPr id="17" name="Oval 16"/>
-          <p:cNvSpPr/>
-          <p:nvPr/>
-        </p:nvSpPr>
-        <p:spPr>
-          <a:xfrm>
-            <a:off x="8083295" y="1435608"/>
-            <a:ext cx="457200" cy="457200"/>
-          </a:xfrm>
-          <a:prstGeom prst="ellipse">
-            <a:avLst/>
-          </a:prstGeom>
-          <a:solidFill>
-            <a:srgbClr val="CC0E1E"/>
-          </a:solidFill>
-          <a:ln>
-            <a:noFill/>
-          </a:ln>
-          <a:effectLst/>
-        </p:spPr>
-        <p:style>
-          <a:lnRef idx="1">
-            <a:schemeClr val="accent1"/>
-          </a:lnRef>
-          <a:fillRef idx="3">
-            <a:schemeClr val="accent1"/>
-          </a:fillRef>
-          <a:effectRef idx="2">
-            <a:schemeClr val="accent1"/>
-          </a:effectRef>
-          <a:fontRef idx="minor">
-            <a:schemeClr val="lt1"/>
-          </a:fontRef>
-        </p:style>
-        <p:txBody>
-          <a:bodyPr rtlCol="0" anchor="ctr" lIns="0" rIns="0" tIns="0" bIns="0"/>
-          <a:lstStyle/>
-          <a:p>
-            <a:pPr algn="ctr"/>
-            <a:r>
-              <a:rPr sz="1800" b="1">
-                <a:solidFill>
-                  <a:srgbClr val="FFFFFF"/>
-                </a:solidFill>
-                <a:latin typeface="Calibri"/>
-              </a:rPr>
-              <a:t>3</a:t>
-            </a:r>
-          </a:p>
-        </p:txBody>
-      </p:sp>
-      <p:sp>
-        <p:nvSpPr>
-          <p:cNvPr id="18" name="TextBox 17"/>
-          <p:cNvSpPr txBox="1"/>
-          <p:nvPr/>
-        </p:nvSpPr>
-        <p:spPr>
-          <a:xfrm>
-            <a:off x="8705087" y="1435608"/>
-            <a:ext cx="2606040" cy="411480"/>
-          </a:xfrm>
-          <a:prstGeom prst="rect">
-            <a:avLst/>
-          </a:prstGeom>
-          <a:noFill/>
-        </p:spPr>
-        <p:txBody>
-          <a:bodyPr wrap="square">
-            <a:spAutoFit/>
-          </a:bodyPr>
-          <a:lstStyle/>
-          <a:p>
-            <a:pPr algn="l"/>
-            <a:r>
-              <a:rPr sz="1500" b="1">
-                <a:solidFill>
-                  <a:srgbClr val="1A1A1A"/>
-                </a:solidFill>
-                <a:latin typeface="Calibri"/>
-              </a:rPr>
-              <a:t>Shared benefit</a:t>
-            </a:r>
-          </a:p>
-        </p:txBody>
-      </p:sp>
-      <p:sp>
-        <p:nvSpPr>
-          <p:cNvPr id="19" name="TextBox 18"/>
-          <p:cNvSpPr txBox="1"/>
-          <p:nvPr/>
-        </p:nvSpPr>
-        <p:spPr>
-          <a:xfrm>
-            <a:off x="8174735" y="2011680"/>
-            <a:ext cx="3063240" cy="1463040"/>
-          </a:xfrm>
-          <a:prstGeom prst="rect">
-            <a:avLst/>
-          </a:prstGeom>
-          <a:noFill/>
-        </p:spPr>
-        <p:txBody>
-          <a:bodyPr wrap="square">
-            <a:spAutoFit/>
-          </a:bodyPr>
-          <a:lstStyle/>
-          <a:p>
-            <a:pPr>
-              <a:lnSpc>
-                <a:spcPct val="115000"/>
-              </a:lnSpc>
-              <a:spcAft>
-                <a:spcPts val="1000"/>
-              </a:spcAft>
-            </a:pPr>
-            <a:r>
-              <a:rPr sz="1250" b="1">
-                <a:solidFill>
-                  <a:srgbClr val="CC0E1E"/>
-                </a:solidFill>
-                <a:latin typeface="Calibri"/>
-              </a:rPr>
-              <a:t>—  </a:t>
-            </a:r>
-            <a:r>
-              <a:rPr sz="1250">
-                <a:solidFill>
-                  <a:srgbClr val="1A1A1A"/>
-                </a:solidFill>
-                <a:latin typeface="Calibri"/>
-              </a:rPr>
-              <a:t>Better availability on your fast movers, a sharper target for us, and a factual basis for the SPA — same data, both sides gain.</a:t>
-            </a:r>
-          </a:p>
-        </p:txBody>
-      </p:sp>
-      <p:sp>
-        <p:nvSpPr>
-          <p:cNvPr id="20" name="TextBox 19"/>
-          <p:cNvSpPr txBox="1"/>
-          <p:nvPr/>
-        </p:nvSpPr>
-        <p:spPr>
-          <a:xfrm>
-            <a:off x="292608" y="3886200"/>
-            <a:ext cx="8595360" cy="365760"/>
-          </a:xfrm>
-          <a:prstGeom prst="rect">
-            <a:avLst/>
-          </a:prstGeom>
-          <a:noFill/>
-        </p:spPr>
-        <p:txBody>
-          <a:bodyPr wrap="square">
-            <a:spAutoFit/>
-          </a:bodyPr>
-          <a:lstStyle/>
-          <a:p>
-            <a:pPr algn="l"/>
-            <a:r>
-              <a:rPr sz="1400" b="1">
-                <a:solidFill>
-                  <a:srgbClr val="CC0E1E"/>
-                </a:solidFill>
-                <a:latin typeface="Calibri"/>
-              </a:rPr>
-              <a:t>Requested from 01/01/2025, part number level, monthly.</a:t>
-            </a:r>
-          </a:p>
-        </p:txBody>
-      </p:sp>
-    </p:spTree>
-  </p:cSld>
-  <p:clrMapOvr>
-    <a:masterClrMapping/>
-  </p:clrMapOvr>
-</p:sld>
-</file>
-
-<file path=ppt/slides/slide19.xml><?xml version="1.0" encoding="utf-8"?>
-<p:sld xmlns:a="http://schemas.openxmlformats.org/drawingml/2006/main" xmlns:p="http://schemas.openxmlformats.org/presentationml/2006/main" xmlns:r="http://schemas.openxmlformats.org/officeDocument/2006/relationships">
-  <p:cSld>
-    <p:bg>
-      <p:bgPr>
-        <a:solidFill>
-          <a:srgbClr val="FFFFFF"/>
-        </a:solidFill>
-        <a:effectLst/>
-      </p:bgPr>
-    </p:bg>
-    <p:spTree>
-      <p:nvGrpSpPr>
-        <p:cNvPr id="1" name=""/>
-        <p:cNvGrpSpPr/>
-        <p:nvPr/>
-      </p:nvGrpSpPr>
-      <p:grpSpPr/>
-      <p:pic>
-        <p:nvPicPr>
-          <p:cNvPr id="2" name="Picture 1" descr="isuzu_logo_red.png"/>
-          <p:cNvPicPr>
-            <a:picLocks noChangeAspect="1"/>
-          </p:cNvPicPr>
-          <p:nvPr/>
-        </p:nvPicPr>
-        <p:blipFill>
-          <a:blip r:embed="rId2"/>
-          <a:stretch>
-            <a:fillRect/>
-          </a:stretch>
-        </p:blipFill>
-        <p:spPr>
-          <a:xfrm>
-            <a:off x="256032" y="6263640"/>
-            <a:ext cx="1679787" cy="292608"/>
-          </a:xfrm>
-          <a:prstGeom prst="rect">
-            <a:avLst/>
-          </a:prstGeom>
-        </p:spPr>
-      </p:pic>
-      <p:sp>
-        <p:nvSpPr>
-          <p:cNvPr id="3" name="Rectangle 2"/>
-          <p:cNvSpPr/>
-          <p:nvPr/>
-        </p:nvSpPr>
-        <p:spPr>
-          <a:xfrm>
-            <a:off x="0" y="6766560"/>
-            <a:ext cx="12188952" cy="91440"/>
-          </a:xfrm>
-          <a:prstGeom prst="rect">
-            <a:avLst/>
-          </a:prstGeom>
-          <a:solidFill>
-            <a:srgbClr val="CC0E1E"/>
-          </a:solidFill>
-          <a:ln>
-            <a:noFill/>
-          </a:ln>
-        </p:spPr>
-        <p:style>
-          <a:lnRef idx="1">
-            <a:schemeClr val="accent1"/>
-          </a:lnRef>
-          <a:fillRef idx="3">
-            <a:schemeClr val="accent1"/>
-          </a:fillRef>
-          <a:effectRef idx="2">
-            <a:schemeClr val="accent1"/>
-          </a:effectRef>
-          <a:fontRef idx="minor">
-            <a:schemeClr val="lt1"/>
-          </a:fontRef>
-        </p:style>
-        <p:txBody>
-          <a:bodyPr rtlCol="0" anchor="ctr"/>
-          <a:lstStyle/>
-          <a:p>
-            <a:pPr algn="ctr"/>
-          </a:p>
-        </p:txBody>
-      </p:sp>
-      <p:sp>
-        <p:nvSpPr>
-          <p:cNvPr id="4" name="TextBox 3"/>
-          <p:cNvSpPr txBox="1"/>
-          <p:nvPr/>
-        </p:nvSpPr>
-        <p:spPr>
-          <a:xfrm>
-            <a:off x="292608" y="201168"/>
-            <a:ext cx="11430000" cy="274320"/>
-          </a:xfrm>
-          <a:prstGeom prst="rect">
-            <a:avLst/>
-          </a:prstGeom>
-          <a:noFill/>
-        </p:spPr>
-        <p:txBody>
-          <a:bodyPr wrap="square">
-            <a:spAutoFit/>
-          </a:bodyPr>
-          <a:lstStyle/>
-          <a:p>
-            <a:pPr algn="l"/>
-            <a:r>
-              <a:rPr sz="1100" b="1">
-                <a:solidFill>
-                  <a:srgbClr val="CC0E1E"/>
-                </a:solidFill>
-                <a:latin typeface="Calibri"/>
-              </a:rPr>
-              <a:t>SUMMARY</a:t>
-            </a:r>
-          </a:p>
-        </p:txBody>
-      </p:sp>
-      <p:sp>
-        <p:nvSpPr>
-          <p:cNvPr id="5" name="TextBox 4"/>
-          <p:cNvSpPr txBox="1"/>
-          <p:nvPr/>
-        </p:nvSpPr>
-        <p:spPr>
-          <a:xfrm>
-            <a:off x="292608" y="475488"/>
-            <a:ext cx="11612880" cy="566928"/>
-          </a:xfrm>
-          <a:prstGeom prst="rect">
-            <a:avLst/>
-          </a:prstGeom>
-          <a:noFill/>
-        </p:spPr>
-        <p:txBody>
-          <a:bodyPr wrap="square">
-            <a:spAutoFit/>
-          </a:bodyPr>
-          <a:lstStyle/>
-          <a:p>
-            <a:pPr algn="l"/>
-            <a:r>
-              <a:rPr sz="2500" b="1">
-                <a:solidFill>
-                  <a:srgbClr val="1A1A1A"/>
-                </a:solidFill>
-                <a:latin typeface="Calibri"/>
-              </a:rPr>
-              <a:t>Next steps</a:t>
-            </a:r>
-          </a:p>
-        </p:txBody>
-      </p:sp>
-      <p:sp>
-        <p:nvSpPr>
-          <p:cNvPr id="6" name="Rectangle 5"/>
-          <p:cNvSpPr/>
-          <p:nvPr/>
-        </p:nvSpPr>
-        <p:spPr>
-          <a:xfrm>
-            <a:off x="292608" y="1005840"/>
-            <a:ext cx="11612880" cy="28000"/>
-          </a:xfrm>
-          <a:prstGeom prst="rect">
-            <a:avLst/>
-          </a:prstGeom>
-          <a:solidFill>
-            <a:srgbClr val="CC0E1E"/>
-          </a:solidFill>
-          <a:ln>
-            <a:noFill/>
-          </a:ln>
-        </p:spPr>
-        <p:style>
-          <a:lnRef idx="1">
-            <a:schemeClr val="accent1"/>
-          </a:lnRef>
-          <a:fillRef idx="3">
-            <a:schemeClr val="accent1"/>
-          </a:fillRef>
-          <a:effectRef idx="2">
-            <a:schemeClr val="accent1"/>
-          </a:effectRef>
-          <a:fontRef idx="minor">
-            <a:schemeClr val="lt1"/>
-          </a:fontRef>
-        </p:style>
-        <p:txBody>
-          <a:bodyPr rtlCol="0" anchor="ctr"/>
-          <a:lstStyle/>
-          <a:p>
-            <a:pPr algn="ctr"/>
-          </a:p>
-        </p:txBody>
-      </p:sp>
-      <p:sp>
-        <p:nvSpPr>
-          <p:cNvPr id="7" name="TextBox 6"/>
-          <p:cNvSpPr txBox="1"/>
-          <p:nvPr/>
-        </p:nvSpPr>
-        <p:spPr>
-          <a:xfrm>
-            <a:off x="11594592" y="6473952"/>
-            <a:ext cx="365760" cy="274320"/>
-          </a:xfrm>
-          <a:prstGeom prst="rect">
-            <a:avLst/>
-          </a:prstGeom>
-          <a:noFill/>
-        </p:spPr>
-        <p:txBody>
-          <a:bodyPr wrap="square">
-            <a:spAutoFit/>
-          </a:bodyPr>
-          <a:lstStyle/>
-          <a:p>
-            <a:pPr algn="r"/>
-            <a:r>
-              <a:rPr sz="1000" b="0">
-                <a:solidFill>
-                  <a:srgbClr val="5A5A5A"/>
-                </a:solidFill>
-                <a:latin typeface="Calibri"/>
-              </a:rPr>
-              <a:t>19</a:t>
-            </a:r>
-          </a:p>
-        </p:txBody>
-      </p:sp>
-      <p:sp>
-        <p:nvSpPr>
-          <p:cNvPr id="8" name="TextBox 7"/>
-          <p:cNvSpPr txBox="1"/>
-          <p:nvPr/>
-        </p:nvSpPr>
-        <p:spPr>
-          <a:xfrm>
-            <a:off x="292608" y="1234440"/>
-            <a:ext cx="11612880" cy="4206240"/>
-          </a:xfrm>
-          <a:prstGeom prst="rect">
-            <a:avLst/>
-          </a:prstGeom>
-          <a:noFill/>
-        </p:spPr>
-        <p:txBody>
-          <a:bodyPr wrap="square">
-            <a:spAutoFit/>
-          </a:bodyPr>
-          <a:lstStyle/>
-          <a:p>
-            <a:pPr>
-              <a:lnSpc>
-                <a:spcPct val="125000"/>
-              </a:lnSpc>
-              <a:spcAft>
-                <a:spcPts val="1000"/>
-              </a:spcAft>
-            </a:pPr>
-            <a:r>
-              <a:rPr sz="1500" b="1">
-                <a:solidFill>
-                  <a:srgbClr val="CC0E1E"/>
-                </a:solidFill>
-                <a:latin typeface="Calibri"/>
-              </a:rPr>
-              <a:t>—  </a:t>
-            </a:r>
-            <a:r>
-              <a:rPr sz="1500">
-                <a:solidFill>
-                  <a:srgbClr val="1A1A1A"/>
-                </a:solidFill>
-                <a:latin typeface="Calibri"/>
-              </a:rPr>
-              <a:t>Align on the FY2027 Sales-to-Dealer bridge (fleet, price, additional growth) — working figure EUR 693,590 (+12.2% vs FY2026 base).</a:t>
-            </a:r>
-          </a:p>
-          <a:p>
-            <a:pPr>
-              <a:lnSpc>
-                <a:spcPct val="125000"/>
-              </a:lnSpc>
-              <a:spcAft>
-                <a:spcPts val="1000"/>
-              </a:spcAft>
-            </a:pPr>
-            <a:r>
-              <a:rPr sz="1500" b="1">
-                <a:solidFill>
-                  <a:srgbClr val="CC0E1E"/>
-                </a:solidFill>
-                <a:latin typeface="Calibri"/>
-              </a:rPr>
-              <a:t>—  </a:t>
-            </a:r>
-            <a:r>
-              <a:rPr sz="1500">
-                <a:solidFill>
-                  <a:srgbClr val="1A1A1A"/>
-                </a:solidFill>
-                <a:latin typeface="Calibri"/>
-              </a:rPr>
-              <a:t>Confirm the incentive alongside the price adjustment; lock the target once that approval is through.</a:t>
-            </a:r>
-          </a:p>
-          <a:p>
-            <a:pPr>
-              <a:lnSpc>
-                <a:spcPct val="125000"/>
-              </a:lnSpc>
-              <a:spcAft>
-                <a:spcPts val="1000"/>
-              </a:spcAft>
-            </a:pPr>
-            <a:r>
-              <a:rPr sz="1500" b="1">
-                <a:solidFill>
-                  <a:srgbClr val="CC0E1E"/>
-                </a:solidFill>
-                <a:latin typeface="Calibri"/>
-              </a:rPr>
-              <a:t>—  </a:t>
-            </a:r>
-            <a:r>
-              <a:rPr sz="1500">
-                <a:solidFill>
-                  <a:srgbClr val="1A1A1A"/>
-                </a:solidFill>
-                <a:latin typeface="Calibri"/>
-              </a:rPr>
-              <a:t>Body parts / Air conditioning / Filters: agree which category we tackle first, and what the joint action is.</a:t>
-            </a:r>
-          </a:p>
-          <a:p>
-            <a:pPr>
-              <a:lnSpc>
-                <a:spcPct val="125000"/>
-              </a:lnSpc>
-              <a:spcAft>
-                <a:spcPts val="1000"/>
-              </a:spcAft>
-            </a:pPr>
-            <a:r>
-              <a:rPr sz="1500" b="1">
-                <a:solidFill>
-                  <a:srgbClr val="CC0E1E"/>
-                </a:solidFill>
-                <a:latin typeface="Calibri"/>
-              </a:rPr>
-              <a:t>—  </a:t>
-            </a:r>
-            <a:r>
-              <a:rPr sz="1500">
-                <a:solidFill>
-                  <a:srgbClr val="1A1A1A"/>
-                </a:solidFill>
-                <a:latin typeface="Calibri"/>
-              </a:rPr>
-              <a:t>Agree part-level Sales-to-Dealer data sharing, effective 01/01/2025.</a:t>
-            </a:r>
-          </a:p>
-          <a:p>
-            <a:pPr>
-              <a:lnSpc>
-                <a:spcPct val="125000"/>
-              </a:lnSpc>
-              <a:spcAft>
-                <a:spcPts val="1000"/>
-              </a:spcAft>
-            </a:pPr>
-            <a:r>
-              <a:rPr sz="1500" b="1">
-                <a:solidFill>
-                  <a:srgbClr val="CC0E1E"/>
-                </a:solidFill>
-                <a:latin typeface="Calibri"/>
-              </a:rPr>
-              <a:t>—  </a:t>
-            </a:r>
-            <a:r>
-              <a:rPr sz="1500">
-                <a:solidFill>
-                  <a:srgbClr val="1A1A1A"/>
-                </a:solidFill>
-                <a:latin typeface="Calibri"/>
-              </a:rPr>
-              <a:t>SPA: CYPRUS proposal, ISZE review and counter-proposal cycle to follow.</a:t>
-            </a:r>
-          </a:p>
-          <a:p>
-            <a:pPr>
-              <a:lnSpc>
-                <a:spcPct val="125000"/>
-              </a:lnSpc>
-              <a:spcAft>
-                <a:spcPts val="1000"/>
-              </a:spcAft>
-            </a:pPr>
-            <a:r>
-              <a:rPr sz="1500" b="1">
-                <a:solidFill>
-                  <a:srgbClr val="CC0E1E"/>
-                </a:solidFill>
-                <a:latin typeface="Calibri"/>
-              </a:rPr>
-              <a:t>—  </a:t>
-            </a:r>
-            <a:r>
-              <a:rPr sz="1500">
-                <a:solidFill>
-                  <a:srgbClr val="1A1A1A"/>
-                </a:solidFill>
-                <a:latin typeface="Calibri"/>
-              </a:rPr>
-              <a:t>IDS 2026: agree dealer visit dates, starting with the lower-scoring dealers.</a:t>
-            </a:r>
-          </a:p>
-        </p:txBody>
-      </p:sp>
     </p:spTree>
   </p:cSld>
   <p:clrMapOvr>
@@ -10323,7 +9671,7 @@
               </a:spcAft>
             </a:pPr>
             <a:r>
-              <a:rPr sz="1300" b="1">
+              <a:rPr sz="1450" b="1">
                 <a:solidFill>
                   <a:srgbClr val="CC0E1E"/>
                 </a:solidFill>
@@ -10332,7 +9680,7 @@
               <a:t>—  </a:t>
             </a:r>
             <a:r>
-              <a:rPr sz="1300">
+              <a:rPr sz="1450">
                 <a:solidFill>
                   <a:srgbClr val="1A1A1A"/>
                 </a:solidFill>
@@ -10351,7 +9699,7 @@
               </a:spcAft>
             </a:pPr>
             <a:r>
-              <a:rPr sz="1300" b="1">
+              <a:rPr sz="1450" b="1">
                 <a:solidFill>
                   <a:srgbClr val="CC0E1E"/>
                 </a:solidFill>
@@ -10360,7 +9708,7 @@
               <a:t>—  </a:t>
             </a:r>
             <a:r>
-              <a:rPr sz="1300">
+              <a:rPr sz="1450">
                 <a:solidFill>
                   <a:srgbClr val="1A1A1A"/>
                 </a:solidFill>
@@ -10379,7 +9727,7 @@
               </a:spcAft>
             </a:pPr>
             <a:r>
-              <a:rPr sz="1300" b="1">
+              <a:rPr sz="1450" b="1">
                 <a:solidFill>
                   <a:srgbClr val="CC0E1E"/>
                 </a:solidFill>
@@ -10388,7 +9736,7 @@
               <a:t>—  </a:t>
             </a:r>
             <a:r>
-              <a:rPr sz="1300">
+              <a:rPr sz="1450">
                 <a:solidFill>
                   <a:srgbClr val="1A1A1A"/>
                 </a:solidFill>
@@ -10407,7 +9755,7 @@
               </a:spcAft>
             </a:pPr>
             <a:r>
-              <a:rPr sz="1300" b="1">
+              <a:rPr sz="1450" b="1">
                 <a:solidFill>
                   <a:srgbClr val="CC0E1E"/>
                 </a:solidFill>
@@ -10416,7 +9764,7 @@
               <a:t>—  </a:t>
             </a:r>
             <a:r>
-              <a:rPr sz="1300">
+              <a:rPr sz="1450">
                 <a:solidFill>
                   <a:srgbClr val="1A1A1A"/>
                 </a:solidFill>
@@ -10435,7 +9783,7 @@
               </a:spcAft>
             </a:pPr>
             <a:r>
-              <a:rPr sz="1300" b="1">
+              <a:rPr sz="1450" b="1">
                 <a:solidFill>
                   <a:srgbClr val="CC0E1E"/>
                 </a:solidFill>
@@ -10444,7 +9792,7 @@
               <a:t>—  </a:t>
             </a:r>
             <a:r>
-              <a:rPr sz="1300">
+              <a:rPr sz="1450">
                 <a:solidFill>
                   <a:srgbClr val="1A1A1A"/>
                 </a:solidFill>
@@ -10463,7 +9811,7 @@
               </a:spcAft>
             </a:pPr>
             <a:r>
-              <a:rPr sz="1300" b="1">
+              <a:rPr sz="1450" b="1">
                 <a:solidFill>
                   <a:srgbClr val="CC0E1E"/>
                 </a:solidFill>
@@ -10472,7 +9820,7 @@
               <a:t>—  </a:t>
             </a:r>
             <a:r>
-              <a:rPr sz="1300">
+              <a:rPr sz="1450">
                 <a:solidFill>
                   <a:srgbClr val="1A1A1A"/>
                 </a:solidFill>
@@ -10491,7 +9839,7 @@
               </a:spcAft>
             </a:pPr>
             <a:r>
-              <a:rPr sz="1300" b="1">
+              <a:rPr sz="1450" b="1">
                 <a:solidFill>
                   <a:srgbClr val="CC0E1E"/>
                 </a:solidFill>
@@ -10500,13 +9848,13 @@
               <a:t>—  </a:t>
             </a:r>
             <a:r>
-              <a:rPr sz="1300">
+              <a:rPr sz="1450">
                 <a:solidFill>
                   <a:srgbClr val="1A1A1A"/>
                 </a:solidFill>
                 <a:latin typeface="Calibri"/>
               </a:rPr>
-              <a:t>Sales-to-Dealer Outlook</a:t>
+              <a:t>Service-Parts Coverage</a:t>
             </a:r>
           </a:p>
           <a:p>
@@ -10519,7 +9867,7 @@
               </a:spcAft>
             </a:pPr>
             <a:r>
-              <a:rPr sz="1300" b="1">
+              <a:rPr sz="1450" b="1">
                 <a:solidFill>
                   <a:srgbClr val="CC0E1E"/>
                 </a:solidFill>
@@ -10528,13 +9876,13 @@
               <a:t>—  </a:t>
             </a:r>
             <a:r>
-              <a:rPr sz="1300">
+              <a:rPr sz="1450">
                 <a:solidFill>
                   <a:srgbClr val="1A1A1A"/>
                 </a:solidFill>
                 <a:latin typeface="Calibri"/>
               </a:rPr>
-              <a:t>GPS Capture</a:t>
+              <a:t>IDS 2026 — Dealer Standard</a:t>
             </a:r>
           </a:p>
           <a:p>
@@ -10547,7 +9895,7 @@
               </a:spcAft>
             </a:pPr>
             <a:r>
-              <a:rPr sz="1300" b="1">
+              <a:rPr sz="1450" b="1">
                 <a:solidFill>
                   <a:srgbClr val="CC0E1E"/>
                 </a:solidFill>
@@ -10556,13 +9904,13 @@
               <a:t>—  </a:t>
             </a:r>
             <a:r>
-              <a:rPr sz="1300">
+              <a:rPr sz="1450">
                 <a:solidFill>
                   <a:srgbClr val="1A1A1A"/>
                 </a:solidFill>
                 <a:latin typeface="Calibri"/>
               </a:rPr>
-              <a:t>Service-Parts Coverage</a:t>
+              <a:t>Fleet &amp; FY2027 Target</a:t>
             </a:r>
           </a:p>
           <a:p>
@@ -10575,7 +9923,7 @@
               </a:spcAft>
             </a:pPr>
             <a:r>
-              <a:rPr sz="1300" b="1">
+              <a:rPr sz="1450" b="1">
                 <a:solidFill>
                   <a:srgbClr val="CC0E1E"/>
                 </a:solidFill>
@@ -10584,13 +9932,13 @@
               <a:t>—  </a:t>
             </a:r>
             <a:r>
-              <a:rPr sz="1300">
+              <a:rPr sz="1450">
                 <a:solidFill>
                   <a:srgbClr val="1A1A1A"/>
                 </a:solidFill>
                 <a:latin typeface="Calibri"/>
               </a:rPr>
-              <a:t>IDS 2026 — Dealer Standard</a:t>
+              <a:t>SPA — status</a:t>
             </a:r>
           </a:p>
           <a:p>
@@ -10603,7 +9951,7 @@
               </a:spcAft>
             </a:pPr>
             <a:r>
-              <a:rPr sz="1300" b="1">
+              <a:rPr sz="1450" b="1">
                 <a:solidFill>
                   <a:srgbClr val="CC0E1E"/>
                 </a:solidFill>
@@ -10612,13 +9960,13 @@
               <a:t>—  </a:t>
             </a:r>
             <a:r>
-              <a:rPr sz="1300">
+              <a:rPr sz="1450">
                 <a:solidFill>
                   <a:srgbClr val="1A1A1A"/>
                 </a:solidFill>
                 <a:latin typeface="Calibri"/>
               </a:rPr>
-              <a:t>Fleet &amp; FY2027 Target</a:t>
+              <a:t>R&amp;M — market discussion</a:t>
             </a:r>
           </a:p>
           <a:p>
@@ -10631,7 +9979,7 @@
               </a:spcAft>
             </a:pPr>
             <a:r>
-              <a:rPr sz="1300" b="1">
+              <a:rPr sz="1450" b="1">
                 <a:solidFill>
                   <a:srgbClr val="CC0E1E"/>
                 </a:solidFill>
@@ -10640,13 +9988,13 @@
               <a:t>—  </a:t>
             </a:r>
             <a:r>
-              <a:rPr sz="1300">
+              <a:rPr sz="1450">
                 <a:solidFill>
                   <a:srgbClr val="1A1A1A"/>
                 </a:solidFill>
                 <a:latin typeface="Calibri"/>
               </a:rPr>
-              <a:t>SPA — status</a:t>
+              <a:t>Data request: part-level Sales-to-Dealer</a:t>
             </a:r>
           </a:p>
           <a:p>
@@ -10659,7 +10007,7 @@
               </a:spcAft>
             </a:pPr>
             <a:r>
-              <a:rPr sz="1300" b="1">
+              <a:rPr sz="1450" b="1">
                 <a:solidFill>
                   <a:srgbClr val="CC0E1E"/>
                 </a:solidFill>
@@ -10668,201 +10016,17 @@
               <a:t>—  </a:t>
             </a:r>
             <a:r>
-              <a:rPr sz="1300">
+              <a:rPr sz="1450">
                 <a:solidFill>
                   <a:srgbClr val="1A1A1A"/>
                 </a:solidFill>
                 <a:latin typeface="Calibri"/>
               </a:rPr>
-              <a:t>R&amp;M — market discussion</a:t>
-            </a:r>
-          </a:p>
-          <a:p>
-            <a:pPr>
-              <a:lnSpc>
-                <a:spcPct val="110000"/>
-              </a:lnSpc>
-              <a:spcAft>
-                <a:spcPts val="1000"/>
-              </a:spcAft>
-            </a:pPr>
-            <a:r>
-              <a:rPr sz="1300" b="1">
-                <a:solidFill>
-                  <a:srgbClr val="CC0E1E"/>
-                </a:solidFill>
-                <a:latin typeface="Calibri"/>
-              </a:rPr>
-              <a:t>—  </a:t>
-            </a:r>
-            <a:r>
-              <a:rPr sz="1300">
-                <a:solidFill>
-                  <a:srgbClr val="1A1A1A"/>
-                </a:solidFill>
-                <a:latin typeface="Calibri"/>
-              </a:rPr>
-              <a:t>Data request: part-level Sales-to-Dealer</a:t>
-            </a:r>
-          </a:p>
-          <a:p>
-            <a:pPr>
-              <a:lnSpc>
-                <a:spcPct val="110000"/>
-              </a:lnSpc>
-              <a:spcAft>
-                <a:spcPts val="1000"/>
-              </a:spcAft>
-            </a:pPr>
-            <a:r>
-              <a:rPr sz="1300" b="1">
-                <a:solidFill>
-                  <a:srgbClr val="CC0E1E"/>
-                </a:solidFill>
-                <a:latin typeface="Calibri"/>
-              </a:rPr>
-              <a:t>—  </a:t>
-            </a:r>
-            <a:r>
-              <a:rPr sz="1300">
-                <a:solidFill>
-                  <a:srgbClr val="1A1A1A"/>
-                </a:solidFill>
-                <a:latin typeface="Calibri"/>
-              </a:rPr>
               <a:t>Next steps</a:t>
             </a:r>
           </a:p>
         </p:txBody>
       </p:sp>
-    </p:spTree>
-  </p:cSld>
-  <p:clrMapOvr>
-    <a:masterClrMapping/>
-  </p:clrMapOvr>
-</p:sld>
-</file>
-
-<file path=ppt/slides/slide20.xml><?xml version="1.0" encoding="utf-8"?>
-<p:sld xmlns:a="http://schemas.openxmlformats.org/drawingml/2006/main" xmlns:p="http://schemas.openxmlformats.org/presentationml/2006/main" xmlns:r="http://schemas.openxmlformats.org/officeDocument/2006/relationships">
-  <p:cSld>
-    <p:bg>
-      <p:bgPr>
-        <a:solidFill>
-          <a:srgbClr val="FFFFFF"/>
-        </a:solidFill>
-        <a:effectLst/>
-      </p:bgPr>
-    </p:bg>
-    <p:spTree>
-      <p:nvGrpSpPr>
-        <p:cNvPr id="1" name=""/>
-        <p:cNvGrpSpPr/>
-        <p:nvPr/>
-      </p:nvGrpSpPr>
-      <p:grpSpPr/>
-      <p:sp>
-        <p:nvSpPr>
-          <p:cNvPr id="2" name="Rectangle 1"/>
-          <p:cNvSpPr/>
-          <p:nvPr/>
-        </p:nvSpPr>
-        <p:spPr>
-          <a:xfrm>
-            <a:off x="0" y="0"/>
-            <a:ext cx="201168" cy="6858000"/>
-          </a:xfrm>
-          <a:prstGeom prst="rect">
-            <a:avLst/>
-          </a:prstGeom>
-          <a:solidFill>
-            <a:srgbClr val="CC0E1E"/>
-          </a:solidFill>
-          <a:ln>
-            <a:noFill/>
-          </a:ln>
-        </p:spPr>
-        <p:style>
-          <a:lnRef idx="1">
-            <a:schemeClr val="accent1"/>
-          </a:lnRef>
-          <a:fillRef idx="3">
-            <a:schemeClr val="accent1"/>
-          </a:fillRef>
-          <a:effectRef idx="2">
-            <a:schemeClr val="accent1"/>
-          </a:effectRef>
-          <a:fontRef idx="minor">
-            <a:schemeClr val="lt1"/>
-          </a:fontRef>
-        </p:style>
-        <p:txBody>
-          <a:bodyPr rtlCol="0" anchor="ctr"/>
-          <a:lstStyle/>
-          <a:p>
-            <a:pPr algn="ctr"/>
-          </a:p>
-        </p:txBody>
-      </p:sp>
-      <p:sp>
-        <p:nvSpPr>
-          <p:cNvPr id="3" name="TextBox 2"/>
-          <p:cNvSpPr txBox="1"/>
-          <p:nvPr/>
-        </p:nvSpPr>
-        <p:spPr>
-          <a:xfrm>
-            <a:off x="2286000" y="3063240"/>
-            <a:ext cx="7772400" cy="457200"/>
-          </a:xfrm>
-          <a:prstGeom prst="rect">
-            <a:avLst/>
-          </a:prstGeom>
-          <a:noFill/>
-        </p:spPr>
-        <p:txBody>
-          <a:bodyPr wrap="square">
-            <a:spAutoFit/>
-          </a:bodyPr>
-          <a:lstStyle/>
-          <a:p>
-            <a:pPr algn="ctr"/>
-            <a:r>
-              <a:rPr sz="1600" b="0">
-                <a:solidFill>
-                  <a:srgbClr val="5A5A5A"/>
-                </a:solidFill>
-                <a:latin typeface="Calibri"/>
-              </a:rPr>
-              <a:t>Moving the World – for You</a:t>
-            </a:r>
-          </a:p>
-        </p:txBody>
-      </p:sp>
-      <p:pic>
-        <p:nvPicPr>
-          <p:cNvPr id="4" name="Picture 3" descr="isuzu_logo_red.png"/>
-          <p:cNvPicPr>
-            <a:picLocks noChangeAspect="1"/>
-          </p:cNvPicPr>
-          <p:nvPr/>
-        </p:nvPicPr>
-        <p:blipFill>
-          <a:blip r:embed="rId2"/>
-          <a:stretch>
-            <a:fillRect/>
-          </a:stretch>
-        </p:blipFill>
-        <p:spPr>
-          <a:xfrm>
-            <a:off x="4631436" y="2468880"/>
-            <a:ext cx="2926080" cy="509704"/>
-          </a:xfrm>
-          <a:prstGeom prst="rect">
-            <a:avLst/>
-          </a:prstGeom>
-        </p:spPr>
-      </p:pic>
     </p:spTree>
   </p:cSld>
   <p:clrMapOvr>
@@ -11252,7 +10416,7 @@
                 </a:solidFill>
                 <a:latin typeface="Calibri"/>
               </a:rPr>
-              <a:t>Commercial parts billing (warranty/campaign excluded) EUR 148K against EUR 173K a year earlier — -14.6% (CY H1 2026 vs CY H1 2025, Jan–Jun).</a:t>
+              <a:t>Commercial parts billing (warranty/campaign excluded) EUR 152K against EUR 173K a year earlier — -12.2% (CY H1 2026 vs CY H1 2025, Jan–Jun).</a:t>
             </a:r>
           </a:p>
           <a:p>
@@ -11280,7 +10444,7 @@
                 </a:solidFill>
                 <a:latin typeface="Calibri"/>
               </a:rPr>
-              <a:t>Largest PN drops: 8974725284 (RAIL; ROOF) EUR -8K, 65 fewer pcs; 8974725274 (RAIL; ROOF) EUR -8K, 64 fewer pcs; 5876150170 (ELEMENT KIT; FUEL FI) [N*R,NPS,QKR,TF*,UC*] EUR -2K, 290 fewer pcs.</a:t>
+              <a:t>Largest PN drops (all categories): 8974725284 (RAIL; ROOF) EUR -8K, 64 fewer pcs; 8974725274 (RAIL; ROOF) EUR -8K, 63 fewer pcs; 5876150170 (ELEMENT KIT; FUEL FI) [N*R,NPS,QKR,TF*,UC*] EUR -2K, 290 fewer pcs.</a:t>
             </a:r>
           </a:p>
           <a:p>
@@ -11308,7 +10472,7 @@
                 </a:solidFill>
                 <a:latin typeface="Calibri"/>
               </a:rPr>
-              <a:t>Largest PN gains: 8972666501 (DISPLAY; MULTI) EUR 3K, 2 more pcs; 8975554500 (FILTER; BLOWER UNIT) [TF*,UC*] EUR 2K, 153 more pcs; 5876150610 (PAD KIT; CALIPER,DIS) [TF*] EUR 1K, 20 more pcs.</a:t>
+              <a:t>Largest PN gains (all categories): 8972666501 (DISPLAY; MULTI) EUR 3K, 2 more pcs; 8975554500 (FILTER; BLOWER UNIT) [TF*,UC*] EUR 2K, 153 more pcs; 5876150610 (PAD KIT; CALIPER,DIS) [TF*] EUR 1K, 20 more pcs.</a:t>
             </a:r>
           </a:p>
           <a:p>
@@ -11336,7 +10500,7 @@
                 </a:solidFill>
                 <a:latin typeface="Calibri"/>
               </a:rPr>
-              <a:t>About EUR 28K of claim-matched PN billing was stripped so this chart is aftermarket demand, not warranty.</a:t>
+              <a:t>Within Exhaust (EUR 7K, +375%): 8983682091 (PIPE; EXH) EUR 1K, 1 more pcs; 8982688122 (PUMP ASM; DEF,DCM SP) EUR 1K, 1 more pcs; 8980139111 (VALVE; EGR) EUR 1K, 7 more pcs.</a:t>
             </a:r>
           </a:p>
         </p:txBody>
@@ -11628,7 +10792,7 @@
                 </a:solidFill>
                 <a:latin typeface="Calibri"/>
               </a:rPr>
-              <a:t>EUR 47,674 (CY H1 2025) to EUR 28,420 (CY H1 2026), down EUR 19,254 (-40%).</a:t>
+              <a:t>EUR 47,674 (CY H1 2025) to EUR 29,311 (CY H1 2026), down EUR 18,364 (-39%).</a:t>
             </a:r>
           </a:p>
           <a:p>
@@ -11684,7 +10848,7 @@
                 </a:solidFill>
                 <a:latin typeface="Calibri"/>
               </a:rPr>
-              <a:t>8974725284 (RAIL; ROOF): EUR 8,915 to EUR 753, 65 fewer pieces.</a:t>
+              <a:t>8974725284 (RAIL; ROOF): EUR 8,915 to EUR 879, 64 fewer pieces.</a:t>
             </a:r>
           </a:p>
           <a:p>
@@ -11712,7 +10876,7 @@
                 </a:solidFill>
                 <a:latin typeface="Calibri"/>
               </a:rPr>
-              <a:t>8974725274 (RAIL; ROOF): EUR 9,543 to EUR 1,507, 64 fewer pieces.</a:t>
+              <a:t>8974725274 (RAIL; ROOF): EUR 9,543 to EUR 1,632, 63 fewer pieces.</a:t>
             </a:r>
           </a:p>
           <a:p>
@@ -12202,7 +11366,7 @@
                 </a:solidFill>
                 <a:latin typeface="Calibri"/>
               </a:rPr>
-              <a:t>EUR 16,613 (CY H1 2025) to EUR 11,624 (CY H1 2026), down EUR 4,989 (-30%).</a:t>
+              <a:t>EUR 16,613 (CY H1 2025) to EUR 12,006 (CY H1 2026), down EUR 4,607 (-28%).</a:t>
             </a:r>
           </a:p>
           <a:p>
@@ -12748,7 +11912,7 @@
                 </a:solidFill>
                 <a:latin typeface="Calibri"/>
               </a:rPr>
-              <a:t>EUR 15,913 (CY H1 2025) to EUR 11,420 (CY H1 2026), down EUR 4,492 (-28%).</a:t>
+              <a:t>EUR 15,913 (CY H1 2025) to EUR 11,756 (CY H1 2026), down EUR 4,157 (-26%).</a:t>
             </a:r>
           </a:p>
           <a:p>
@@ -14016,7 +13180,7 @@
                           </a:solidFill>
                           <a:latin typeface="Calibri"/>
                         </a:rPr>
-                        <a:t>8983314120</a:t>
+                        <a:t>7552422500</a:t>
                       </a:r>
                     </a:p>
                   </a:txBody>
@@ -14039,7 +13203,7 @@
                           </a:solidFill>
                           <a:latin typeface="Calibri"/>
                         </a:rPr>
-                        <a:t>SENSOR; PRESSURE,DPD</a:t>
+                        <a:t>CONTROL UNIT</a:t>
                       </a:r>
                     </a:p>
                   </a:txBody>
@@ -14085,7 +13249,7 @@
                           </a:solidFill>
                           <a:latin typeface="Calibri"/>
                         </a:rPr>
-                        <a:t>EUR 212</a:t>
+                        <a:t>EUR 729</a:t>
                       </a:r>
                     </a:p>
                   </a:txBody>
@@ -14108,7 +13272,7 @@
                           </a:solidFill>
                           <a:latin typeface="Calibri"/>
                         </a:rPr>
-                        <a:t>EUR 843</a:t>
+                        <a:t>EUR 1,458</a:t>
                       </a:r>
                     </a:p>
                   </a:txBody>
@@ -14131,7 +13295,7 @@
                           </a:solidFill>
                           <a:latin typeface="Calibri"/>
                         </a:rPr>
-                        <a:t>EUR 631</a:t>
+                        <a:t>EUR 729</a:t>
                       </a:r>
                     </a:p>
                   </a:txBody>
@@ -14156,7 +13320,7 @@
                           </a:solidFill>
                           <a:latin typeface="Calibri"/>
                         </a:rPr>
-                        <a:t>5876150071</a:t>
+                        <a:t>8983314120</a:t>
                       </a:r>
                     </a:p>
                   </a:txBody>
@@ -14179,7 +13343,7 @@
                           </a:solidFill>
                           <a:latin typeface="Calibri"/>
                         </a:rPr>
-                        <a:t>DISC; CLUTCH</a:t>
+                        <a:t>SENSOR; PRESSURE,DPD</a:t>
                       </a:r>
                     </a:p>
                   </a:txBody>
@@ -14202,7 +13366,7 @@
                           </a:solidFill>
                           <a:latin typeface="Calibri"/>
                         </a:rPr>
-                        <a:t>TF*,UC*</a:t>
+                        <a:t>—</a:t>
                       </a:r>
                     </a:p>
                   </a:txBody>
@@ -14225,7 +13389,7 @@
                           </a:solidFill>
                           <a:latin typeface="Calibri"/>
                         </a:rPr>
-                        <a:t>EUR 294</a:t>
+                        <a:t>EUR 212</a:t>
                       </a:r>
                     </a:p>
                   </a:txBody>
@@ -14248,7 +13412,7 @@
                           </a:solidFill>
                           <a:latin typeface="Calibri"/>
                         </a:rPr>
-                        <a:t>EUR 885</a:t>
+                        <a:t>EUR 843</a:t>
                       </a:r>
                     </a:p>
                   </a:txBody>
@@ -14271,7 +13435,7 @@
                           </a:solidFill>
                           <a:latin typeface="Calibri"/>
                         </a:rPr>
-                        <a:t>EUR 591</a:t>
+                        <a:t>EUR 631</a:t>
                       </a:r>
                     </a:p>
                   </a:txBody>
@@ -14332,7 +13496,7 @@
                 </a:solidFill>
                 <a:latin typeface="Calibri"/>
               </a:rPr>
-              <a:t>Exhaust +375%, Electrical sensors +28%, Injectors +173% — where the commercial volume went.</a:t>
+              <a:t>Exhaust +375%, Electrical sensors +40%, Steering +26% — where the commercial volume went.</a:t>
             </a:r>
           </a:p>
           <a:p>
@@ -15522,7 +14686,7 @@
                 </a:solidFill>
                 <a:latin typeface="Calibri"/>
               </a:rPr>
-              <a:t>SALES-TO-DEALER</a:t>
+              <a:t>SERVICE-PARTS COVERAGE</a:t>
             </a:r>
           </a:p>
         </p:txBody>
@@ -15557,7 +14721,7 @@
                 </a:solidFill>
                 <a:latin typeface="Calibri"/>
               </a:rPr>
-              <a:t>Sales-to-Dealer outlook — FY2027</a:t>
+              <a:t>Service-parts coverage: brake rotor is the clear gap</a:t>
             </a:r>
           </a:p>
         </p:txBody>
@@ -15640,16 +14804,118 @@
           </a:p>
         </p:txBody>
       </p:sp>
-      <p:sp>
-        <p:nvSpPr>
-          <p:cNvPr id="8" name="TextBox 7"/>
+      <p:pic>
+        <p:nvPicPr>
+          <p:cNvPr id="8" name="Picture 7" descr="pms.png"/>
+          <p:cNvPicPr>
+            <a:picLocks noChangeAspect="1"/>
+          </p:cNvPicPr>
+          <p:nvPr/>
+        </p:nvPicPr>
+        <p:blipFill>
+          <a:blip r:embed="rId3"/>
+          <a:stretch>
+            <a:fillRect/>
+          </a:stretch>
+        </p:blipFill>
+        <p:spPr>
+          <a:xfrm>
+            <a:off x="292608" y="2050572"/>
+            <a:ext cx="7178040" cy="3168335"/>
+          </a:xfrm>
+          <a:prstGeom prst="rect">
+            <a:avLst/>
+          </a:prstGeom>
+        </p:spPr>
+      </p:pic>
+      <p:sp>
+        <p:nvSpPr>
+          <p:cNvPr id="9" name="Rectangle 8"/>
+          <p:cNvSpPr/>
+          <p:nvPr/>
+        </p:nvSpPr>
+        <p:spPr>
+          <a:xfrm>
+            <a:off x="7726679" y="1188720"/>
+            <a:ext cx="22000" cy="4892040"/>
+          </a:xfrm>
+          <a:prstGeom prst="rect">
+            <a:avLst/>
+          </a:prstGeom>
+          <a:solidFill>
+            <a:srgbClr val="ECECEC"/>
+          </a:solidFill>
+          <a:ln>
+            <a:noFill/>
+          </a:ln>
+        </p:spPr>
+        <p:style>
+          <a:lnRef idx="1">
+            <a:schemeClr val="accent1"/>
+          </a:lnRef>
+          <a:fillRef idx="3">
+            <a:schemeClr val="accent1"/>
+          </a:fillRef>
+          <a:effectRef idx="2">
+            <a:schemeClr val="accent1"/>
+          </a:effectRef>
+          <a:fontRef idx="minor">
+            <a:schemeClr val="lt1"/>
+          </a:fontRef>
+        </p:style>
+        <p:txBody>
+          <a:bodyPr rtlCol="0" anchor="ctr"/>
+          <a:lstStyle/>
+          <a:p>
+            <a:pPr algn="ctr"/>
+          </a:p>
+        </p:txBody>
+      </p:sp>
+      <p:sp>
+        <p:nvSpPr>
+          <p:cNvPr id="10" name="TextBox 9"/>
           <p:cNvSpPr txBox="1"/>
           <p:nvPr/>
         </p:nvSpPr>
         <p:spPr>
           <a:xfrm>
-            <a:off x="292608" y="1234440"/>
-            <a:ext cx="10881360" cy="3840480"/>
+            <a:off x="7927847" y="1234440"/>
+            <a:ext cx="3886200" cy="320040"/>
+          </a:xfrm>
+          <a:prstGeom prst="rect">
+            <a:avLst/>
+          </a:prstGeom>
+          <a:noFill/>
+        </p:spPr>
+        <p:txBody>
+          <a:bodyPr wrap="square">
+            <a:spAutoFit/>
+          </a:bodyPr>
+          <a:lstStyle/>
+          <a:p>
+            <a:pPr algn="l"/>
+            <a:r>
+              <a:rPr sz="1200" b="1">
+                <a:solidFill>
+                  <a:srgbClr val="CC0E1E"/>
+                </a:solidFill>
+                <a:latin typeface="Calibri"/>
+              </a:rPr>
+              <a:t>TAKEAWAYS</a:t>
+            </a:r>
+          </a:p>
+        </p:txBody>
+      </p:sp>
+      <p:sp>
+        <p:nvSpPr>
+          <p:cNvPr id="11" name="TextBox 10"/>
+          <p:cNvSpPr txBox="1"/>
+          <p:nvPr/>
+        </p:nvSpPr>
+        <p:spPr>
+          <a:xfrm>
+            <a:off x="7927847" y="1691640"/>
+            <a:ext cx="3794760" cy="4343400"/>
           </a:xfrm>
           <a:prstGeom prst="rect">
             <a:avLst/>
@@ -15671,7 +14937,7 @@
               </a:spcAft>
             </a:pPr>
             <a:r>
-              <a:rPr sz="1500" b="1">
+              <a:rPr sz="1250" b="1">
                 <a:solidFill>
                   <a:srgbClr val="CC0E1E"/>
                 </a:solidFill>
@@ -15680,13 +14946,13 @@
               <a:t>—  </a:t>
             </a:r>
             <a:r>
-              <a:rPr sz="1500">
+              <a:rPr sz="1250">
                 <a:solidFill>
                   <a:srgbClr val="1A1A1A"/>
                 </a:solidFill>
                 <a:latin typeface="Calibri"/>
               </a:rPr>
-              <a:t>FY2026 Sales-to-Dealer is EUR 618,085 (working estimate).</a:t>
+              <a:t>Brake rotor 54.4% against 54.5% for the rest of the network.</a:t>
             </a:r>
           </a:p>
           <a:p>
@@ -15699,7 +14965,7 @@
               </a:spcAft>
             </a:pPr>
             <a:r>
-              <a:rPr sz="1500" b="1">
+              <a:rPr sz="1250" b="1">
                 <a:solidFill>
                   <a:srgbClr val="CC0E1E"/>
                 </a:solidFill>
@@ -15708,13 +14974,13 @@
               <a:t>—  </a:t>
             </a:r>
             <a:r>
-              <a:rPr sz="1500">
+              <a:rPr sz="1250">
                 <a:solidFill>
                   <a:srgbClr val="1A1A1A"/>
                 </a:solidFill>
                 <a:latin typeface="Calibri"/>
               </a:rPr>
-              <a:t>The working fleet movement into FY2027 is +5.0%.</a:t>
+              <a:t>Fuel filter 70.3% against 46.2% for the rest of the network.</a:t>
             </a:r>
           </a:p>
           <a:p>
@@ -15727,7 +14993,7 @@
               </a:spcAft>
             </a:pPr>
             <a:r>
-              <a:rPr sz="1500" b="1">
+              <a:rPr sz="1250" b="1">
                 <a:solidFill>
                   <a:srgbClr val="CC0E1E"/>
                 </a:solidFill>
@@ -15736,13 +15002,13 @@
               <a:t>—  </a:t>
             </a:r>
             <a:r>
-              <a:rPr sz="1500">
+              <a:rPr sz="1250">
                 <a:solidFill>
                   <a:srgbClr val="1A1A1A"/>
                 </a:solidFill>
                 <a:latin typeface="Calibri"/>
               </a:rPr>
-              <a:t>Applying fleet movement, the 5% price adjustment and 1.8% additional growth gives a FY2027 Sales-to-Dealer target of EUR 693,590.</a:t>
+              <a:t>Every market here is measured on the same fleet-and-interval model, so the comparison is like-for-like even where the underlying interval assumption is debatable.</a:t>
             </a:r>
           </a:p>
           <a:p>
@@ -15755,7 +15021,7 @@
               </a:spcAft>
             </a:pPr>
             <a:r>
-              <a:rPr sz="1500" b="1">
+              <a:rPr sz="1250" b="1">
                 <a:solidFill>
                   <a:srgbClr val="CC0E1E"/>
                 </a:solidFill>
@@ -15764,13 +15030,13 @@
               <a:t>—  </a:t>
             </a:r>
             <a:r>
-              <a:rPr sz="1500">
+              <a:rPr sz="1250">
                 <a:solidFill>
                   <a:srgbClr val="1A1A1A"/>
                 </a:solidFill>
                 <a:latin typeface="Calibri"/>
               </a:rPr>
-              <a:t>The discussion is held in Sales-to-Dealer amounts; ISZE billing remains an internal reconciliation measure.</a:t>
+              <a:t>Air filter is not shown: the modelled demand base for that category does not hold for this market, so the rate is not quotable.</a:t>
             </a:r>
           </a:p>
         </p:txBody>
